--- a/schools-presentations/A Gymnasiou/A5.2 - Ηλεκτρονικό ταχυδρομείο/A5.2 Μ3 - Διαχείριση Ηλεκτρονικού Ταχυδρομείου.pptx
+++ b/schools-presentations/A Gymnasiou/A5.2 - Ηλεκτρονικό ταχυδρομείο/A5.2 Μ3 - Διαχείριση Ηλεκτρονικού Ταχυδρομείου.pptx
@@ -9,10 +9,10 @@
   </p:notesMasterIdLst>
   <p:sldIdLst>
     <p:sldId id="256" r:id="rId2"/>
-    <p:sldId id="257" r:id="rId3"/>
-    <p:sldId id="258" r:id="rId4"/>
-    <p:sldId id="259" r:id="rId5"/>
-    <p:sldId id="260" r:id="rId6"/>
+    <p:sldId id="260" r:id="rId3"/>
+    <p:sldId id="257" r:id="rId4"/>
+    <p:sldId id="258" r:id="rId5"/>
+    <p:sldId id="259" r:id="rId6"/>
   </p:sldIdLst>
   <p:sldSz cx="12192000" cy="6858000"/>
   <p:notesSz cx="6858000" cy="9144000"/>
@@ -111,48 +111,44 @@
       </a:defRPr>
     </a:lvl9pPr>
   </p:defaultTextStyle>
+  <p:extLst>
+    <p:ext uri="{EFAFB233-063F-42B5-8137-9DF3F51BA10A}">
+      <p15:sldGuideLst xmlns:p15="http://schemas.microsoft.com/office/powerpoint/2012/main"/>
+    </p:ext>
+  </p:extLst>
 </p:presentation>
+</file>
+
+<file path=ppt/revisionInfo.xml><?xml version="1.0" encoding="utf-8"?>
+<p1510:revInfo xmlns:a="http://schemas.openxmlformats.org/drawingml/2006/main" xmlns:r="http://schemas.openxmlformats.org/officeDocument/2006/relationships" xmlns:p1510="http://schemas.microsoft.com/office/powerpoint/2015/10/main">
+  <p1510:revLst>
+    <p1510:client id="{8F38177D-E295-440C-81DB-D73E51E727E2}" v="1" dt="2026-10-21T06:53:42.336"/>
+  </p1510:revLst>
+</p1510:revInfo>
 </file>
 
 <file path=ppt/changesInfos/changesInfo1.xml><?xml version="1.0" encoding="utf-8"?>
 <pc:chgInfo xmlns:a="http://schemas.openxmlformats.org/drawingml/2006/main" xmlns:r="http://schemas.openxmlformats.org/officeDocument/2006/relationships" xmlns:ac="http://schemas.microsoft.com/office/drawing/2013/main/command" xmlns:pc="http://schemas.microsoft.com/office/powerpoint/2013/main/command">
   <pc:docChgLst>
     <pc:chgData name="Άριστος Αρέστη" userId="813aa191-2d4c-464f-9d05-0a7e494d859f" providerId="ADAL" clId="{49C7B61D-1ACF-4AFF-A04E-A3B433E32474}"/>
-    <pc:docChg chg="custSel modSld">
-      <pc:chgData name="Άριστος Αρέστη" userId="813aa191-2d4c-464f-9d05-0a7e494d859f" providerId="ADAL" clId="{49C7B61D-1ACF-4AFF-A04E-A3B433E32474}" dt="2026-09-26T06:34:44.981" v="2" actId="478"/>
+    <pc:docChg chg="custSel addSld delSld modSld sldOrd">
+      <pc:chgData name="Άριστος Αρέστη" userId="813aa191-2d4c-464f-9d05-0a7e494d859f" providerId="ADAL" clId="{49C7B61D-1ACF-4AFF-A04E-A3B433E32474}" dt="2026-10-21T06:53:44.784" v="6"/>
       <pc:docMkLst>
         <pc:docMk/>
       </pc:docMkLst>
-      <pc:sldChg chg="delSp mod">
-        <pc:chgData name="Άριστος Αρέστη" userId="813aa191-2d4c-464f-9d05-0a7e494d859f" providerId="ADAL" clId="{49C7B61D-1ACF-4AFF-A04E-A3B433E32474}" dt="2026-09-26T06:34:44.981" v="2" actId="478"/>
+      <pc:sldChg chg="delSp del mod">
+        <pc:chgData name="Άριστος Αρέστη" userId="813aa191-2d4c-464f-9d05-0a7e494d859f" providerId="ADAL" clId="{49C7B61D-1ACF-4AFF-A04E-A3B433E32474}" dt="2026-10-21T06:47:13.731" v="3" actId="47"/>
         <pc:sldMkLst>
           <pc:docMk/>
           <pc:sldMk cId="1863739521" sldId="260"/>
         </pc:sldMkLst>
-        <pc:picChg chg="del">
-          <ac:chgData name="Άριστος Αρέστη" userId="813aa191-2d4c-464f-9d05-0a7e494d859f" providerId="ADAL" clId="{49C7B61D-1ACF-4AFF-A04E-A3B433E32474}" dt="2026-09-26T06:34:43.415" v="0" actId="478"/>
-          <ac:picMkLst>
-            <pc:docMk/>
-            <pc:sldMk cId="1863739521" sldId="260"/>
-            <ac:picMk id="14" creationId="{00000000-0000-0000-0000-000000000000}"/>
-          </ac:picMkLst>
-        </pc:picChg>
-        <pc:picChg chg="del">
-          <ac:chgData name="Άριστος Αρέστη" userId="813aa191-2d4c-464f-9d05-0a7e494d859f" providerId="ADAL" clId="{49C7B61D-1ACF-4AFF-A04E-A3B433E32474}" dt="2026-09-26T06:34:44.281" v="1" actId="478"/>
-          <ac:picMkLst>
-            <pc:docMk/>
-            <pc:sldMk cId="1863739521" sldId="260"/>
-            <ac:picMk id="15" creationId="{00000000-0000-0000-0000-000000000000}"/>
-          </ac:picMkLst>
-        </pc:picChg>
-        <pc:picChg chg="del">
-          <ac:chgData name="Άριστος Αρέστη" userId="813aa191-2d4c-464f-9d05-0a7e494d859f" providerId="ADAL" clId="{49C7B61D-1ACF-4AFF-A04E-A3B433E32474}" dt="2026-09-26T06:34:44.981" v="2" actId="478"/>
-          <ac:picMkLst>
-            <pc:docMk/>
-            <pc:sldMk cId="1863739521" sldId="260"/>
-            <ac:picMk id="16" creationId="{00000000-0000-0000-0000-000000000000}"/>
-          </ac:picMkLst>
-        </pc:picChg>
+      </pc:sldChg>
+      <pc:sldChg chg="add ord setBg">
+        <pc:chgData name="Άριστος Αρέστη" userId="813aa191-2d4c-464f-9d05-0a7e494d859f" providerId="ADAL" clId="{49C7B61D-1ACF-4AFF-A04E-A3B433E32474}" dt="2026-10-21T06:53:44.784" v="6"/>
+        <pc:sldMkLst>
+          <pc:docMk/>
+          <pc:sldMk cId="2121798388" sldId="260"/>
+        </pc:sldMkLst>
       </pc:sldChg>
     </pc:docChg>
   </pc:docChgLst>
@@ -451,9 +447,7 @@
           <a:bodyPr/>
           <a:lstStyle/>
           <a:p>
-            <a:r>
-              <a:t>Πηγή: Σημειώσεις και Τετράδιο Εργασιών Πληροφορικής Α΄ Γυμνασίου, ενότητα Α.5.2.Μ3.</a:t>
-            </a:r>
+            <a:endParaRPr/>
           </a:p>
         </p:txBody>
       </p:sp>
@@ -733,6 +727,36 @@
         </a:xfrm>
       </p:grpSpPr>
     </p:spTree>
+  </p:cSld>
+  <p:clrMapOvr>
+    <a:masterClrMapping/>
+  </p:clrMapOvr>
+</p:sldLayout>
+</file>
+
+<file path=ppt/slideLayouts/slideLayout2.xml><?xml version="1.0" encoding="utf-8"?>
+<p:sldLayout xmlns:a="http://schemas.openxmlformats.org/drawingml/2006/main" xmlns:r="http://schemas.openxmlformats.org/officeDocument/2006/relationships" xmlns:p="http://schemas.openxmlformats.org/presentationml/2006/main" type="blank">
+  <p:cSld name="Blank">
+    <p:spTree>
+      <p:nvGrpSpPr>
+        <p:cNvPr id="1" name=""/>
+        <p:cNvGrpSpPr/>
+        <p:nvPr/>
+      </p:nvGrpSpPr>
+      <p:grpSpPr>
+        <a:xfrm>
+          <a:off x="0" y="0"/>
+          <a:ext cx="0" cy="0"/>
+          <a:chOff x="0" y="0"/>
+          <a:chExt cx="0" cy="0"/>
+        </a:xfrm>
+      </p:grpSpPr>
+    </p:spTree>
+    <p:extLst>
+      <p:ext uri="{BB962C8B-B14F-4D97-AF65-F5344CB8AC3E}">
+        <p14:creationId xmlns:p14="http://schemas.microsoft.com/office/powerpoint/2010/main" val="173483335"/>
+      </p:ext>
+    </p:extLst>
   </p:cSld>
   <p:clrMapOvr>
     <a:masterClrMapping/>
@@ -767,6 +791,7 @@
   <p:clrMap bg1="lt1" tx1="dk1" bg2="lt2" tx2="dk2" accent1="accent1" accent2="accent2" accent3="accent3" accent4="accent4" accent5="accent5" accent6="accent6" hlink="hlink" folHlink="folHlink"/>
   <p:sldLayoutIdLst>
     <p:sldLayoutId id="2147483649" r:id="rId1"/>
+    <p:sldLayoutId id="2147483650" r:id="rId2"/>
   </p:sldLayoutIdLst>
   <p:txStyles>
     <p:titleStyle>
@@ -1277,14 +1302,6 @@
 <file path=ppt/slides/slide2.xml><?xml version="1.0" encoding="utf-8"?>
 <p:sld xmlns:a="http://schemas.openxmlformats.org/drawingml/2006/main" xmlns:r="http://schemas.openxmlformats.org/officeDocument/2006/relationships" xmlns:p="http://schemas.openxmlformats.org/presentationml/2006/main">
   <p:cSld>
-    <p:bg>
-      <p:bgPr>
-        <a:solidFill>
-          <a:srgbClr val="FFFFFF"/>
-        </a:solidFill>
-        <a:effectLst/>
-      </p:bgPr>
-    </p:bg>
     <p:spTree>
       <p:nvGrpSpPr>
         <p:cNvPr id="1" name=""/>
@@ -1301,10 +1318,1763 @@
       </p:grpSpPr>
       <p:sp>
         <p:nvSpPr>
+          <p:cNvPr id="31" name="Rectangle 30">
+            <a:extLst>
+              <a:ext uri="{FF2B5EF4-FFF2-40B4-BE49-F238E27FC236}">
+                <a16:creationId xmlns:a16="http://schemas.microsoft.com/office/drawing/2014/main" id="{9B781DE6-886A-4E77-8BE3-624F397B50BD}"/>
+              </a:ext>
+            </a:extLst>
+          </p:cNvPr>
+          <p:cNvSpPr>
+            <a:spLocks noGrp="1"/>
+          </p:cNvSpPr>
+          <p:nvPr/>
+        </p:nvSpPr>
+        <p:spPr>
+          <a:xfrm>
+            <a:off x="609600" y="361950"/>
+            <a:ext cx="10972800" cy="590550"/>
+          </a:xfrm>
+          <a:prstGeom prst="rect">
+            <a:avLst/>
+          </a:prstGeom>
+          <a:solidFill>
+            <a:srgbClr val="FFFFFF">
+              <a:alpha val="0"/>
+            </a:srgbClr>
+          </a:solidFill>
+          <a:ln w="0">
+            <a:solidFill>
+              <a:srgbClr val="FFFFFF">
+                <a:alpha val="0"/>
+              </a:srgbClr>
+            </a:solidFill>
+          </a:ln>
+        </p:spPr>
+        <p:txBody>
+          <a:bodyPr lIns="76200" tIns="38100" rIns="76200" bIns="38100" anchor="ctr"/>
+          <a:lstStyle>
+            <a:defPPr algn="l">
+              <a:defRPr sz="2850" b="1">
+                <a:solidFill>
+                  <a:srgbClr val="14213D"/>
+                </a:solidFill>
+                <a:latin typeface="Inter"/>
+                <a:ea typeface="Inter"/>
+                <a:cs typeface="Inter"/>
+              </a:defRPr>
+            </a:defPPr>
+            <a:lvl1pPr algn="l">
+              <a:defRPr sz="2850" b="1">
+                <a:solidFill>
+                  <a:srgbClr val="14213D"/>
+                </a:solidFill>
+                <a:latin typeface="Inter"/>
+                <a:ea typeface="Inter"/>
+                <a:cs typeface="Inter"/>
+              </a:defRPr>
+            </a:lvl1pPr>
+            <a:lvl2pPr algn="l">
+              <a:defRPr sz="2850" b="1">
+                <a:solidFill>
+                  <a:srgbClr val="14213D"/>
+                </a:solidFill>
+                <a:latin typeface="Inter"/>
+                <a:ea typeface="Inter"/>
+                <a:cs typeface="Inter"/>
+              </a:defRPr>
+            </a:lvl2pPr>
+            <a:lvl3pPr algn="l">
+              <a:defRPr sz="2850" b="1">
+                <a:solidFill>
+                  <a:srgbClr val="14213D"/>
+                </a:solidFill>
+                <a:latin typeface="Inter"/>
+                <a:ea typeface="Inter"/>
+                <a:cs typeface="Inter"/>
+              </a:defRPr>
+            </a:lvl3pPr>
+            <a:lvl4pPr algn="l">
+              <a:defRPr sz="2850" b="1">
+                <a:solidFill>
+                  <a:srgbClr val="14213D"/>
+                </a:solidFill>
+                <a:latin typeface="Inter"/>
+                <a:ea typeface="Inter"/>
+                <a:cs typeface="Inter"/>
+              </a:defRPr>
+            </a:lvl4pPr>
+            <a:lvl5pPr algn="l">
+              <a:defRPr sz="2850" b="1">
+                <a:solidFill>
+                  <a:srgbClr val="14213D"/>
+                </a:solidFill>
+                <a:latin typeface="Inter"/>
+                <a:ea typeface="Inter"/>
+                <a:cs typeface="Inter"/>
+              </a:defRPr>
+            </a:lvl5pPr>
+            <a:lvl6pPr algn="l">
+              <a:defRPr sz="2850" b="1">
+                <a:solidFill>
+                  <a:srgbClr val="14213D"/>
+                </a:solidFill>
+                <a:latin typeface="Inter"/>
+                <a:ea typeface="Inter"/>
+                <a:cs typeface="Inter"/>
+              </a:defRPr>
+            </a:lvl6pPr>
+            <a:lvl7pPr algn="l">
+              <a:defRPr sz="2850" b="1">
+                <a:solidFill>
+                  <a:srgbClr val="14213D"/>
+                </a:solidFill>
+                <a:latin typeface="Inter"/>
+                <a:ea typeface="Inter"/>
+                <a:cs typeface="Inter"/>
+              </a:defRPr>
+            </a:lvl7pPr>
+            <a:lvl8pPr algn="l">
+              <a:defRPr sz="2850" b="1">
+                <a:solidFill>
+                  <a:srgbClr val="14213D"/>
+                </a:solidFill>
+                <a:latin typeface="Inter"/>
+                <a:ea typeface="Inter"/>
+                <a:cs typeface="Inter"/>
+              </a:defRPr>
+            </a:lvl8pPr>
+            <a:lvl9pPr algn="l">
+              <a:defRPr sz="2850" b="1">
+                <a:solidFill>
+                  <a:srgbClr val="14213D"/>
+                </a:solidFill>
+                <a:latin typeface="Inter"/>
+                <a:ea typeface="Inter"/>
+                <a:cs typeface="Inter"/>
+              </a:defRPr>
+            </a:lvl9pPr>
+          </a:lstStyle>
+          <a:p>
+            <a:pPr algn="l"/>
+            <a:r>
+              <a:rPr sz="2850" b="1">
+                <a:solidFill>
+                  <a:srgbClr val="14213D"/>
+                </a:solidFill>
+                <a:latin typeface="Inter"/>
+                <a:ea typeface="Inter"/>
+                <a:cs typeface="Inter"/>
+              </a:rPr>
+              <a:t>Γιατί χρησιμοποιούμε συνημμένα;</a:t>
+            </a:r>
+          </a:p>
+        </p:txBody>
+      </p:sp>
+      <p:sp>
+        <p:nvSpPr>
+          <p:cNvPr id="2" name="Rectangle 1">
+            <a:extLst>
+              <a:ext uri="{FF2B5EF4-FFF2-40B4-BE49-F238E27FC236}">
+                <a16:creationId xmlns:a16="http://schemas.microsoft.com/office/drawing/2014/main" id="{C335BC1F-90F4-4F24-8483-8609163B2103}"/>
+              </a:ext>
+            </a:extLst>
+          </p:cNvPr>
+          <p:cNvSpPr>
+            <a:spLocks noGrp="1"/>
+          </p:cNvSpPr>
+          <p:nvPr/>
+        </p:nvSpPr>
+        <p:spPr>
+          <a:xfrm>
+            <a:off x="685800" y="1028700"/>
+            <a:ext cx="10820400" cy="514350"/>
+          </a:xfrm>
+          <a:prstGeom prst="rect">
+            <a:avLst/>
+          </a:prstGeom>
+          <a:solidFill>
+            <a:srgbClr val="FFFFFF">
+              <a:alpha val="0"/>
+            </a:srgbClr>
+          </a:solidFill>
+          <a:ln w="0">
+            <a:solidFill>
+              <a:srgbClr val="FFFFFF">
+                <a:alpha val="0"/>
+              </a:srgbClr>
+            </a:solidFill>
+          </a:ln>
+        </p:spPr>
+        <p:txBody>
+          <a:bodyPr lIns="76200" tIns="38100" rIns="76200" bIns="38100" anchor="ctr"/>
+          <a:lstStyle>
+            <a:defPPr algn="l">
+              <a:defRPr sz="1500" b="0">
+                <a:solidFill>
+                  <a:srgbClr val="3C4A5E"/>
+                </a:solidFill>
+                <a:latin typeface="Inter"/>
+                <a:ea typeface="Inter"/>
+                <a:cs typeface="Inter"/>
+              </a:defRPr>
+            </a:defPPr>
+            <a:lvl1pPr algn="l">
+              <a:defRPr sz="1500" b="0">
+                <a:solidFill>
+                  <a:srgbClr val="3C4A5E"/>
+                </a:solidFill>
+                <a:latin typeface="Inter"/>
+                <a:ea typeface="Inter"/>
+                <a:cs typeface="Inter"/>
+              </a:defRPr>
+            </a:lvl1pPr>
+            <a:lvl2pPr algn="l">
+              <a:defRPr sz="1500" b="0">
+                <a:solidFill>
+                  <a:srgbClr val="3C4A5E"/>
+                </a:solidFill>
+                <a:latin typeface="Inter"/>
+                <a:ea typeface="Inter"/>
+                <a:cs typeface="Inter"/>
+              </a:defRPr>
+            </a:lvl2pPr>
+            <a:lvl3pPr algn="l">
+              <a:defRPr sz="1500" b="0">
+                <a:solidFill>
+                  <a:srgbClr val="3C4A5E"/>
+                </a:solidFill>
+                <a:latin typeface="Inter"/>
+                <a:ea typeface="Inter"/>
+                <a:cs typeface="Inter"/>
+              </a:defRPr>
+            </a:lvl3pPr>
+            <a:lvl4pPr algn="l">
+              <a:defRPr sz="1500" b="0">
+                <a:solidFill>
+                  <a:srgbClr val="3C4A5E"/>
+                </a:solidFill>
+                <a:latin typeface="Inter"/>
+                <a:ea typeface="Inter"/>
+                <a:cs typeface="Inter"/>
+              </a:defRPr>
+            </a:lvl4pPr>
+            <a:lvl5pPr algn="l">
+              <a:defRPr sz="1500" b="0">
+                <a:solidFill>
+                  <a:srgbClr val="3C4A5E"/>
+                </a:solidFill>
+                <a:latin typeface="Inter"/>
+                <a:ea typeface="Inter"/>
+                <a:cs typeface="Inter"/>
+              </a:defRPr>
+            </a:lvl5pPr>
+            <a:lvl6pPr algn="l">
+              <a:defRPr sz="1500" b="0">
+                <a:solidFill>
+                  <a:srgbClr val="3C4A5E"/>
+                </a:solidFill>
+                <a:latin typeface="Inter"/>
+                <a:ea typeface="Inter"/>
+                <a:cs typeface="Inter"/>
+              </a:defRPr>
+            </a:lvl6pPr>
+            <a:lvl7pPr algn="l">
+              <a:defRPr sz="1500" b="0">
+                <a:solidFill>
+                  <a:srgbClr val="3C4A5E"/>
+                </a:solidFill>
+                <a:latin typeface="Inter"/>
+                <a:ea typeface="Inter"/>
+                <a:cs typeface="Inter"/>
+              </a:defRPr>
+            </a:lvl7pPr>
+            <a:lvl8pPr algn="l">
+              <a:defRPr sz="1500" b="0">
+                <a:solidFill>
+                  <a:srgbClr val="3C4A5E"/>
+                </a:solidFill>
+                <a:latin typeface="Inter"/>
+                <a:ea typeface="Inter"/>
+                <a:cs typeface="Inter"/>
+              </a:defRPr>
+            </a:lvl8pPr>
+            <a:lvl9pPr algn="l">
+              <a:defRPr sz="1500" b="0">
+                <a:solidFill>
+                  <a:srgbClr val="3C4A5E"/>
+                </a:solidFill>
+                <a:latin typeface="Inter"/>
+                <a:ea typeface="Inter"/>
+                <a:cs typeface="Inter"/>
+              </a:defRPr>
+            </a:lvl9pPr>
+          </a:lstStyle>
+          <a:p>
+            <a:pPr algn="l"/>
+            <a:r>
+              <a:rPr sz="1500" b="0">
+                <a:solidFill>
+                  <a:srgbClr val="3C4A5E"/>
+                </a:solidFill>
+                <a:latin typeface="Inter"/>
+                <a:ea typeface="Inter"/>
+                <a:cs typeface="Inter"/>
+              </a:rPr>
+              <a:t>Η Μαρία πρέπει να στείλει την εργασία της στον καθηγητή. Το κείμενο του email δεν μεταφέρει το ίδιο το αρχείο.</a:t>
+            </a:r>
+          </a:p>
+        </p:txBody>
+      </p:sp>
+      <p:sp>
+        <p:nvSpPr>
+          <p:cNvPr id="3" name="Rectangle: Rounded Corners 2">
+            <a:extLst>
+              <a:ext uri="{FF2B5EF4-FFF2-40B4-BE49-F238E27FC236}">
+                <a16:creationId xmlns:a16="http://schemas.microsoft.com/office/drawing/2014/main" id="{12E57CED-0D9E-45B4-A649-C377C0ACE7E9}"/>
+              </a:ext>
+            </a:extLst>
+          </p:cNvPr>
+          <p:cNvSpPr>
+            <a:spLocks noGrp="1"/>
+          </p:cNvSpPr>
+          <p:nvPr/>
+        </p:nvSpPr>
+        <p:spPr>
+          <a:xfrm>
+            <a:off x="685800" y="1885950"/>
+            <a:ext cx="3143250" cy="3181350"/>
+          </a:xfrm>
+          <a:prstGeom prst="roundRect">
+            <a:avLst>
+              <a:gd name="adj" fmla="val 2424"/>
+            </a:avLst>
+          </a:prstGeom>
+          <a:solidFill>
+            <a:srgbClr val="FFFFFF"/>
+          </a:solidFill>
+          <a:ln w="9525">
+            <a:solidFill>
+              <a:srgbClr val="CCD6E2"/>
+            </a:solidFill>
+          </a:ln>
+        </p:spPr>
+        <p:txBody>
+          <a:bodyPr/>
+          <a:lstStyle/>
+          <a:p>
+            <a:endParaRPr lang="en-US"/>
+          </a:p>
+        </p:txBody>
+      </p:sp>
+      <p:sp>
+        <p:nvSpPr>
+          <p:cNvPr id="4" name="Rectangle 3">
+            <a:extLst>
+              <a:ext uri="{FF2B5EF4-FFF2-40B4-BE49-F238E27FC236}">
+                <a16:creationId xmlns:a16="http://schemas.microsoft.com/office/drawing/2014/main" id="{B97C72B4-D5B9-47EB-8920-BE8EC2F715B3}"/>
+              </a:ext>
+            </a:extLst>
+          </p:cNvPr>
+          <p:cNvSpPr>
+            <a:spLocks noGrp="1"/>
+          </p:cNvSpPr>
+          <p:nvPr/>
+        </p:nvSpPr>
+        <p:spPr>
+          <a:xfrm>
+            <a:off x="876300" y="2038350"/>
+            <a:ext cx="2762250" cy="419100"/>
+          </a:xfrm>
+          <a:prstGeom prst="rect">
+            <a:avLst/>
+          </a:prstGeom>
+          <a:solidFill>
+            <a:srgbClr val="FFFFFF">
+              <a:alpha val="0"/>
+            </a:srgbClr>
+          </a:solidFill>
+          <a:ln w="0">
+            <a:solidFill>
+              <a:srgbClr val="FFFFFF">
+                <a:alpha val="0"/>
+              </a:srgbClr>
+            </a:solidFill>
+          </a:ln>
+        </p:spPr>
+        <p:txBody>
+          <a:bodyPr lIns="76200" tIns="38100" rIns="76200" bIns="38100" anchor="ctr"/>
+          <a:lstStyle>
+            <a:defPPr algn="ctr">
+              <a:defRPr sz="1650" b="1">
+                <a:solidFill>
+                  <a:srgbClr val="14213D"/>
+                </a:solidFill>
+                <a:latin typeface="Inter"/>
+                <a:ea typeface="Inter"/>
+                <a:cs typeface="Inter"/>
+              </a:defRPr>
+            </a:defPPr>
+            <a:lvl1pPr algn="ctr">
+              <a:defRPr sz="1650" b="1">
+                <a:solidFill>
+                  <a:srgbClr val="14213D"/>
+                </a:solidFill>
+                <a:latin typeface="Inter"/>
+                <a:ea typeface="Inter"/>
+                <a:cs typeface="Inter"/>
+              </a:defRPr>
+            </a:lvl1pPr>
+            <a:lvl2pPr algn="ctr">
+              <a:defRPr sz="1650" b="1">
+                <a:solidFill>
+                  <a:srgbClr val="14213D"/>
+                </a:solidFill>
+                <a:latin typeface="Inter"/>
+                <a:ea typeface="Inter"/>
+                <a:cs typeface="Inter"/>
+              </a:defRPr>
+            </a:lvl2pPr>
+            <a:lvl3pPr algn="ctr">
+              <a:defRPr sz="1650" b="1">
+                <a:solidFill>
+                  <a:srgbClr val="14213D"/>
+                </a:solidFill>
+                <a:latin typeface="Inter"/>
+                <a:ea typeface="Inter"/>
+                <a:cs typeface="Inter"/>
+              </a:defRPr>
+            </a:lvl3pPr>
+            <a:lvl4pPr algn="ctr">
+              <a:defRPr sz="1650" b="1">
+                <a:solidFill>
+                  <a:srgbClr val="14213D"/>
+                </a:solidFill>
+                <a:latin typeface="Inter"/>
+                <a:ea typeface="Inter"/>
+                <a:cs typeface="Inter"/>
+              </a:defRPr>
+            </a:lvl4pPr>
+            <a:lvl5pPr algn="ctr">
+              <a:defRPr sz="1650" b="1">
+                <a:solidFill>
+                  <a:srgbClr val="14213D"/>
+                </a:solidFill>
+                <a:latin typeface="Inter"/>
+                <a:ea typeface="Inter"/>
+                <a:cs typeface="Inter"/>
+              </a:defRPr>
+            </a:lvl5pPr>
+            <a:lvl6pPr algn="ctr">
+              <a:defRPr sz="1650" b="1">
+                <a:solidFill>
+                  <a:srgbClr val="14213D"/>
+                </a:solidFill>
+                <a:latin typeface="Inter"/>
+                <a:ea typeface="Inter"/>
+                <a:cs typeface="Inter"/>
+              </a:defRPr>
+            </a:lvl6pPr>
+            <a:lvl7pPr algn="ctr">
+              <a:defRPr sz="1650" b="1">
+                <a:solidFill>
+                  <a:srgbClr val="14213D"/>
+                </a:solidFill>
+                <a:latin typeface="Inter"/>
+                <a:ea typeface="Inter"/>
+                <a:cs typeface="Inter"/>
+              </a:defRPr>
+            </a:lvl7pPr>
+            <a:lvl8pPr algn="ctr">
+              <a:defRPr sz="1650" b="1">
+                <a:solidFill>
+                  <a:srgbClr val="14213D"/>
+                </a:solidFill>
+                <a:latin typeface="Inter"/>
+                <a:ea typeface="Inter"/>
+                <a:cs typeface="Inter"/>
+              </a:defRPr>
+            </a:lvl8pPr>
+            <a:lvl9pPr algn="ctr">
+              <a:defRPr sz="1650" b="1">
+                <a:solidFill>
+                  <a:srgbClr val="14213D"/>
+                </a:solidFill>
+                <a:latin typeface="Inter"/>
+                <a:ea typeface="Inter"/>
+                <a:cs typeface="Inter"/>
+              </a:defRPr>
+            </a:lvl9pPr>
+          </a:lstStyle>
+          <a:p>
+            <a:pPr algn="ctr"/>
+            <a:r>
+              <a:rPr sz="1650" b="1">
+                <a:solidFill>
+                  <a:srgbClr val="14213D"/>
+                </a:solidFill>
+                <a:latin typeface="Inter"/>
+                <a:ea typeface="Inter"/>
+                <a:cs typeface="Inter"/>
+              </a:rPr>
+              <a:t>Αρχεία στον υπολογιστή</a:t>
+            </a:r>
+          </a:p>
+        </p:txBody>
+      </p:sp>
+      <p:sp>
+        <p:nvSpPr>
+          <p:cNvPr id="5" name="Rectangle: Rounded Corners 4">
+            <a:extLst>
+              <a:ext uri="{FF2B5EF4-FFF2-40B4-BE49-F238E27FC236}">
+                <a16:creationId xmlns:a16="http://schemas.microsoft.com/office/drawing/2014/main" id="{79BEBC24-C107-4672-A00D-1C79461CF2BB}"/>
+              </a:ext>
+            </a:extLst>
+          </p:cNvPr>
+          <p:cNvSpPr>
+            <a:spLocks noGrp="1"/>
+          </p:cNvSpPr>
+          <p:nvPr/>
+        </p:nvSpPr>
+        <p:spPr>
+          <a:xfrm>
+            <a:off x="971550" y="2647950"/>
+            <a:ext cx="704850" cy="514350"/>
+          </a:xfrm>
+          <a:prstGeom prst="roundRect">
+            <a:avLst>
+              <a:gd name="adj" fmla="val 14815"/>
+            </a:avLst>
+          </a:prstGeom>
+          <a:solidFill>
+            <a:srgbClr val="E74C3C"/>
+          </a:solidFill>
+          <a:ln w="9525">
+            <a:solidFill>
+              <a:srgbClr val="E74C3C"/>
+            </a:solidFill>
+          </a:ln>
+        </p:spPr>
+        <p:txBody>
+          <a:bodyPr/>
+          <a:lstStyle/>
+          <a:p>
+            <a:endParaRPr lang="en-US"/>
+          </a:p>
+        </p:txBody>
+      </p:sp>
+      <p:sp>
+        <p:nvSpPr>
+          <p:cNvPr id="6" name="Rectangle 5">
+            <a:extLst>
+              <a:ext uri="{FF2B5EF4-FFF2-40B4-BE49-F238E27FC236}">
+                <a16:creationId xmlns:a16="http://schemas.microsoft.com/office/drawing/2014/main" id="{ABACC734-FC0E-4518-BAC1-319988AACF9C}"/>
+              </a:ext>
+            </a:extLst>
+          </p:cNvPr>
+          <p:cNvSpPr>
+            <a:spLocks noGrp="1"/>
+          </p:cNvSpPr>
+          <p:nvPr/>
+        </p:nvSpPr>
+        <p:spPr>
+          <a:xfrm>
+            <a:off x="990600" y="2695575"/>
+            <a:ext cx="666750" cy="419100"/>
+          </a:xfrm>
+          <a:prstGeom prst="rect">
+            <a:avLst/>
+          </a:prstGeom>
+          <a:solidFill>
+            <a:srgbClr val="FFFFFF">
+              <a:alpha val="0"/>
+            </a:srgbClr>
+          </a:solidFill>
+          <a:ln w="0">
+            <a:solidFill>
+              <a:srgbClr val="FFFFFF">
+                <a:alpha val="0"/>
+              </a:srgbClr>
+            </a:solidFill>
+          </a:ln>
+        </p:spPr>
+        <p:txBody>
+          <a:bodyPr lIns="76200" tIns="38100" rIns="76200" bIns="38100" anchor="ctr"/>
+          <a:lstStyle>
+            <a:defPPr algn="ctr">
+              <a:defRPr sz="1275" b="1">
+                <a:solidFill>
+                  <a:srgbClr val="FFFFFF"/>
+                </a:solidFill>
+                <a:latin typeface="Inter"/>
+                <a:ea typeface="Inter"/>
+                <a:cs typeface="Inter"/>
+              </a:defRPr>
+            </a:defPPr>
+            <a:lvl1pPr algn="ctr">
+              <a:defRPr sz="1275" b="1">
+                <a:solidFill>
+                  <a:srgbClr val="FFFFFF"/>
+                </a:solidFill>
+                <a:latin typeface="Inter"/>
+                <a:ea typeface="Inter"/>
+                <a:cs typeface="Inter"/>
+              </a:defRPr>
+            </a:lvl1pPr>
+            <a:lvl2pPr algn="ctr">
+              <a:defRPr sz="1275" b="1">
+                <a:solidFill>
+                  <a:srgbClr val="FFFFFF"/>
+                </a:solidFill>
+                <a:latin typeface="Inter"/>
+                <a:ea typeface="Inter"/>
+                <a:cs typeface="Inter"/>
+              </a:defRPr>
+            </a:lvl2pPr>
+            <a:lvl3pPr algn="ctr">
+              <a:defRPr sz="1275" b="1">
+                <a:solidFill>
+                  <a:srgbClr val="FFFFFF"/>
+                </a:solidFill>
+                <a:latin typeface="Inter"/>
+                <a:ea typeface="Inter"/>
+                <a:cs typeface="Inter"/>
+              </a:defRPr>
+            </a:lvl3pPr>
+            <a:lvl4pPr algn="ctr">
+              <a:defRPr sz="1275" b="1">
+                <a:solidFill>
+                  <a:srgbClr val="FFFFFF"/>
+                </a:solidFill>
+                <a:latin typeface="Inter"/>
+                <a:ea typeface="Inter"/>
+                <a:cs typeface="Inter"/>
+              </a:defRPr>
+            </a:lvl4pPr>
+            <a:lvl5pPr algn="ctr">
+              <a:defRPr sz="1275" b="1">
+                <a:solidFill>
+                  <a:srgbClr val="FFFFFF"/>
+                </a:solidFill>
+                <a:latin typeface="Inter"/>
+                <a:ea typeface="Inter"/>
+                <a:cs typeface="Inter"/>
+              </a:defRPr>
+            </a:lvl5pPr>
+            <a:lvl6pPr algn="ctr">
+              <a:defRPr sz="1275" b="1">
+                <a:solidFill>
+                  <a:srgbClr val="FFFFFF"/>
+                </a:solidFill>
+                <a:latin typeface="Inter"/>
+                <a:ea typeface="Inter"/>
+                <a:cs typeface="Inter"/>
+              </a:defRPr>
+            </a:lvl6pPr>
+            <a:lvl7pPr algn="ctr">
+              <a:defRPr sz="1275" b="1">
+                <a:solidFill>
+                  <a:srgbClr val="FFFFFF"/>
+                </a:solidFill>
+                <a:latin typeface="Inter"/>
+                <a:ea typeface="Inter"/>
+                <a:cs typeface="Inter"/>
+              </a:defRPr>
+            </a:lvl7pPr>
+            <a:lvl8pPr algn="ctr">
+              <a:defRPr sz="1275" b="1">
+                <a:solidFill>
+                  <a:srgbClr val="FFFFFF"/>
+                </a:solidFill>
+                <a:latin typeface="Inter"/>
+                <a:ea typeface="Inter"/>
+                <a:cs typeface="Inter"/>
+              </a:defRPr>
+            </a:lvl8pPr>
+            <a:lvl9pPr algn="ctr">
+              <a:defRPr sz="1275" b="1">
+                <a:solidFill>
+                  <a:srgbClr val="FFFFFF"/>
+                </a:solidFill>
+                <a:latin typeface="Inter"/>
+                <a:ea typeface="Inter"/>
+                <a:cs typeface="Inter"/>
+              </a:defRPr>
+            </a:lvl9pPr>
+          </a:lstStyle>
+          <a:p>
+            <a:pPr algn="ctr"/>
+            <a:r>
+              <a:rPr sz="1275" b="1">
+                <a:solidFill>
+                  <a:srgbClr val="FFFFFF"/>
+                </a:solidFill>
+                <a:latin typeface="Inter"/>
+                <a:ea typeface="Inter"/>
+                <a:cs typeface="Inter"/>
+              </a:rPr>
+              <a:t>PDF</a:t>
+            </a:r>
+          </a:p>
+        </p:txBody>
+      </p:sp>
+      <p:sp>
+        <p:nvSpPr>
+          <p:cNvPr id="7" name="Rectangle 6">
+            <a:extLst>
+              <a:ext uri="{FF2B5EF4-FFF2-40B4-BE49-F238E27FC236}">
+                <a16:creationId xmlns:a16="http://schemas.microsoft.com/office/drawing/2014/main" id="{E30676FD-D318-48C7-A25B-24FEF51515E7}"/>
+              </a:ext>
+            </a:extLst>
+          </p:cNvPr>
+          <p:cNvSpPr>
+            <a:spLocks noGrp="1"/>
+          </p:cNvSpPr>
+          <p:nvPr/>
+        </p:nvSpPr>
+        <p:spPr>
+          <a:xfrm>
+            <a:off x="1809750" y="2676525"/>
+            <a:ext cx="1714500" cy="457200"/>
+          </a:xfrm>
+          <a:prstGeom prst="rect">
+            <a:avLst/>
+          </a:prstGeom>
+          <a:solidFill>
+            <a:srgbClr val="FFFFFF">
+              <a:alpha val="0"/>
+            </a:srgbClr>
+          </a:solidFill>
+          <a:ln w="0">
+            <a:solidFill>
+              <a:srgbClr val="FFFFFF">
+                <a:alpha val="0"/>
+              </a:srgbClr>
+            </a:solidFill>
+          </a:ln>
+        </p:spPr>
+        <p:txBody>
+          <a:bodyPr lIns="76200" tIns="38100" rIns="76200" bIns="38100" anchor="ctr"/>
+          <a:lstStyle>
+            <a:defPPr algn="l">
+              <a:defRPr sz="1350" b="0">
+                <a:solidFill>
+                  <a:srgbClr val="25364D"/>
+                </a:solidFill>
+                <a:latin typeface="Inter"/>
+                <a:ea typeface="Inter"/>
+                <a:cs typeface="Inter"/>
+              </a:defRPr>
+            </a:defPPr>
+            <a:lvl1pPr algn="l">
+              <a:defRPr sz="1350" b="0">
+                <a:solidFill>
+                  <a:srgbClr val="25364D"/>
+                </a:solidFill>
+                <a:latin typeface="Inter"/>
+                <a:ea typeface="Inter"/>
+                <a:cs typeface="Inter"/>
+              </a:defRPr>
+            </a:lvl1pPr>
+            <a:lvl2pPr algn="l">
+              <a:defRPr sz="1350" b="0">
+                <a:solidFill>
+                  <a:srgbClr val="25364D"/>
+                </a:solidFill>
+                <a:latin typeface="Inter"/>
+                <a:ea typeface="Inter"/>
+                <a:cs typeface="Inter"/>
+              </a:defRPr>
+            </a:lvl2pPr>
+            <a:lvl3pPr algn="l">
+              <a:defRPr sz="1350" b="0">
+                <a:solidFill>
+                  <a:srgbClr val="25364D"/>
+                </a:solidFill>
+                <a:latin typeface="Inter"/>
+                <a:ea typeface="Inter"/>
+                <a:cs typeface="Inter"/>
+              </a:defRPr>
+            </a:lvl3pPr>
+            <a:lvl4pPr algn="l">
+              <a:defRPr sz="1350" b="0">
+                <a:solidFill>
+                  <a:srgbClr val="25364D"/>
+                </a:solidFill>
+                <a:latin typeface="Inter"/>
+                <a:ea typeface="Inter"/>
+                <a:cs typeface="Inter"/>
+              </a:defRPr>
+            </a:lvl4pPr>
+            <a:lvl5pPr algn="l">
+              <a:defRPr sz="1350" b="0">
+                <a:solidFill>
+                  <a:srgbClr val="25364D"/>
+                </a:solidFill>
+                <a:latin typeface="Inter"/>
+                <a:ea typeface="Inter"/>
+                <a:cs typeface="Inter"/>
+              </a:defRPr>
+            </a:lvl5pPr>
+            <a:lvl6pPr algn="l">
+              <a:defRPr sz="1350" b="0">
+                <a:solidFill>
+                  <a:srgbClr val="25364D"/>
+                </a:solidFill>
+                <a:latin typeface="Inter"/>
+                <a:ea typeface="Inter"/>
+                <a:cs typeface="Inter"/>
+              </a:defRPr>
+            </a:lvl6pPr>
+            <a:lvl7pPr algn="l">
+              <a:defRPr sz="1350" b="0">
+                <a:solidFill>
+                  <a:srgbClr val="25364D"/>
+                </a:solidFill>
+                <a:latin typeface="Inter"/>
+                <a:ea typeface="Inter"/>
+                <a:cs typeface="Inter"/>
+              </a:defRPr>
+            </a:lvl7pPr>
+            <a:lvl8pPr algn="l">
+              <a:defRPr sz="1350" b="0">
+                <a:solidFill>
+                  <a:srgbClr val="25364D"/>
+                </a:solidFill>
+                <a:latin typeface="Inter"/>
+                <a:ea typeface="Inter"/>
+                <a:cs typeface="Inter"/>
+              </a:defRPr>
+            </a:lvl8pPr>
+            <a:lvl9pPr algn="l">
+              <a:defRPr sz="1350" b="0">
+                <a:solidFill>
+                  <a:srgbClr val="25364D"/>
+                </a:solidFill>
+                <a:latin typeface="Inter"/>
+                <a:ea typeface="Inter"/>
+                <a:cs typeface="Inter"/>
+              </a:defRPr>
+            </a:lvl9pPr>
+          </a:lstStyle>
+          <a:p>
+            <a:pPr algn="l"/>
+            <a:r>
+              <a:rPr sz="1350" b="0">
+                <a:solidFill>
+                  <a:srgbClr val="25364D"/>
+                </a:solidFill>
+                <a:latin typeface="Inter"/>
+                <a:ea typeface="Inter"/>
+                <a:cs typeface="Inter"/>
+              </a:rPr>
+              <a:t>Εργασία.pdf</a:t>
+            </a:r>
+          </a:p>
+        </p:txBody>
+      </p:sp>
+      <p:sp>
+        <p:nvSpPr>
+          <p:cNvPr id="8" name="Rectangle: Rounded Corners 7">
+            <a:extLst>
+              <a:ext uri="{FF2B5EF4-FFF2-40B4-BE49-F238E27FC236}">
+                <a16:creationId xmlns:a16="http://schemas.microsoft.com/office/drawing/2014/main" id="{8EDFD083-13ED-4548-B862-D158B8D8B32F}"/>
+              </a:ext>
+            </a:extLst>
+          </p:cNvPr>
+          <p:cNvSpPr>
+            <a:spLocks noGrp="1"/>
+          </p:cNvSpPr>
+          <p:nvPr/>
+        </p:nvSpPr>
+        <p:spPr>
+          <a:xfrm>
+            <a:off x="971550" y="3371850"/>
+            <a:ext cx="704850" cy="514350"/>
+          </a:xfrm>
+          <a:prstGeom prst="roundRect">
+            <a:avLst>
+              <a:gd name="adj" fmla="val 14815"/>
+            </a:avLst>
+          </a:prstGeom>
+          <a:solidFill>
+            <a:srgbClr val="E6A23C"/>
+          </a:solidFill>
+          <a:ln w="9525">
+            <a:solidFill>
+              <a:srgbClr val="E6A23C"/>
+            </a:solidFill>
+          </a:ln>
+        </p:spPr>
+        <p:txBody>
+          <a:bodyPr/>
+          <a:lstStyle/>
+          <a:p>
+            <a:endParaRPr lang="en-US"/>
+          </a:p>
+        </p:txBody>
+      </p:sp>
+      <p:sp>
+        <p:nvSpPr>
+          <p:cNvPr id="9" name="Rectangle 8">
+            <a:extLst>
+              <a:ext uri="{FF2B5EF4-FFF2-40B4-BE49-F238E27FC236}">
+                <a16:creationId xmlns:a16="http://schemas.microsoft.com/office/drawing/2014/main" id="{E146F7EC-4A68-44E9-9BFD-4BA951EE4D57}"/>
+              </a:ext>
+            </a:extLst>
+          </p:cNvPr>
+          <p:cNvSpPr>
+            <a:spLocks noGrp="1"/>
+          </p:cNvSpPr>
+          <p:nvPr/>
+        </p:nvSpPr>
+        <p:spPr>
+          <a:xfrm>
+            <a:off x="990600" y="3419475"/>
+            <a:ext cx="666750" cy="419100"/>
+          </a:xfrm>
+          <a:prstGeom prst="rect">
+            <a:avLst/>
+          </a:prstGeom>
+          <a:solidFill>
+            <a:srgbClr val="FFFFFF">
+              <a:alpha val="0"/>
+            </a:srgbClr>
+          </a:solidFill>
+          <a:ln w="0">
+            <a:solidFill>
+              <a:srgbClr val="FFFFFF">
+                <a:alpha val="0"/>
+              </a:srgbClr>
+            </a:solidFill>
+          </a:ln>
+        </p:spPr>
+        <p:txBody>
+          <a:bodyPr lIns="76200" tIns="38100" rIns="76200" bIns="38100" anchor="ctr"/>
+          <a:lstStyle>
+            <a:defPPr algn="ctr">
+              <a:defRPr sz="1275" b="1">
+                <a:solidFill>
+                  <a:srgbClr val="FFFFFF"/>
+                </a:solidFill>
+                <a:latin typeface="Inter"/>
+                <a:ea typeface="Inter"/>
+                <a:cs typeface="Inter"/>
+              </a:defRPr>
+            </a:defPPr>
+            <a:lvl1pPr algn="ctr">
+              <a:defRPr sz="1275" b="1">
+                <a:solidFill>
+                  <a:srgbClr val="FFFFFF"/>
+                </a:solidFill>
+                <a:latin typeface="Inter"/>
+                <a:ea typeface="Inter"/>
+                <a:cs typeface="Inter"/>
+              </a:defRPr>
+            </a:lvl1pPr>
+            <a:lvl2pPr algn="ctr">
+              <a:defRPr sz="1275" b="1">
+                <a:solidFill>
+                  <a:srgbClr val="FFFFFF"/>
+                </a:solidFill>
+                <a:latin typeface="Inter"/>
+                <a:ea typeface="Inter"/>
+                <a:cs typeface="Inter"/>
+              </a:defRPr>
+            </a:lvl2pPr>
+            <a:lvl3pPr algn="ctr">
+              <a:defRPr sz="1275" b="1">
+                <a:solidFill>
+                  <a:srgbClr val="FFFFFF"/>
+                </a:solidFill>
+                <a:latin typeface="Inter"/>
+                <a:ea typeface="Inter"/>
+                <a:cs typeface="Inter"/>
+              </a:defRPr>
+            </a:lvl3pPr>
+            <a:lvl4pPr algn="ctr">
+              <a:defRPr sz="1275" b="1">
+                <a:solidFill>
+                  <a:srgbClr val="FFFFFF"/>
+                </a:solidFill>
+                <a:latin typeface="Inter"/>
+                <a:ea typeface="Inter"/>
+                <a:cs typeface="Inter"/>
+              </a:defRPr>
+            </a:lvl4pPr>
+            <a:lvl5pPr algn="ctr">
+              <a:defRPr sz="1275" b="1">
+                <a:solidFill>
+                  <a:srgbClr val="FFFFFF"/>
+                </a:solidFill>
+                <a:latin typeface="Inter"/>
+                <a:ea typeface="Inter"/>
+                <a:cs typeface="Inter"/>
+              </a:defRPr>
+            </a:lvl5pPr>
+            <a:lvl6pPr algn="ctr">
+              <a:defRPr sz="1275" b="1">
+                <a:solidFill>
+                  <a:srgbClr val="FFFFFF"/>
+                </a:solidFill>
+                <a:latin typeface="Inter"/>
+                <a:ea typeface="Inter"/>
+                <a:cs typeface="Inter"/>
+              </a:defRPr>
+            </a:lvl6pPr>
+            <a:lvl7pPr algn="ctr">
+              <a:defRPr sz="1275" b="1">
+                <a:solidFill>
+                  <a:srgbClr val="FFFFFF"/>
+                </a:solidFill>
+                <a:latin typeface="Inter"/>
+                <a:ea typeface="Inter"/>
+                <a:cs typeface="Inter"/>
+              </a:defRPr>
+            </a:lvl7pPr>
+            <a:lvl8pPr algn="ctr">
+              <a:defRPr sz="1275" b="1">
+                <a:solidFill>
+                  <a:srgbClr val="FFFFFF"/>
+                </a:solidFill>
+                <a:latin typeface="Inter"/>
+                <a:ea typeface="Inter"/>
+                <a:cs typeface="Inter"/>
+              </a:defRPr>
+            </a:lvl8pPr>
+            <a:lvl9pPr algn="ctr">
+              <a:defRPr sz="1275" b="1">
+                <a:solidFill>
+                  <a:srgbClr val="FFFFFF"/>
+                </a:solidFill>
+                <a:latin typeface="Inter"/>
+                <a:ea typeface="Inter"/>
+                <a:cs typeface="Inter"/>
+              </a:defRPr>
+            </a:lvl9pPr>
+          </a:lstStyle>
+          <a:p>
+            <a:pPr algn="ctr"/>
+            <a:r>
+              <a:rPr sz="1275" b="1">
+                <a:solidFill>
+                  <a:srgbClr val="FFFFFF"/>
+                </a:solidFill>
+                <a:latin typeface="Inter"/>
+                <a:ea typeface="Inter"/>
+                <a:cs typeface="Inter"/>
+              </a:rPr>
+              <a:t>JPG</a:t>
+            </a:r>
+          </a:p>
+        </p:txBody>
+      </p:sp>
+      <p:sp>
+        <p:nvSpPr>
+          <p:cNvPr id="10" name="Rectangle 9">
+            <a:extLst>
+              <a:ext uri="{FF2B5EF4-FFF2-40B4-BE49-F238E27FC236}">
+                <a16:creationId xmlns:a16="http://schemas.microsoft.com/office/drawing/2014/main" id="{F1B83F22-B759-4C93-AF01-8B1B74BD0D5B}"/>
+              </a:ext>
+            </a:extLst>
+          </p:cNvPr>
+          <p:cNvSpPr>
+            <a:spLocks noGrp="1"/>
+          </p:cNvSpPr>
+          <p:nvPr/>
+        </p:nvSpPr>
+        <p:spPr>
+          <a:xfrm>
+            <a:off x="1809750" y="3400425"/>
+            <a:ext cx="1714500" cy="457200"/>
+          </a:xfrm>
+          <a:prstGeom prst="rect">
+            <a:avLst/>
+          </a:prstGeom>
+          <a:solidFill>
+            <a:srgbClr val="FFFFFF">
+              <a:alpha val="0"/>
+            </a:srgbClr>
+          </a:solidFill>
+          <a:ln w="0">
+            <a:solidFill>
+              <a:srgbClr val="FFFFFF">
+                <a:alpha val="0"/>
+              </a:srgbClr>
+            </a:solidFill>
+          </a:ln>
+        </p:spPr>
+        <p:txBody>
+          <a:bodyPr lIns="76200" tIns="38100" rIns="76200" bIns="38100" anchor="ctr"/>
+          <a:lstStyle>
+            <a:defPPr algn="l">
+              <a:defRPr sz="1350" b="0">
+                <a:solidFill>
+                  <a:srgbClr val="25364D"/>
+                </a:solidFill>
+                <a:latin typeface="Inter"/>
+                <a:ea typeface="Inter"/>
+                <a:cs typeface="Inter"/>
+              </a:defRPr>
+            </a:defPPr>
+            <a:lvl1pPr algn="l">
+              <a:defRPr sz="1350" b="0">
+                <a:solidFill>
+                  <a:srgbClr val="25364D"/>
+                </a:solidFill>
+                <a:latin typeface="Inter"/>
+                <a:ea typeface="Inter"/>
+                <a:cs typeface="Inter"/>
+              </a:defRPr>
+            </a:lvl1pPr>
+            <a:lvl2pPr algn="l">
+              <a:defRPr sz="1350" b="0">
+                <a:solidFill>
+                  <a:srgbClr val="25364D"/>
+                </a:solidFill>
+                <a:latin typeface="Inter"/>
+                <a:ea typeface="Inter"/>
+                <a:cs typeface="Inter"/>
+              </a:defRPr>
+            </a:lvl2pPr>
+            <a:lvl3pPr algn="l">
+              <a:defRPr sz="1350" b="0">
+                <a:solidFill>
+                  <a:srgbClr val="25364D"/>
+                </a:solidFill>
+                <a:latin typeface="Inter"/>
+                <a:ea typeface="Inter"/>
+                <a:cs typeface="Inter"/>
+              </a:defRPr>
+            </a:lvl3pPr>
+            <a:lvl4pPr algn="l">
+              <a:defRPr sz="1350" b="0">
+                <a:solidFill>
+                  <a:srgbClr val="25364D"/>
+                </a:solidFill>
+                <a:latin typeface="Inter"/>
+                <a:ea typeface="Inter"/>
+                <a:cs typeface="Inter"/>
+              </a:defRPr>
+            </a:lvl4pPr>
+            <a:lvl5pPr algn="l">
+              <a:defRPr sz="1350" b="0">
+                <a:solidFill>
+                  <a:srgbClr val="25364D"/>
+                </a:solidFill>
+                <a:latin typeface="Inter"/>
+                <a:ea typeface="Inter"/>
+                <a:cs typeface="Inter"/>
+              </a:defRPr>
+            </a:lvl5pPr>
+            <a:lvl6pPr algn="l">
+              <a:defRPr sz="1350" b="0">
+                <a:solidFill>
+                  <a:srgbClr val="25364D"/>
+                </a:solidFill>
+                <a:latin typeface="Inter"/>
+                <a:ea typeface="Inter"/>
+                <a:cs typeface="Inter"/>
+              </a:defRPr>
+            </a:lvl6pPr>
+            <a:lvl7pPr algn="l">
+              <a:defRPr sz="1350" b="0">
+                <a:solidFill>
+                  <a:srgbClr val="25364D"/>
+                </a:solidFill>
+                <a:latin typeface="Inter"/>
+                <a:ea typeface="Inter"/>
+                <a:cs typeface="Inter"/>
+              </a:defRPr>
+            </a:lvl7pPr>
+            <a:lvl8pPr algn="l">
+              <a:defRPr sz="1350" b="0">
+                <a:solidFill>
+                  <a:srgbClr val="25364D"/>
+                </a:solidFill>
+                <a:latin typeface="Inter"/>
+                <a:ea typeface="Inter"/>
+                <a:cs typeface="Inter"/>
+              </a:defRPr>
+            </a:lvl8pPr>
+            <a:lvl9pPr algn="l">
+              <a:defRPr sz="1350" b="0">
+                <a:solidFill>
+                  <a:srgbClr val="25364D"/>
+                </a:solidFill>
+                <a:latin typeface="Inter"/>
+                <a:ea typeface="Inter"/>
+                <a:cs typeface="Inter"/>
+              </a:defRPr>
+            </a:lvl9pPr>
+          </a:lstStyle>
+          <a:p>
+            <a:pPr algn="l"/>
+            <a:r>
+              <a:rPr sz="1350" b="0">
+                <a:solidFill>
+                  <a:srgbClr val="25364D"/>
+                </a:solidFill>
+                <a:latin typeface="Inter"/>
+                <a:ea typeface="Inter"/>
+                <a:cs typeface="Inter"/>
+              </a:rPr>
+              <a:t>Φωτογραφία.jpg</a:t>
+            </a:r>
+          </a:p>
+        </p:txBody>
+      </p:sp>
+      <p:sp>
+        <p:nvSpPr>
+          <p:cNvPr id="11" name="Rectangle: Rounded Corners 10">
+            <a:extLst>
+              <a:ext uri="{FF2B5EF4-FFF2-40B4-BE49-F238E27FC236}">
+                <a16:creationId xmlns:a16="http://schemas.microsoft.com/office/drawing/2014/main" id="{5B52A70E-36FD-44D7-953A-33A77164B256}"/>
+              </a:ext>
+            </a:extLst>
+          </p:cNvPr>
+          <p:cNvSpPr>
+            <a:spLocks noGrp="1"/>
+          </p:cNvSpPr>
+          <p:nvPr/>
+        </p:nvSpPr>
+        <p:spPr>
+          <a:xfrm>
+            <a:off x="971550" y="4095750"/>
+            <a:ext cx="704850" cy="514350"/>
+          </a:xfrm>
+          <a:prstGeom prst="roundRect">
+            <a:avLst>
+              <a:gd name="adj" fmla="val 14815"/>
+            </a:avLst>
+          </a:prstGeom>
+          <a:solidFill>
+            <a:srgbClr val="3B82F6"/>
+          </a:solidFill>
+          <a:ln w="9525">
+            <a:solidFill>
+              <a:srgbClr val="3B82F6"/>
+            </a:solidFill>
+          </a:ln>
+        </p:spPr>
+        <p:txBody>
+          <a:bodyPr/>
+          <a:lstStyle/>
+          <a:p>
+            <a:endParaRPr lang="en-US"/>
+          </a:p>
+        </p:txBody>
+      </p:sp>
+      <p:sp>
+        <p:nvSpPr>
+          <p:cNvPr id="12" name="Rectangle 11">
+            <a:extLst>
+              <a:ext uri="{FF2B5EF4-FFF2-40B4-BE49-F238E27FC236}">
+                <a16:creationId xmlns:a16="http://schemas.microsoft.com/office/drawing/2014/main" id="{AAED41E8-7C2B-4B27-AC3D-0F96EE9F8B1B}"/>
+              </a:ext>
+            </a:extLst>
+          </p:cNvPr>
+          <p:cNvSpPr>
+            <a:spLocks noGrp="1"/>
+          </p:cNvSpPr>
+          <p:nvPr/>
+        </p:nvSpPr>
+        <p:spPr>
+          <a:xfrm>
+            <a:off x="990600" y="4143375"/>
+            <a:ext cx="666750" cy="419100"/>
+          </a:xfrm>
+          <a:prstGeom prst="rect">
+            <a:avLst/>
+          </a:prstGeom>
+          <a:solidFill>
+            <a:srgbClr val="FFFFFF">
+              <a:alpha val="0"/>
+            </a:srgbClr>
+          </a:solidFill>
+          <a:ln w="0">
+            <a:solidFill>
+              <a:srgbClr val="FFFFFF">
+                <a:alpha val="0"/>
+              </a:srgbClr>
+            </a:solidFill>
+          </a:ln>
+        </p:spPr>
+        <p:txBody>
+          <a:bodyPr lIns="76200" tIns="38100" rIns="76200" bIns="38100" anchor="ctr"/>
+          <a:lstStyle>
+            <a:defPPr algn="ctr">
+              <a:defRPr sz="1275" b="1">
+                <a:solidFill>
+                  <a:srgbClr val="FFFFFF"/>
+                </a:solidFill>
+                <a:latin typeface="Inter"/>
+                <a:ea typeface="Inter"/>
+                <a:cs typeface="Inter"/>
+              </a:defRPr>
+            </a:defPPr>
+            <a:lvl1pPr algn="ctr">
+              <a:defRPr sz="1275" b="1">
+                <a:solidFill>
+                  <a:srgbClr val="FFFFFF"/>
+                </a:solidFill>
+                <a:latin typeface="Inter"/>
+                <a:ea typeface="Inter"/>
+                <a:cs typeface="Inter"/>
+              </a:defRPr>
+            </a:lvl1pPr>
+            <a:lvl2pPr algn="ctr">
+              <a:defRPr sz="1275" b="1">
+                <a:solidFill>
+                  <a:srgbClr val="FFFFFF"/>
+                </a:solidFill>
+                <a:latin typeface="Inter"/>
+                <a:ea typeface="Inter"/>
+                <a:cs typeface="Inter"/>
+              </a:defRPr>
+            </a:lvl2pPr>
+            <a:lvl3pPr algn="ctr">
+              <a:defRPr sz="1275" b="1">
+                <a:solidFill>
+                  <a:srgbClr val="FFFFFF"/>
+                </a:solidFill>
+                <a:latin typeface="Inter"/>
+                <a:ea typeface="Inter"/>
+                <a:cs typeface="Inter"/>
+              </a:defRPr>
+            </a:lvl3pPr>
+            <a:lvl4pPr algn="ctr">
+              <a:defRPr sz="1275" b="1">
+                <a:solidFill>
+                  <a:srgbClr val="FFFFFF"/>
+                </a:solidFill>
+                <a:latin typeface="Inter"/>
+                <a:ea typeface="Inter"/>
+                <a:cs typeface="Inter"/>
+              </a:defRPr>
+            </a:lvl4pPr>
+            <a:lvl5pPr algn="ctr">
+              <a:defRPr sz="1275" b="1">
+                <a:solidFill>
+                  <a:srgbClr val="FFFFFF"/>
+                </a:solidFill>
+                <a:latin typeface="Inter"/>
+                <a:ea typeface="Inter"/>
+                <a:cs typeface="Inter"/>
+              </a:defRPr>
+            </a:lvl5pPr>
+            <a:lvl6pPr algn="ctr">
+              <a:defRPr sz="1275" b="1">
+                <a:solidFill>
+                  <a:srgbClr val="FFFFFF"/>
+                </a:solidFill>
+                <a:latin typeface="Inter"/>
+                <a:ea typeface="Inter"/>
+                <a:cs typeface="Inter"/>
+              </a:defRPr>
+            </a:lvl6pPr>
+            <a:lvl7pPr algn="ctr">
+              <a:defRPr sz="1275" b="1">
+                <a:solidFill>
+                  <a:srgbClr val="FFFFFF"/>
+                </a:solidFill>
+                <a:latin typeface="Inter"/>
+                <a:ea typeface="Inter"/>
+                <a:cs typeface="Inter"/>
+              </a:defRPr>
+            </a:lvl7pPr>
+            <a:lvl8pPr algn="ctr">
+              <a:defRPr sz="1275" b="1">
+                <a:solidFill>
+                  <a:srgbClr val="FFFFFF"/>
+                </a:solidFill>
+                <a:latin typeface="Inter"/>
+                <a:ea typeface="Inter"/>
+                <a:cs typeface="Inter"/>
+              </a:defRPr>
+            </a:lvl8pPr>
+            <a:lvl9pPr algn="ctr">
+              <a:defRPr sz="1275" b="1">
+                <a:solidFill>
+                  <a:srgbClr val="FFFFFF"/>
+                </a:solidFill>
+                <a:latin typeface="Inter"/>
+                <a:ea typeface="Inter"/>
+                <a:cs typeface="Inter"/>
+              </a:defRPr>
+            </a:lvl9pPr>
+          </a:lstStyle>
+          <a:p>
+            <a:pPr algn="ctr"/>
+            <a:r>
+              <a:rPr sz="1275" b="1">
+                <a:solidFill>
+                  <a:srgbClr val="FFFFFF"/>
+                </a:solidFill>
+                <a:latin typeface="Inter"/>
+                <a:ea typeface="Inter"/>
+                <a:cs typeface="Inter"/>
+              </a:rPr>
+              <a:t>DOCX</a:t>
+            </a:r>
+          </a:p>
+        </p:txBody>
+      </p:sp>
+      <p:sp>
+        <p:nvSpPr>
+          <p:cNvPr id="13" name="Rectangle 12">
+            <a:extLst>
+              <a:ext uri="{FF2B5EF4-FFF2-40B4-BE49-F238E27FC236}">
+                <a16:creationId xmlns:a16="http://schemas.microsoft.com/office/drawing/2014/main" id="{40445A65-D3BD-4A53-B087-E826DE425435}"/>
+              </a:ext>
+            </a:extLst>
+          </p:cNvPr>
+          <p:cNvSpPr>
+            <a:spLocks noGrp="1"/>
+          </p:cNvSpPr>
+          <p:nvPr/>
+        </p:nvSpPr>
+        <p:spPr>
+          <a:xfrm>
+            <a:off x="1809750" y="4124325"/>
+            <a:ext cx="1714500" cy="457200"/>
+          </a:xfrm>
+          <a:prstGeom prst="rect">
+            <a:avLst/>
+          </a:prstGeom>
+          <a:solidFill>
+            <a:srgbClr val="FFFFFF">
+              <a:alpha val="0"/>
+            </a:srgbClr>
+          </a:solidFill>
+          <a:ln w="0">
+            <a:solidFill>
+              <a:srgbClr val="FFFFFF">
+                <a:alpha val="0"/>
+              </a:srgbClr>
+            </a:solidFill>
+          </a:ln>
+        </p:spPr>
+        <p:txBody>
+          <a:bodyPr lIns="76200" tIns="38100" rIns="76200" bIns="38100" anchor="ctr"/>
+          <a:lstStyle>
+            <a:defPPr algn="l">
+              <a:defRPr sz="1350" b="0">
+                <a:solidFill>
+                  <a:srgbClr val="25364D"/>
+                </a:solidFill>
+                <a:latin typeface="Inter"/>
+                <a:ea typeface="Inter"/>
+                <a:cs typeface="Inter"/>
+              </a:defRPr>
+            </a:defPPr>
+            <a:lvl1pPr algn="l">
+              <a:defRPr sz="1350" b="0">
+                <a:solidFill>
+                  <a:srgbClr val="25364D"/>
+                </a:solidFill>
+                <a:latin typeface="Inter"/>
+                <a:ea typeface="Inter"/>
+                <a:cs typeface="Inter"/>
+              </a:defRPr>
+            </a:lvl1pPr>
+            <a:lvl2pPr algn="l">
+              <a:defRPr sz="1350" b="0">
+                <a:solidFill>
+                  <a:srgbClr val="25364D"/>
+                </a:solidFill>
+                <a:latin typeface="Inter"/>
+                <a:ea typeface="Inter"/>
+                <a:cs typeface="Inter"/>
+              </a:defRPr>
+            </a:lvl2pPr>
+            <a:lvl3pPr algn="l">
+              <a:defRPr sz="1350" b="0">
+                <a:solidFill>
+                  <a:srgbClr val="25364D"/>
+                </a:solidFill>
+                <a:latin typeface="Inter"/>
+                <a:ea typeface="Inter"/>
+                <a:cs typeface="Inter"/>
+              </a:defRPr>
+            </a:lvl3pPr>
+            <a:lvl4pPr algn="l">
+              <a:defRPr sz="1350" b="0">
+                <a:solidFill>
+                  <a:srgbClr val="25364D"/>
+                </a:solidFill>
+                <a:latin typeface="Inter"/>
+                <a:ea typeface="Inter"/>
+                <a:cs typeface="Inter"/>
+              </a:defRPr>
+            </a:lvl4pPr>
+            <a:lvl5pPr algn="l">
+              <a:defRPr sz="1350" b="0">
+                <a:solidFill>
+                  <a:srgbClr val="25364D"/>
+                </a:solidFill>
+                <a:latin typeface="Inter"/>
+                <a:ea typeface="Inter"/>
+                <a:cs typeface="Inter"/>
+              </a:defRPr>
+            </a:lvl5pPr>
+            <a:lvl6pPr algn="l">
+              <a:defRPr sz="1350" b="0">
+                <a:solidFill>
+                  <a:srgbClr val="25364D"/>
+                </a:solidFill>
+                <a:latin typeface="Inter"/>
+                <a:ea typeface="Inter"/>
+                <a:cs typeface="Inter"/>
+              </a:defRPr>
+            </a:lvl6pPr>
+            <a:lvl7pPr algn="l">
+              <a:defRPr sz="1350" b="0">
+                <a:solidFill>
+                  <a:srgbClr val="25364D"/>
+                </a:solidFill>
+                <a:latin typeface="Inter"/>
+                <a:ea typeface="Inter"/>
+                <a:cs typeface="Inter"/>
+              </a:defRPr>
+            </a:lvl7pPr>
+            <a:lvl8pPr algn="l">
+              <a:defRPr sz="1350" b="0">
+                <a:solidFill>
+                  <a:srgbClr val="25364D"/>
+                </a:solidFill>
+                <a:latin typeface="Inter"/>
+                <a:ea typeface="Inter"/>
+                <a:cs typeface="Inter"/>
+              </a:defRPr>
+            </a:lvl8pPr>
+            <a:lvl9pPr algn="l">
+              <a:defRPr sz="1350" b="0">
+                <a:solidFill>
+                  <a:srgbClr val="25364D"/>
+                </a:solidFill>
+                <a:latin typeface="Inter"/>
+                <a:ea typeface="Inter"/>
+                <a:cs typeface="Inter"/>
+              </a:defRPr>
+            </a:lvl9pPr>
+          </a:lstStyle>
+          <a:p>
+            <a:pPr algn="l"/>
+            <a:r>
+              <a:rPr sz="1350" b="0">
+                <a:solidFill>
+                  <a:srgbClr val="25364D"/>
+                </a:solidFill>
+                <a:latin typeface="Inter"/>
+                <a:ea typeface="Inter"/>
+                <a:cs typeface="Inter"/>
+              </a:rPr>
+              <a:t>Κείμενο.docx</a:t>
+            </a:r>
+          </a:p>
+        </p:txBody>
+      </p:sp>
+      <p:sp>
+        <p:nvSpPr>
+          <p:cNvPr id="14" name="Oval 13">
+            <a:extLst>
+              <a:ext uri="{FF2B5EF4-FFF2-40B4-BE49-F238E27FC236}">
+                <a16:creationId xmlns:a16="http://schemas.microsoft.com/office/drawing/2014/main" id="{C1E996E1-64F0-4460-B61F-E9A151D68E01}"/>
+              </a:ext>
+            </a:extLst>
+          </p:cNvPr>
+          <p:cNvSpPr>
+            <a:spLocks noGrp="1"/>
+          </p:cNvSpPr>
+          <p:nvPr/>
+        </p:nvSpPr>
+        <p:spPr>
+          <a:xfrm>
+            <a:off x="4514850" y="2571750"/>
+            <a:ext cx="1619250" cy="1619250"/>
+          </a:xfrm>
+          <a:prstGeom prst="ellipse">
+            <a:avLst/>
+          </a:prstGeom>
+          <a:solidFill>
+            <a:srgbClr val="24446A"/>
+          </a:solidFill>
+          <a:ln w="9525">
+            <a:solidFill>
+              <a:srgbClr val="24446A"/>
+            </a:solidFill>
+          </a:ln>
+        </p:spPr>
+        <p:txBody>
+          <a:bodyPr/>
+          <a:lstStyle/>
+          <a:p>
+            <a:endParaRPr lang="en-US"/>
+          </a:p>
+        </p:txBody>
+      </p:sp>
+      <p:sp>
+        <p:nvSpPr>
+          <p:cNvPr id="15" name="Rectangle 14">
+            <a:extLst>
+              <a:ext uri="{FF2B5EF4-FFF2-40B4-BE49-F238E27FC236}">
+                <a16:creationId xmlns:a16="http://schemas.microsoft.com/office/drawing/2014/main" id="{7D483EEC-8801-43AC-8931-0CD699E943E7}"/>
+              </a:ext>
+            </a:extLst>
+          </p:cNvPr>
+          <p:cNvSpPr>
+            <a:spLocks noGrp="1"/>
+          </p:cNvSpPr>
+          <p:nvPr/>
+        </p:nvSpPr>
+        <p:spPr>
+          <a:xfrm>
+            <a:off x="4762500" y="2724150"/>
+            <a:ext cx="1123950" cy="762000"/>
+          </a:xfrm>
+          <a:prstGeom prst="rect">
+            <a:avLst/>
+          </a:prstGeom>
+          <a:solidFill>
+            <a:srgbClr val="FFFFFF">
+              <a:alpha val="0"/>
+            </a:srgbClr>
+          </a:solidFill>
+          <a:ln w="0">
+            <a:solidFill>
+              <a:srgbClr val="FFFFFF">
+                <a:alpha val="0"/>
+              </a:srgbClr>
+            </a:solidFill>
+          </a:ln>
+        </p:spPr>
+        <p:txBody>
+          <a:bodyPr lIns="76200" tIns="38100" rIns="76200" bIns="38100" anchor="ctr"/>
+          <a:lstStyle>
+            <a:defPPr algn="ctr">
+              <a:defRPr sz="3525" b="0">
+                <a:solidFill>
+                  <a:srgbClr val="14213D"/>
+                </a:solidFill>
+                <a:latin typeface="Inter"/>
+                <a:ea typeface="Inter"/>
+                <a:cs typeface="Inter"/>
+              </a:defRPr>
+            </a:defPPr>
+            <a:lvl1pPr algn="ctr">
+              <a:defRPr sz="3525" b="0">
+                <a:solidFill>
+                  <a:srgbClr val="14213D"/>
+                </a:solidFill>
+                <a:latin typeface="Inter"/>
+                <a:ea typeface="Inter"/>
+                <a:cs typeface="Inter"/>
+              </a:defRPr>
+            </a:lvl1pPr>
+            <a:lvl2pPr algn="ctr">
+              <a:defRPr sz="3525" b="0">
+                <a:solidFill>
+                  <a:srgbClr val="14213D"/>
+                </a:solidFill>
+                <a:latin typeface="Inter"/>
+                <a:ea typeface="Inter"/>
+                <a:cs typeface="Inter"/>
+              </a:defRPr>
+            </a:lvl2pPr>
+            <a:lvl3pPr algn="ctr">
+              <a:defRPr sz="3525" b="0">
+                <a:solidFill>
+                  <a:srgbClr val="14213D"/>
+                </a:solidFill>
+                <a:latin typeface="Inter"/>
+                <a:ea typeface="Inter"/>
+                <a:cs typeface="Inter"/>
+              </a:defRPr>
+            </a:lvl3pPr>
+            <a:lvl4pPr algn="ctr">
+              <a:defRPr sz="3525" b="0">
+                <a:solidFill>
+                  <a:srgbClr val="14213D"/>
+                </a:solidFill>
+                <a:latin typeface="Inter"/>
+                <a:ea typeface="Inter"/>
+                <a:cs typeface="Inter"/>
+              </a:defRPr>
+            </a:lvl4pPr>
+            <a:lvl5pPr algn="ctr">
+              <a:defRPr sz="3525" b="0">
+                <a:solidFill>
+                  <a:srgbClr val="14213D"/>
+                </a:solidFill>
+                <a:latin typeface="Inter"/>
+                <a:ea typeface="Inter"/>
+                <a:cs typeface="Inter"/>
+              </a:defRPr>
+            </a:lvl5pPr>
+            <a:lvl6pPr algn="ctr">
+              <a:defRPr sz="3525" b="0">
+                <a:solidFill>
+                  <a:srgbClr val="14213D"/>
+                </a:solidFill>
+                <a:latin typeface="Inter"/>
+                <a:ea typeface="Inter"/>
+                <a:cs typeface="Inter"/>
+              </a:defRPr>
+            </a:lvl6pPr>
+            <a:lvl7pPr algn="ctr">
+              <a:defRPr sz="3525" b="0">
+                <a:solidFill>
+                  <a:srgbClr val="14213D"/>
+                </a:solidFill>
+                <a:latin typeface="Inter"/>
+                <a:ea typeface="Inter"/>
+                <a:cs typeface="Inter"/>
+              </a:defRPr>
+            </a:lvl7pPr>
+            <a:lvl8pPr algn="ctr">
+              <a:defRPr sz="3525" b="0">
+                <a:solidFill>
+                  <a:srgbClr val="14213D"/>
+                </a:solidFill>
+                <a:latin typeface="Inter"/>
+                <a:ea typeface="Inter"/>
+                <a:cs typeface="Inter"/>
+              </a:defRPr>
+            </a:lvl8pPr>
+            <a:lvl9pPr algn="ctr">
+              <a:defRPr sz="3525" b="0">
+                <a:solidFill>
+                  <a:srgbClr val="14213D"/>
+                </a:solidFill>
+                <a:latin typeface="Inter"/>
+                <a:ea typeface="Inter"/>
+                <a:cs typeface="Inter"/>
+              </a:defRPr>
+            </a:lvl9pPr>
+          </a:lstStyle>
+          <a:p>
+            <a:pPr algn="ctr"/>
+            <a:r>
+              <a:rPr sz="3525" b="0">
+                <a:solidFill>
+                  <a:srgbClr val="14213D"/>
+                </a:solidFill>
+                <a:latin typeface="Inter"/>
+                <a:ea typeface="Inter"/>
+                <a:cs typeface="Inter"/>
+              </a:rPr>
+              <a:t>📎</a:t>
+            </a:r>
+          </a:p>
+        </p:txBody>
+      </p:sp>
+      <p:sp>
+        <p:nvSpPr>
           <p:cNvPr id="16" name="Rectangle 15">
             <a:extLst>
               <a:ext uri="{FF2B5EF4-FFF2-40B4-BE49-F238E27FC236}">
-                <a16:creationId xmlns:a16="http://schemas.microsoft.com/office/drawing/2014/main" id="{FA9B9568-5E18-4335-93FF-0F7C6D34E3FD}"/>
+                <a16:creationId xmlns:a16="http://schemas.microsoft.com/office/drawing/2014/main" id="{BCB8A749-8D8A-4EA8-AF73-723818A0CDBF}"/>
               </a:ext>
             </a:extLst>
           </p:cNvPr>
@@ -1315,75 +3085,306 @@
         </p:nvSpPr>
         <p:spPr>
           <a:xfrm>
-            <a:off x="552450" y="333375"/>
-            <a:ext cx="11087100" cy="704850"/>
+            <a:off x="4781550" y="3476625"/>
+            <a:ext cx="1085850" cy="400050"/>
           </a:xfrm>
           <a:prstGeom prst="rect">
             <a:avLst/>
           </a:prstGeom>
-          <a:noFill/>
+          <a:solidFill>
+            <a:srgbClr val="FFFFFF">
+              <a:alpha val="0"/>
+            </a:srgbClr>
+          </a:solidFill>
           <a:ln w="0">
-            <a:noFill/>
+            <a:solidFill>
+              <a:srgbClr val="FFFFFF">
+                <a:alpha val="0"/>
+              </a:srgbClr>
+            </a:solidFill>
           </a:ln>
         </p:spPr>
         <p:txBody>
-          <a:bodyPr lIns="38100" tIns="19050" rIns="38100" bIns="19050" anchor="t">
-            <a:normAutofit/>
-          </a:bodyPr>
-          <a:lstStyle/>
-          <a:p>
-            <a:pPr algn="l">
-              <a:defRPr sz="2550" b="0">
-                <a:solidFill>
-                  <a:srgbClr val="111111"/>
-                </a:solidFill>
-                <a:latin typeface="Tahoma"/>
-                <a:ea typeface="Tahoma"/>
-                <a:cs typeface="Tahoma"/>
-              </a:defRPr>
-            </a:pPr>
+          <a:bodyPr lIns="76200" tIns="38100" rIns="76200" bIns="38100" anchor="ctr"/>
+          <a:lstStyle>
+            <a:defPPr algn="ctr">
+              <a:defRPr sz="1725" b="1">
+                <a:solidFill>
+                  <a:srgbClr val="FFFFFF"/>
+                </a:solidFill>
+                <a:latin typeface="Inter"/>
+                <a:ea typeface="Inter"/>
+                <a:cs typeface="Inter"/>
+              </a:defRPr>
+            </a:defPPr>
+            <a:lvl1pPr algn="ctr">
+              <a:defRPr sz="1725" b="1">
+                <a:solidFill>
+                  <a:srgbClr val="FFFFFF"/>
+                </a:solidFill>
+                <a:latin typeface="Inter"/>
+                <a:ea typeface="Inter"/>
+                <a:cs typeface="Inter"/>
+              </a:defRPr>
+            </a:lvl1pPr>
+            <a:lvl2pPr algn="ctr">
+              <a:defRPr sz="1725" b="1">
+                <a:solidFill>
+                  <a:srgbClr val="FFFFFF"/>
+                </a:solidFill>
+                <a:latin typeface="Inter"/>
+                <a:ea typeface="Inter"/>
+                <a:cs typeface="Inter"/>
+              </a:defRPr>
+            </a:lvl2pPr>
+            <a:lvl3pPr algn="ctr">
+              <a:defRPr sz="1725" b="1">
+                <a:solidFill>
+                  <a:srgbClr val="FFFFFF"/>
+                </a:solidFill>
+                <a:latin typeface="Inter"/>
+                <a:ea typeface="Inter"/>
+                <a:cs typeface="Inter"/>
+              </a:defRPr>
+            </a:lvl3pPr>
+            <a:lvl4pPr algn="ctr">
+              <a:defRPr sz="1725" b="1">
+                <a:solidFill>
+                  <a:srgbClr val="FFFFFF"/>
+                </a:solidFill>
+                <a:latin typeface="Inter"/>
+                <a:ea typeface="Inter"/>
+                <a:cs typeface="Inter"/>
+              </a:defRPr>
+            </a:lvl4pPr>
+            <a:lvl5pPr algn="ctr">
+              <a:defRPr sz="1725" b="1">
+                <a:solidFill>
+                  <a:srgbClr val="FFFFFF"/>
+                </a:solidFill>
+                <a:latin typeface="Inter"/>
+                <a:ea typeface="Inter"/>
+                <a:cs typeface="Inter"/>
+              </a:defRPr>
+            </a:lvl5pPr>
+            <a:lvl6pPr algn="ctr">
+              <a:defRPr sz="1725" b="1">
+                <a:solidFill>
+                  <a:srgbClr val="FFFFFF"/>
+                </a:solidFill>
+                <a:latin typeface="Inter"/>
+                <a:ea typeface="Inter"/>
+                <a:cs typeface="Inter"/>
+              </a:defRPr>
+            </a:lvl6pPr>
+            <a:lvl7pPr algn="ctr">
+              <a:defRPr sz="1725" b="1">
+                <a:solidFill>
+                  <a:srgbClr val="FFFFFF"/>
+                </a:solidFill>
+                <a:latin typeface="Inter"/>
+                <a:ea typeface="Inter"/>
+                <a:cs typeface="Inter"/>
+              </a:defRPr>
+            </a:lvl7pPr>
+            <a:lvl8pPr algn="ctr">
+              <a:defRPr sz="1725" b="1">
+                <a:solidFill>
+                  <a:srgbClr val="FFFFFF"/>
+                </a:solidFill>
+                <a:latin typeface="Inter"/>
+                <a:ea typeface="Inter"/>
+                <a:cs typeface="Inter"/>
+              </a:defRPr>
+            </a:lvl8pPr>
+            <a:lvl9pPr algn="ctr">
+              <a:defRPr sz="1725" b="1">
+                <a:solidFill>
+                  <a:srgbClr val="FFFFFF"/>
+                </a:solidFill>
+                <a:latin typeface="Inter"/>
+                <a:ea typeface="Inter"/>
+                <a:cs typeface="Inter"/>
+              </a:defRPr>
+            </a:lvl9pPr>
+          </a:lstStyle>
+          <a:p>
+            <a:pPr algn="ctr"/>
             <a:r>
-              <a:rPr sz="2550" b="0">
-                <a:solidFill>
-                  <a:srgbClr val="111111"/>
-                </a:solidFill>
-                <a:latin typeface="Tahoma"/>
-                <a:ea typeface="Tahoma"/>
-                <a:cs typeface="Tahoma"/>
+              <a:rPr sz="1725" b="1">
+                <a:solidFill>
+                  <a:srgbClr val="FFFFFF"/>
+                </a:solidFill>
+                <a:latin typeface="Inter"/>
+                <a:ea typeface="Inter"/>
+                <a:cs typeface="Inter"/>
               </a:rPr>
-              <a:t>Επισυναπτόμενα αρχεία (Attachments)</a:t>
+              <a:t>Attach</a:t>
             </a:r>
           </a:p>
         </p:txBody>
       </p:sp>
-      <p:pic>
-        <p:nvPicPr>
-          <p:cNvPr id="17" name="Picture 16"/>
-          <p:cNvPicPr>
-            <a:picLocks noChangeAspect="1"/>
-          </p:cNvPicPr>
+      <p:sp>
+        <p:nvSpPr>
+          <p:cNvPr id="17" name="Rectangle 16">
+            <a:extLst>
+              <a:ext uri="{FF2B5EF4-FFF2-40B4-BE49-F238E27FC236}">
+                <a16:creationId xmlns:a16="http://schemas.microsoft.com/office/drawing/2014/main" id="{CC5BE7ED-FFC8-41D8-AD29-EABB459EC675}"/>
+              </a:ext>
+            </a:extLst>
+          </p:cNvPr>
+          <p:cNvSpPr>
+            <a:spLocks noGrp="1"/>
+          </p:cNvSpPr>
           <p:nvPr/>
-        </p:nvPicPr>
-        <p:blipFill>
-          <a:blip r:embed="rId3"/>
-          <a:stretch/>
-        </p:blipFill>
+        </p:nvSpPr>
         <p:spPr>
           <a:xfrm>
-            <a:off x="762000" y="1428750"/>
-            <a:ext cx="2762250" cy="2762250"/>
+            <a:off x="3867150" y="3048000"/>
+            <a:ext cx="609600" cy="590550"/>
           </a:xfrm>
           <a:prstGeom prst="rect">
             <a:avLst/>
           </a:prstGeom>
-        </p:spPr>
-      </p:pic>
-      <p:sp>
-        <p:nvSpPr>
-          <p:cNvPr id="3" name="Rectangle 2">
+          <a:solidFill>
+            <a:srgbClr val="FFFFFF">
+              <a:alpha val="0"/>
+            </a:srgbClr>
+          </a:solidFill>
+          <a:ln w="0">
+            <a:solidFill>
+              <a:srgbClr val="FFFFFF">
+                <a:alpha val="0"/>
+              </a:srgbClr>
+            </a:solidFill>
+          </a:ln>
+        </p:spPr>
+        <p:txBody>
+          <a:bodyPr lIns="76200" tIns="38100" rIns="76200" bIns="38100" anchor="ctr"/>
+          <a:lstStyle>
+            <a:defPPr algn="ctr">
+              <a:defRPr sz="3150" b="1">
+                <a:solidFill>
+                  <a:srgbClr val="7A8CA3"/>
+                </a:solidFill>
+                <a:latin typeface="Inter"/>
+                <a:ea typeface="Inter"/>
+                <a:cs typeface="Inter"/>
+              </a:defRPr>
+            </a:defPPr>
+            <a:lvl1pPr algn="ctr">
+              <a:defRPr sz="3150" b="1">
+                <a:solidFill>
+                  <a:srgbClr val="7A8CA3"/>
+                </a:solidFill>
+                <a:latin typeface="Inter"/>
+                <a:ea typeface="Inter"/>
+                <a:cs typeface="Inter"/>
+              </a:defRPr>
+            </a:lvl1pPr>
+            <a:lvl2pPr algn="ctr">
+              <a:defRPr sz="3150" b="1">
+                <a:solidFill>
+                  <a:srgbClr val="7A8CA3"/>
+                </a:solidFill>
+                <a:latin typeface="Inter"/>
+                <a:ea typeface="Inter"/>
+                <a:cs typeface="Inter"/>
+              </a:defRPr>
+            </a:lvl2pPr>
+            <a:lvl3pPr algn="ctr">
+              <a:defRPr sz="3150" b="1">
+                <a:solidFill>
+                  <a:srgbClr val="7A8CA3"/>
+                </a:solidFill>
+                <a:latin typeface="Inter"/>
+                <a:ea typeface="Inter"/>
+                <a:cs typeface="Inter"/>
+              </a:defRPr>
+            </a:lvl3pPr>
+            <a:lvl4pPr algn="ctr">
+              <a:defRPr sz="3150" b="1">
+                <a:solidFill>
+                  <a:srgbClr val="7A8CA3"/>
+                </a:solidFill>
+                <a:latin typeface="Inter"/>
+                <a:ea typeface="Inter"/>
+                <a:cs typeface="Inter"/>
+              </a:defRPr>
+            </a:lvl4pPr>
+            <a:lvl5pPr algn="ctr">
+              <a:defRPr sz="3150" b="1">
+                <a:solidFill>
+                  <a:srgbClr val="7A8CA3"/>
+                </a:solidFill>
+                <a:latin typeface="Inter"/>
+                <a:ea typeface="Inter"/>
+                <a:cs typeface="Inter"/>
+              </a:defRPr>
+            </a:lvl5pPr>
+            <a:lvl6pPr algn="ctr">
+              <a:defRPr sz="3150" b="1">
+                <a:solidFill>
+                  <a:srgbClr val="7A8CA3"/>
+                </a:solidFill>
+                <a:latin typeface="Inter"/>
+                <a:ea typeface="Inter"/>
+                <a:cs typeface="Inter"/>
+              </a:defRPr>
+            </a:lvl6pPr>
+            <a:lvl7pPr algn="ctr">
+              <a:defRPr sz="3150" b="1">
+                <a:solidFill>
+                  <a:srgbClr val="7A8CA3"/>
+                </a:solidFill>
+                <a:latin typeface="Inter"/>
+                <a:ea typeface="Inter"/>
+                <a:cs typeface="Inter"/>
+              </a:defRPr>
+            </a:lvl7pPr>
+            <a:lvl8pPr algn="ctr">
+              <a:defRPr sz="3150" b="1">
+                <a:solidFill>
+                  <a:srgbClr val="7A8CA3"/>
+                </a:solidFill>
+                <a:latin typeface="Inter"/>
+                <a:ea typeface="Inter"/>
+                <a:cs typeface="Inter"/>
+              </a:defRPr>
+            </a:lvl8pPr>
+            <a:lvl9pPr algn="ctr">
+              <a:defRPr sz="3150" b="1">
+                <a:solidFill>
+                  <a:srgbClr val="7A8CA3"/>
+                </a:solidFill>
+                <a:latin typeface="Inter"/>
+                <a:ea typeface="Inter"/>
+                <a:cs typeface="Inter"/>
+              </a:defRPr>
+            </a:lvl9pPr>
+          </a:lstStyle>
+          <a:p>
+            <a:pPr algn="ctr"/>
+            <a:r>
+              <a:rPr sz="3150" b="1">
+                <a:solidFill>
+                  <a:srgbClr val="7A8CA3"/>
+                </a:solidFill>
+                <a:latin typeface="Inter"/>
+                <a:ea typeface="Inter"/>
+                <a:cs typeface="Inter"/>
+              </a:rPr>
+              <a:t>➜</a:t>
+            </a:r>
+          </a:p>
+        </p:txBody>
+      </p:sp>
+      <p:sp>
+        <p:nvSpPr>
+          <p:cNvPr id="18" name="Rectangle 17">
             <a:extLst>
               <a:ext uri="{FF2B5EF4-FFF2-40B4-BE49-F238E27FC236}">
-                <a16:creationId xmlns:a16="http://schemas.microsoft.com/office/drawing/2014/main" id="{B3E88CFE-D1BD-497F-97EA-CA81D475AFF9}"/>
+                <a16:creationId xmlns:a16="http://schemas.microsoft.com/office/drawing/2014/main" id="{8D3377B6-8B90-49A0-B168-63F749C6A87D}"/>
               </a:ext>
             </a:extLst>
           </p:cNvPr>
@@ -1394,53 +3395,151 @@
         </p:nvSpPr>
         <p:spPr>
           <a:xfrm>
-            <a:off x="4095750" y="1428750"/>
-            <a:ext cx="6858000" cy="952500"/>
+            <a:off x="6191250" y="3048000"/>
+            <a:ext cx="609600" cy="590550"/>
           </a:xfrm>
           <a:prstGeom prst="rect">
             <a:avLst/>
           </a:prstGeom>
-          <a:noFill/>
+          <a:solidFill>
+            <a:srgbClr val="FFFFFF">
+              <a:alpha val="0"/>
+            </a:srgbClr>
+          </a:solidFill>
           <a:ln w="0">
-            <a:noFill/>
+            <a:solidFill>
+              <a:srgbClr val="FFFFFF">
+                <a:alpha val="0"/>
+              </a:srgbClr>
+            </a:solidFill>
           </a:ln>
         </p:spPr>
         <p:txBody>
-          <a:bodyPr lIns="38100" tIns="19050" rIns="38100" bIns="19050" anchor="t">
-            <a:normAutofit/>
-          </a:bodyPr>
-          <a:lstStyle/>
-          <a:p>
-            <a:pPr algn="l">
-              <a:defRPr sz="2025" b="1">
-                <a:solidFill>
-                  <a:srgbClr val="111111"/>
-                </a:solidFill>
-                <a:latin typeface="Tahoma"/>
-                <a:ea typeface="Tahoma"/>
-                <a:cs typeface="Tahoma"/>
-              </a:defRPr>
-            </a:pPr>
+          <a:bodyPr lIns="76200" tIns="38100" rIns="76200" bIns="38100" anchor="ctr"/>
+          <a:lstStyle>
+            <a:defPPr algn="ctr">
+              <a:defRPr sz="3150" b="1">
+                <a:solidFill>
+                  <a:srgbClr val="7A8CA3"/>
+                </a:solidFill>
+                <a:latin typeface="Inter"/>
+                <a:ea typeface="Inter"/>
+                <a:cs typeface="Inter"/>
+              </a:defRPr>
+            </a:defPPr>
+            <a:lvl1pPr algn="ctr">
+              <a:defRPr sz="3150" b="1">
+                <a:solidFill>
+                  <a:srgbClr val="7A8CA3"/>
+                </a:solidFill>
+                <a:latin typeface="Inter"/>
+                <a:ea typeface="Inter"/>
+                <a:cs typeface="Inter"/>
+              </a:defRPr>
+            </a:lvl1pPr>
+            <a:lvl2pPr algn="ctr">
+              <a:defRPr sz="3150" b="1">
+                <a:solidFill>
+                  <a:srgbClr val="7A8CA3"/>
+                </a:solidFill>
+                <a:latin typeface="Inter"/>
+                <a:ea typeface="Inter"/>
+                <a:cs typeface="Inter"/>
+              </a:defRPr>
+            </a:lvl2pPr>
+            <a:lvl3pPr algn="ctr">
+              <a:defRPr sz="3150" b="1">
+                <a:solidFill>
+                  <a:srgbClr val="7A8CA3"/>
+                </a:solidFill>
+                <a:latin typeface="Inter"/>
+                <a:ea typeface="Inter"/>
+                <a:cs typeface="Inter"/>
+              </a:defRPr>
+            </a:lvl3pPr>
+            <a:lvl4pPr algn="ctr">
+              <a:defRPr sz="3150" b="1">
+                <a:solidFill>
+                  <a:srgbClr val="7A8CA3"/>
+                </a:solidFill>
+                <a:latin typeface="Inter"/>
+                <a:ea typeface="Inter"/>
+                <a:cs typeface="Inter"/>
+              </a:defRPr>
+            </a:lvl4pPr>
+            <a:lvl5pPr algn="ctr">
+              <a:defRPr sz="3150" b="1">
+                <a:solidFill>
+                  <a:srgbClr val="7A8CA3"/>
+                </a:solidFill>
+                <a:latin typeface="Inter"/>
+                <a:ea typeface="Inter"/>
+                <a:cs typeface="Inter"/>
+              </a:defRPr>
+            </a:lvl5pPr>
+            <a:lvl6pPr algn="ctr">
+              <a:defRPr sz="3150" b="1">
+                <a:solidFill>
+                  <a:srgbClr val="7A8CA3"/>
+                </a:solidFill>
+                <a:latin typeface="Inter"/>
+                <a:ea typeface="Inter"/>
+                <a:cs typeface="Inter"/>
+              </a:defRPr>
+            </a:lvl6pPr>
+            <a:lvl7pPr algn="ctr">
+              <a:defRPr sz="3150" b="1">
+                <a:solidFill>
+                  <a:srgbClr val="7A8CA3"/>
+                </a:solidFill>
+                <a:latin typeface="Inter"/>
+                <a:ea typeface="Inter"/>
+                <a:cs typeface="Inter"/>
+              </a:defRPr>
+            </a:lvl7pPr>
+            <a:lvl8pPr algn="ctr">
+              <a:defRPr sz="3150" b="1">
+                <a:solidFill>
+                  <a:srgbClr val="7A8CA3"/>
+                </a:solidFill>
+                <a:latin typeface="Inter"/>
+                <a:ea typeface="Inter"/>
+                <a:cs typeface="Inter"/>
+              </a:defRPr>
+            </a:lvl8pPr>
+            <a:lvl9pPr algn="ctr">
+              <a:defRPr sz="3150" b="1">
+                <a:solidFill>
+                  <a:srgbClr val="7A8CA3"/>
+                </a:solidFill>
+                <a:latin typeface="Inter"/>
+                <a:ea typeface="Inter"/>
+                <a:cs typeface="Inter"/>
+              </a:defRPr>
+            </a:lvl9pPr>
+          </a:lstStyle>
+          <a:p>
+            <a:pPr algn="ctr"/>
             <a:r>
-              <a:rPr sz="2025" b="1">
-                <a:solidFill>
-                  <a:srgbClr val="111111"/>
-                </a:solidFill>
-                <a:latin typeface="Tahoma"/>
-                <a:ea typeface="Tahoma"/>
-                <a:cs typeface="Tahoma"/>
+              <a:rPr sz="3150" b="1">
+                <a:solidFill>
+                  <a:srgbClr val="7A8CA3"/>
+                </a:solidFill>
+                <a:latin typeface="Inter"/>
+                <a:ea typeface="Inter"/>
+                <a:cs typeface="Inter"/>
               </a:rPr>
-              <a:t>Σε ένα μήνυμα μπορούμε να επισυνάψουμε ένα ή περισσότερα αρχεία διαφορετικού τύπου.</a:t>
+              <a:t>➜</a:t>
             </a:r>
           </a:p>
         </p:txBody>
       </p:sp>
       <p:sp>
         <p:nvSpPr>
-          <p:cNvPr id="4" name="Rectangle: Rounded Corners 3">
+          <p:cNvPr id="19" name="Rectangle: Rounded Corners 18">
             <a:extLst>
               <a:ext uri="{FF2B5EF4-FFF2-40B4-BE49-F238E27FC236}">
-                <a16:creationId xmlns:a16="http://schemas.microsoft.com/office/drawing/2014/main" id="{65D44BEA-A24E-45C9-8DD9-2D9E115779A0}"/>
+                <a16:creationId xmlns:a16="http://schemas.microsoft.com/office/drawing/2014/main" id="{DEF5F37B-0468-4C98-9004-14EB601828D5}"/>
               </a:ext>
             </a:extLst>
           </p:cNvPr>
@@ -1451,35 +3550,37 @@
         </p:nvSpPr>
         <p:spPr>
           <a:xfrm>
-            <a:off x="4095750" y="2857500"/>
-            <a:ext cx="2047875" cy="1285875"/>
+            <a:off x="6800850" y="1885950"/>
+            <a:ext cx="4705350" cy="3181350"/>
           </a:xfrm>
           <a:prstGeom prst="roundRect">
             <a:avLst>
-              <a:gd name="adj" fmla="val 5926"/>
+              <a:gd name="adj" fmla="val 2395"/>
             </a:avLst>
           </a:prstGeom>
           <a:solidFill>
-            <a:srgbClr val="F3F6F8"/>
+            <a:srgbClr val="FFFFFF"/>
           </a:solidFill>
-          <a:ln w="0">
-            <a:noFill/>
+          <a:ln w="9525">
+            <a:solidFill>
+              <a:srgbClr val="CCD6E2"/>
+            </a:solidFill>
           </a:ln>
         </p:spPr>
         <p:txBody>
           <a:bodyPr/>
           <a:lstStyle/>
           <a:p>
-            <a:endParaRPr lang="en-GB"/>
-          </a:p>
-        </p:txBody>
-      </p:sp>
-      <p:sp>
-        <p:nvSpPr>
-          <p:cNvPr id="5" name="Rectangle 4">
+            <a:endParaRPr lang="en-US"/>
+          </a:p>
+        </p:txBody>
+      </p:sp>
+      <p:sp>
+        <p:nvSpPr>
+          <p:cNvPr id="20" name="Rectangle: Rounded Corners 19">
             <a:extLst>
               <a:ext uri="{FF2B5EF4-FFF2-40B4-BE49-F238E27FC236}">
-                <a16:creationId xmlns:a16="http://schemas.microsoft.com/office/drawing/2014/main" id="{87594D24-BA8E-4D9D-8B9C-555D27FDC175}"/>
+                <a16:creationId xmlns:a16="http://schemas.microsoft.com/office/drawing/2014/main" id="{362DE390-9200-4499-A416-2E24445D2340}"/>
               </a:ext>
             </a:extLst>
           </p:cNvPr>
@@ -1490,53 +3591,192 @@
         </p:nvSpPr>
         <p:spPr>
           <a:xfrm>
-            <a:off x="4238625" y="3067050"/>
-            <a:ext cx="1762125" cy="342900"/>
+            <a:off x="7162800" y="2305050"/>
+            <a:ext cx="3981450" cy="1924050"/>
+          </a:xfrm>
+          <a:prstGeom prst="roundRect">
+            <a:avLst>
+              <a:gd name="adj" fmla="val 3960"/>
+            </a:avLst>
+          </a:prstGeom>
+          <a:solidFill>
+            <a:srgbClr val="EEF4FA"/>
+          </a:solidFill>
+          <a:ln w="9525">
+            <a:solidFill>
+              <a:srgbClr val="9CB0C8"/>
+            </a:solidFill>
+          </a:ln>
+        </p:spPr>
+        <p:txBody>
+          <a:bodyPr/>
+          <a:lstStyle/>
+          <a:p>
+            <a:endParaRPr lang="en-US"/>
+          </a:p>
+        </p:txBody>
+      </p:sp>
+      <p:sp>
+        <p:nvSpPr>
+          <p:cNvPr id="21" name="Rectangle 20">
+            <a:extLst>
+              <a:ext uri="{FF2B5EF4-FFF2-40B4-BE49-F238E27FC236}">
+                <a16:creationId xmlns:a16="http://schemas.microsoft.com/office/drawing/2014/main" id="{62C80229-F028-4F38-94AA-F7792E6980AE}"/>
+              </a:ext>
+            </a:extLst>
+          </p:cNvPr>
+          <p:cNvSpPr>
+            <a:spLocks noGrp="1"/>
+          </p:cNvSpPr>
+          <p:nvPr/>
+        </p:nvSpPr>
+        <p:spPr>
+          <a:xfrm>
+            <a:off x="7334250" y="2419350"/>
+            <a:ext cx="3619500" cy="361950"/>
           </a:xfrm>
           <a:prstGeom prst="rect">
             <a:avLst/>
           </a:prstGeom>
-          <a:noFill/>
+          <a:solidFill>
+            <a:srgbClr val="FFFFFF">
+              <a:alpha val="0"/>
+            </a:srgbClr>
+          </a:solidFill>
           <a:ln w="0">
-            <a:noFill/>
+            <a:solidFill>
+              <a:srgbClr val="FFFFFF">
+                <a:alpha val="0"/>
+              </a:srgbClr>
+            </a:solidFill>
           </a:ln>
         </p:spPr>
         <p:txBody>
-          <a:bodyPr lIns="38100" tIns="19050" rIns="38100" bIns="19050" anchor="t">
-            <a:normAutofit/>
-          </a:bodyPr>
-          <a:lstStyle/>
-          <a:p>
-            <a:pPr algn="ctr">
+          <a:bodyPr lIns="76200" tIns="38100" rIns="76200" bIns="38100" anchor="ctr"/>
+          <a:lstStyle>
+            <a:defPPr algn="ctr">
               <a:defRPr sz="1650" b="1">
                 <a:solidFill>
-                  <a:srgbClr val="F57C24"/>
-                </a:solidFill>
-                <a:latin typeface="Tahoma"/>
-                <a:ea typeface="Tahoma"/>
-                <a:cs typeface="Tahoma"/>
-              </a:defRPr>
-            </a:pPr>
+                  <a:srgbClr val="14213D"/>
+                </a:solidFill>
+                <a:latin typeface="Inter"/>
+                <a:ea typeface="Inter"/>
+                <a:cs typeface="Inter"/>
+              </a:defRPr>
+            </a:defPPr>
+            <a:lvl1pPr algn="ctr">
+              <a:defRPr sz="1650" b="1">
+                <a:solidFill>
+                  <a:srgbClr val="14213D"/>
+                </a:solidFill>
+                <a:latin typeface="Inter"/>
+                <a:ea typeface="Inter"/>
+                <a:cs typeface="Inter"/>
+              </a:defRPr>
+            </a:lvl1pPr>
+            <a:lvl2pPr algn="ctr">
+              <a:defRPr sz="1650" b="1">
+                <a:solidFill>
+                  <a:srgbClr val="14213D"/>
+                </a:solidFill>
+                <a:latin typeface="Inter"/>
+                <a:ea typeface="Inter"/>
+                <a:cs typeface="Inter"/>
+              </a:defRPr>
+            </a:lvl2pPr>
+            <a:lvl3pPr algn="ctr">
+              <a:defRPr sz="1650" b="1">
+                <a:solidFill>
+                  <a:srgbClr val="14213D"/>
+                </a:solidFill>
+                <a:latin typeface="Inter"/>
+                <a:ea typeface="Inter"/>
+                <a:cs typeface="Inter"/>
+              </a:defRPr>
+            </a:lvl3pPr>
+            <a:lvl4pPr algn="ctr">
+              <a:defRPr sz="1650" b="1">
+                <a:solidFill>
+                  <a:srgbClr val="14213D"/>
+                </a:solidFill>
+                <a:latin typeface="Inter"/>
+                <a:ea typeface="Inter"/>
+                <a:cs typeface="Inter"/>
+              </a:defRPr>
+            </a:lvl4pPr>
+            <a:lvl5pPr algn="ctr">
+              <a:defRPr sz="1650" b="1">
+                <a:solidFill>
+                  <a:srgbClr val="14213D"/>
+                </a:solidFill>
+                <a:latin typeface="Inter"/>
+                <a:ea typeface="Inter"/>
+                <a:cs typeface="Inter"/>
+              </a:defRPr>
+            </a:lvl5pPr>
+            <a:lvl6pPr algn="ctr">
+              <a:defRPr sz="1650" b="1">
+                <a:solidFill>
+                  <a:srgbClr val="14213D"/>
+                </a:solidFill>
+                <a:latin typeface="Inter"/>
+                <a:ea typeface="Inter"/>
+                <a:cs typeface="Inter"/>
+              </a:defRPr>
+            </a:lvl6pPr>
+            <a:lvl7pPr algn="ctr">
+              <a:defRPr sz="1650" b="1">
+                <a:solidFill>
+                  <a:srgbClr val="14213D"/>
+                </a:solidFill>
+                <a:latin typeface="Inter"/>
+                <a:ea typeface="Inter"/>
+                <a:cs typeface="Inter"/>
+              </a:defRPr>
+            </a:lvl7pPr>
+            <a:lvl8pPr algn="ctr">
+              <a:defRPr sz="1650" b="1">
+                <a:solidFill>
+                  <a:srgbClr val="14213D"/>
+                </a:solidFill>
+                <a:latin typeface="Inter"/>
+                <a:ea typeface="Inter"/>
+                <a:cs typeface="Inter"/>
+              </a:defRPr>
+            </a:lvl8pPr>
+            <a:lvl9pPr algn="ctr">
+              <a:defRPr sz="1650" b="1">
+                <a:solidFill>
+                  <a:srgbClr val="14213D"/>
+                </a:solidFill>
+                <a:latin typeface="Inter"/>
+                <a:ea typeface="Inter"/>
+                <a:cs typeface="Inter"/>
+              </a:defRPr>
+            </a:lvl9pPr>
+          </a:lstStyle>
+          <a:p>
+            <a:pPr algn="ctr"/>
             <a:r>
               <a:rPr sz="1650" b="1">
                 <a:solidFill>
-                  <a:srgbClr val="F57C24"/>
-                </a:solidFill>
-                <a:latin typeface="Tahoma"/>
-                <a:ea typeface="Tahoma"/>
-                <a:cs typeface="Tahoma"/>
+                  <a:srgbClr val="14213D"/>
+                </a:solidFill>
+                <a:latin typeface="Inter"/>
+                <a:ea typeface="Inter"/>
+                <a:cs typeface="Inter"/>
               </a:rPr>
-              <a:t>Κείμενο</a:t>
+              <a:t>Email προς τον καθηγητή</a:t>
             </a:r>
           </a:p>
         </p:txBody>
       </p:sp>
       <p:sp>
         <p:nvSpPr>
-          <p:cNvPr id="6" name="Rectangle 5">
+          <p:cNvPr id="22" name="Rectangle 21">
             <a:extLst>
               <a:ext uri="{FF2B5EF4-FFF2-40B4-BE49-F238E27FC236}">
-                <a16:creationId xmlns:a16="http://schemas.microsoft.com/office/drawing/2014/main" id="{ED313862-F7C9-4E18-A38C-ABA0C5152C33}"/>
+                <a16:creationId xmlns:a16="http://schemas.microsoft.com/office/drawing/2014/main" id="{7DB13E4F-5A7F-40FA-AC3B-E95CE3D93A5F}"/>
               </a:ext>
             </a:extLst>
           </p:cNvPr>
@@ -1547,53 +3787,151 @@
         </p:nvSpPr>
         <p:spPr>
           <a:xfrm>
-            <a:off x="4238625" y="3571875"/>
-            <a:ext cx="1762125" cy="333375"/>
+            <a:off x="7448550" y="2914650"/>
+            <a:ext cx="3390900" cy="381000"/>
           </a:xfrm>
           <a:prstGeom prst="rect">
             <a:avLst/>
           </a:prstGeom>
-          <a:noFill/>
+          <a:solidFill>
+            <a:srgbClr val="FFFFFF">
+              <a:alpha val="0"/>
+            </a:srgbClr>
+          </a:solidFill>
           <a:ln w="0">
-            <a:noFill/>
+            <a:solidFill>
+              <a:srgbClr val="FFFFFF">
+                <a:alpha val="0"/>
+              </a:srgbClr>
+            </a:solidFill>
           </a:ln>
         </p:spPr>
         <p:txBody>
-          <a:bodyPr lIns="38100" tIns="19050" rIns="38100" bIns="19050" anchor="t">
-            <a:normAutofit/>
-          </a:bodyPr>
-          <a:lstStyle/>
-          <a:p>
-            <a:pPr algn="ctr">
-              <a:defRPr sz="1425" b="0">
-                <a:solidFill>
-                  <a:srgbClr val="444444"/>
-                </a:solidFill>
-                <a:latin typeface="Tahoma"/>
-                <a:ea typeface="Tahoma"/>
-                <a:cs typeface="Tahoma"/>
-              </a:defRPr>
-            </a:pPr>
+          <a:bodyPr lIns="76200" tIns="38100" rIns="76200" bIns="38100" anchor="ctr"/>
+          <a:lstStyle>
+            <a:defPPr algn="l">
+              <a:defRPr sz="1350" b="0">
+                <a:solidFill>
+                  <a:srgbClr val="40516A"/>
+                </a:solidFill>
+                <a:latin typeface="Inter"/>
+                <a:ea typeface="Inter"/>
+                <a:cs typeface="Inter"/>
+              </a:defRPr>
+            </a:defPPr>
+            <a:lvl1pPr algn="l">
+              <a:defRPr sz="1350" b="0">
+                <a:solidFill>
+                  <a:srgbClr val="40516A"/>
+                </a:solidFill>
+                <a:latin typeface="Inter"/>
+                <a:ea typeface="Inter"/>
+                <a:cs typeface="Inter"/>
+              </a:defRPr>
+            </a:lvl1pPr>
+            <a:lvl2pPr algn="l">
+              <a:defRPr sz="1350" b="0">
+                <a:solidFill>
+                  <a:srgbClr val="40516A"/>
+                </a:solidFill>
+                <a:latin typeface="Inter"/>
+                <a:ea typeface="Inter"/>
+                <a:cs typeface="Inter"/>
+              </a:defRPr>
+            </a:lvl2pPr>
+            <a:lvl3pPr algn="l">
+              <a:defRPr sz="1350" b="0">
+                <a:solidFill>
+                  <a:srgbClr val="40516A"/>
+                </a:solidFill>
+                <a:latin typeface="Inter"/>
+                <a:ea typeface="Inter"/>
+                <a:cs typeface="Inter"/>
+              </a:defRPr>
+            </a:lvl3pPr>
+            <a:lvl4pPr algn="l">
+              <a:defRPr sz="1350" b="0">
+                <a:solidFill>
+                  <a:srgbClr val="40516A"/>
+                </a:solidFill>
+                <a:latin typeface="Inter"/>
+                <a:ea typeface="Inter"/>
+                <a:cs typeface="Inter"/>
+              </a:defRPr>
+            </a:lvl4pPr>
+            <a:lvl5pPr algn="l">
+              <a:defRPr sz="1350" b="0">
+                <a:solidFill>
+                  <a:srgbClr val="40516A"/>
+                </a:solidFill>
+                <a:latin typeface="Inter"/>
+                <a:ea typeface="Inter"/>
+                <a:cs typeface="Inter"/>
+              </a:defRPr>
+            </a:lvl5pPr>
+            <a:lvl6pPr algn="l">
+              <a:defRPr sz="1350" b="0">
+                <a:solidFill>
+                  <a:srgbClr val="40516A"/>
+                </a:solidFill>
+                <a:latin typeface="Inter"/>
+                <a:ea typeface="Inter"/>
+                <a:cs typeface="Inter"/>
+              </a:defRPr>
+            </a:lvl6pPr>
+            <a:lvl7pPr algn="l">
+              <a:defRPr sz="1350" b="0">
+                <a:solidFill>
+                  <a:srgbClr val="40516A"/>
+                </a:solidFill>
+                <a:latin typeface="Inter"/>
+                <a:ea typeface="Inter"/>
+                <a:cs typeface="Inter"/>
+              </a:defRPr>
+            </a:lvl7pPr>
+            <a:lvl8pPr algn="l">
+              <a:defRPr sz="1350" b="0">
+                <a:solidFill>
+                  <a:srgbClr val="40516A"/>
+                </a:solidFill>
+                <a:latin typeface="Inter"/>
+                <a:ea typeface="Inter"/>
+                <a:cs typeface="Inter"/>
+              </a:defRPr>
+            </a:lvl8pPr>
+            <a:lvl9pPr algn="l">
+              <a:defRPr sz="1350" b="0">
+                <a:solidFill>
+                  <a:srgbClr val="40516A"/>
+                </a:solidFill>
+                <a:latin typeface="Inter"/>
+                <a:ea typeface="Inter"/>
+                <a:cs typeface="Inter"/>
+              </a:defRPr>
+            </a:lvl9pPr>
+          </a:lstStyle>
+          <a:p>
+            <a:pPr algn="l"/>
             <a:r>
-              <a:rPr sz="1425" b="0">
-                <a:solidFill>
-                  <a:srgbClr val="444444"/>
-                </a:solidFill>
-                <a:latin typeface="Tahoma"/>
-                <a:ea typeface="Tahoma"/>
-                <a:cs typeface="Tahoma"/>
+              <a:rPr sz="1350" b="0">
+                <a:solidFill>
+                  <a:srgbClr val="40516A"/>
+                </a:solidFill>
+                <a:latin typeface="Inter"/>
+                <a:ea typeface="Inter"/>
+                <a:cs typeface="Inter"/>
               </a:rPr>
-              <a:t>Έγγραφα</a:t>
+              <a:t>Σας στέλνω την εργασία μου.</a:t>
             </a:r>
           </a:p>
         </p:txBody>
       </p:sp>
       <p:sp>
         <p:nvSpPr>
-          <p:cNvPr id="7" name="Rectangle: Rounded Corners 6">
+          <p:cNvPr id="23" name="Rectangle: Rounded Corners 22">
             <a:extLst>
               <a:ext uri="{FF2B5EF4-FFF2-40B4-BE49-F238E27FC236}">
-                <a16:creationId xmlns:a16="http://schemas.microsoft.com/office/drawing/2014/main" id="{4C666E21-3B81-48FE-8BBA-F596E9AE1214}"/>
+                <a16:creationId xmlns:a16="http://schemas.microsoft.com/office/drawing/2014/main" id="{1FE9B472-C8A6-499A-878E-EC6125D035F9}"/>
               </a:ext>
             </a:extLst>
           </p:cNvPr>
@@ -1604,35 +3942,37 @@
         </p:nvSpPr>
         <p:spPr>
           <a:xfrm>
-            <a:off x="6429375" y="2857500"/>
-            <a:ext cx="2047875" cy="1285875"/>
+            <a:off x="7486650" y="3467100"/>
+            <a:ext cx="1447800" cy="457200"/>
           </a:xfrm>
           <a:prstGeom prst="roundRect">
             <a:avLst>
-              <a:gd name="adj" fmla="val 5926"/>
+              <a:gd name="adj" fmla="val 16667"/>
             </a:avLst>
           </a:prstGeom>
           <a:solidFill>
-            <a:srgbClr val="F3F6F8"/>
+            <a:srgbClr val="FFFFFF"/>
           </a:solidFill>
-          <a:ln w="0">
-            <a:noFill/>
+          <a:ln w="9525">
+            <a:solidFill>
+              <a:srgbClr val="D6DEE8"/>
+            </a:solidFill>
           </a:ln>
         </p:spPr>
         <p:txBody>
           <a:bodyPr/>
           <a:lstStyle/>
           <a:p>
-            <a:endParaRPr lang="en-GB"/>
-          </a:p>
-        </p:txBody>
-      </p:sp>
-      <p:sp>
-        <p:nvSpPr>
-          <p:cNvPr id="8" name="Rectangle 7">
+            <a:endParaRPr lang="en-US"/>
+          </a:p>
+        </p:txBody>
+      </p:sp>
+      <p:sp>
+        <p:nvSpPr>
+          <p:cNvPr id="24" name="Rectangle 23">
             <a:extLst>
               <a:ext uri="{FF2B5EF4-FFF2-40B4-BE49-F238E27FC236}">
-                <a16:creationId xmlns:a16="http://schemas.microsoft.com/office/drawing/2014/main" id="{866D2A5D-2144-42F4-A4EB-52D3A9B16D4F}"/>
+                <a16:creationId xmlns:a16="http://schemas.microsoft.com/office/drawing/2014/main" id="{7E00D92E-3D5A-43D8-8BEE-094FC78932B2}"/>
               </a:ext>
             </a:extLst>
           </p:cNvPr>
@@ -1643,53 +3983,151 @@
         </p:nvSpPr>
         <p:spPr>
           <a:xfrm>
-            <a:off x="6572250" y="3067050"/>
-            <a:ext cx="1762125" cy="342900"/>
+            <a:off x="7543800" y="3524250"/>
+            <a:ext cx="1333500" cy="342900"/>
           </a:xfrm>
           <a:prstGeom prst="rect">
             <a:avLst/>
           </a:prstGeom>
-          <a:noFill/>
+          <a:solidFill>
+            <a:srgbClr val="FFFFFF">
+              <a:alpha val="0"/>
+            </a:srgbClr>
+          </a:solidFill>
           <a:ln w="0">
-            <a:noFill/>
+            <a:solidFill>
+              <a:srgbClr val="FFFFFF">
+                <a:alpha val="0"/>
+              </a:srgbClr>
+            </a:solidFill>
           </a:ln>
         </p:spPr>
         <p:txBody>
-          <a:bodyPr lIns="38100" tIns="19050" rIns="38100" bIns="19050" anchor="t">
-            <a:normAutofit/>
-          </a:bodyPr>
-          <a:lstStyle/>
-          <a:p>
-            <a:pPr algn="ctr">
-              <a:defRPr sz="1650" b="1">
-                <a:solidFill>
-                  <a:srgbClr val="5599D8"/>
-                </a:solidFill>
-                <a:latin typeface="Tahoma"/>
-                <a:ea typeface="Tahoma"/>
-                <a:cs typeface="Tahoma"/>
-              </a:defRPr>
-            </a:pPr>
+          <a:bodyPr lIns="76200" tIns="38100" rIns="76200" bIns="38100" anchor="ctr"/>
+          <a:lstStyle>
+            <a:defPPr algn="ctr">
+              <a:defRPr sz="1125" b="1">
+                <a:solidFill>
+                  <a:srgbClr val="24446A"/>
+                </a:solidFill>
+                <a:latin typeface="Inter"/>
+                <a:ea typeface="Inter"/>
+                <a:cs typeface="Inter"/>
+              </a:defRPr>
+            </a:defPPr>
+            <a:lvl1pPr algn="ctr">
+              <a:defRPr sz="1125" b="1">
+                <a:solidFill>
+                  <a:srgbClr val="24446A"/>
+                </a:solidFill>
+                <a:latin typeface="Inter"/>
+                <a:ea typeface="Inter"/>
+                <a:cs typeface="Inter"/>
+              </a:defRPr>
+            </a:lvl1pPr>
+            <a:lvl2pPr algn="ctr">
+              <a:defRPr sz="1125" b="1">
+                <a:solidFill>
+                  <a:srgbClr val="24446A"/>
+                </a:solidFill>
+                <a:latin typeface="Inter"/>
+                <a:ea typeface="Inter"/>
+                <a:cs typeface="Inter"/>
+              </a:defRPr>
+            </a:lvl2pPr>
+            <a:lvl3pPr algn="ctr">
+              <a:defRPr sz="1125" b="1">
+                <a:solidFill>
+                  <a:srgbClr val="24446A"/>
+                </a:solidFill>
+                <a:latin typeface="Inter"/>
+                <a:ea typeface="Inter"/>
+                <a:cs typeface="Inter"/>
+              </a:defRPr>
+            </a:lvl3pPr>
+            <a:lvl4pPr algn="ctr">
+              <a:defRPr sz="1125" b="1">
+                <a:solidFill>
+                  <a:srgbClr val="24446A"/>
+                </a:solidFill>
+                <a:latin typeface="Inter"/>
+                <a:ea typeface="Inter"/>
+                <a:cs typeface="Inter"/>
+              </a:defRPr>
+            </a:lvl4pPr>
+            <a:lvl5pPr algn="ctr">
+              <a:defRPr sz="1125" b="1">
+                <a:solidFill>
+                  <a:srgbClr val="24446A"/>
+                </a:solidFill>
+                <a:latin typeface="Inter"/>
+                <a:ea typeface="Inter"/>
+                <a:cs typeface="Inter"/>
+              </a:defRPr>
+            </a:lvl5pPr>
+            <a:lvl6pPr algn="ctr">
+              <a:defRPr sz="1125" b="1">
+                <a:solidFill>
+                  <a:srgbClr val="24446A"/>
+                </a:solidFill>
+                <a:latin typeface="Inter"/>
+                <a:ea typeface="Inter"/>
+                <a:cs typeface="Inter"/>
+              </a:defRPr>
+            </a:lvl6pPr>
+            <a:lvl7pPr algn="ctr">
+              <a:defRPr sz="1125" b="1">
+                <a:solidFill>
+                  <a:srgbClr val="24446A"/>
+                </a:solidFill>
+                <a:latin typeface="Inter"/>
+                <a:ea typeface="Inter"/>
+                <a:cs typeface="Inter"/>
+              </a:defRPr>
+            </a:lvl7pPr>
+            <a:lvl8pPr algn="ctr">
+              <a:defRPr sz="1125" b="1">
+                <a:solidFill>
+                  <a:srgbClr val="24446A"/>
+                </a:solidFill>
+                <a:latin typeface="Inter"/>
+                <a:ea typeface="Inter"/>
+                <a:cs typeface="Inter"/>
+              </a:defRPr>
+            </a:lvl8pPr>
+            <a:lvl9pPr algn="ctr">
+              <a:defRPr sz="1125" b="1">
+                <a:solidFill>
+                  <a:srgbClr val="24446A"/>
+                </a:solidFill>
+                <a:latin typeface="Inter"/>
+                <a:ea typeface="Inter"/>
+                <a:cs typeface="Inter"/>
+              </a:defRPr>
+            </a:lvl9pPr>
+          </a:lstStyle>
+          <a:p>
+            <a:pPr algn="ctr"/>
             <a:r>
-              <a:rPr sz="1650" b="1">
-                <a:solidFill>
-                  <a:srgbClr val="5599D8"/>
-                </a:solidFill>
-                <a:latin typeface="Tahoma"/>
-                <a:ea typeface="Tahoma"/>
-                <a:cs typeface="Tahoma"/>
+              <a:rPr sz="1125" b="1">
+                <a:solidFill>
+                  <a:srgbClr val="24446A"/>
+                </a:solidFill>
+                <a:latin typeface="Inter"/>
+                <a:ea typeface="Inter"/>
+                <a:cs typeface="Inter"/>
               </a:rPr>
-              <a:t>Εικόνα</a:t>
+              <a:t>📎 Εργασία.pdf</a:t>
             </a:r>
           </a:p>
         </p:txBody>
       </p:sp>
       <p:sp>
         <p:nvSpPr>
-          <p:cNvPr id="9" name="Rectangle 8">
+          <p:cNvPr id="25" name="Rectangle: Rounded Corners 24">
             <a:extLst>
               <a:ext uri="{FF2B5EF4-FFF2-40B4-BE49-F238E27FC236}">
-                <a16:creationId xmlns:a16="http://schemas.microsoft.com/office/drawing/2014/main" id="{88EA2D96-F8AC-45B9-87B7-19394340500A}"/>
+                <a16:creationId xmlns:a16="http://schemas.microsoft.com/office/drawing/2014/main" id="{8421CFC0-9C64-4409-971D-7AC4CD7EB9A2}"/>
               </a:ext>
             </a:extLst>
           </p:cNvPr>
@@ -1700,53 +4138,192 @@
         </p:nvSpPr>
         <p:spPr>
           <a:xfrm>
-            <a:off x="6572250" y="3571875"/>
-            <a:ext cx="1762125" cy="333375"/>
+            <a:off x="9086850" y="3467100"/>
+            <a:ext cx="1657350" cy="457200"/>
+          </a:xfrm>
+          <a:prstGeom prst="roundRect">
+            <a:avLst>
+              <a:gd name="adj" fmla="val 16667"/>
+            </a:avLst>
+          </a:prstGeom>
+          <a:solidFill>
+            <a:srgbClr val="FFFFFF"/>
+          </a:solidFill>
+          <a:ln w="9525">
+            <a:solidFill>
+              <a:srgbClr val="D6DEE8"/>
+            </a:solidFill>
+          </a:ln>
+        </p:spPr>
+        <p:txBody>
+          <a:bodyPr/>
+          <a:lstStyle/>
+          <a:p>
+            <a:endParaRPr lang="en-US"/>
+          </a:p>
+        </p:txBody>
+      </p:sp>
+      <p:sp>
+        <p:nvSpPr>
+          <p:cNvPr id="26" name="Rectangle 25">
+            <a:extLst>
+              <a:ext uri="{FF2B5EF4-FFF2-40B4-BE49-F238E27FC236}">
+                <a16:creationId xmlns:a16="http://schemas.microsoft.com/office/drawing/2014/main" id="{92D13948-0D58-4775-91F7-8275737FCDF2}"/>
+              </a:ext>
+            </a:extLst>
+          </p:cNvPr>
+          <p:cNvSpPr>
+            <a:spLocks noGrp="1"/>
+          </p:cNvSpPr>
+          <p:nvPr/>
+        </p:nvSpPr>
+        <p:spPr>
+          <a:xfrm>
+            <a:off x="9144000" y="3524250"/>
+            <a:ext cx="1543050" cy="342900"/>
           </a:xfrm>
           <a:prstGeom prst="rect">
             <a:avLst/>
           </a:prstGeom>
-          <a:noFill/>
+          <a:solidFill>
+            <a:srgbClr val="FFFFFF">
+              <a:alpha val="0"/>
+            </a:srgbClr>
+          </a:solidFill>
           <a:ln w="0">
-            <a:noFill/>
+            <a:solidFill>
+              <a:srgbClr val="FFFFFF">
+                <a:alpha val="0"/>
+              </a:srgbClr>
+            </a:solidFill>
           </a:ln>
         </p:spPr>
         <p:txBody>
-          <a:bodyPr lIns="38100" tIns="19050" rIns="38100" bIns="19050" anchor="t">
-            <a:normAutofit/>
-          </a:bodyPr>
-          <a:lstStyle/>
-          <a:p>
-            <a:pPr algn="ctr">
-              <a:defRPr sz="1425" b="0">
-                <a:solidFill>
-                  <a:srgbClr val="444444"/>
-                </a:solidFill>
-                <a:latin typeface="Tahoma"/>
-                <a:ea typeface="Tahoma"/>
-                <a:cs typeface="Tahoma"/>
-              </a:defRPr>
-            </a:pPr>
+          <a:bodyPr lIns="76200" tIns="38100" rIns="76200" bIns="38100" anchor="ctr"/>
+          <a:lstStyle>
+            <a:defPPr algn="ctr">
+              <a:defRPr sz="1125" b="1">
+                <a:solidFill>
+                  <a:srgbClr val="24446A"/>
+                </a:solidFill>
+                <a:latin typeface="Inter"/>
+                <a:ea typeface="Inter"/>
+                <a:cs typeface="Inter"/>
+              </a:defRPr>
+            </a:defPPr>
+            <a:lvl1pPr algn="ctr">
+              <a:defRPr sz="1125" b="1">
+                <a:solidFill>
+                  <a:srgbClr val="24446A"/>
+                </a:solidFill>
+                <a:latin typeface="Inter"/>
+                <a:ea typeface="Inter"/>
+                <a:cs typeface="Inter"/>
+              </a:defRPr>
+            </a:lvl1pPr>
+            <a:lvl2pPr algn="ctr">
+              <a:defRPr sz="1125" b="1">
+                <a:solidFill>
+                  <a:srgbClr val="24446A"/>
+                </a:solidFill>
+                <a:latin typeface="Inter"/>
+                <a:ea typeface="Inter"/>
+                <a:cs typeface="Inter"/>
+              </a:defRPr>
+            </a:lvl2pPr>
+            <a:lvl3pPr algn="ctr">
+              <a:defRPr sz="1125" b="1">
+                <a:solidFill>
+                  <a:srgbClr val="24446A"/>
+                </a:solidFill>
+                <a:latin typeface="Inter"/>
+                <a:ea typeface="Inter"/>
+                <a:cs typeface="Inter"/>
+              </a:defRPr>
+            </a:lvl3pPr>
+            <a:lvl4pPr algn="ctr">
+              <a:defRPr sz="1125" b="1">
+                <a:solidFill>
+                  <a:srgbClr val="24446A"/>
+                </a:solidFill>
+                <a:latin typeface="Inter"/>
+                <a:ea typeface="Inter"/>
+                <a:cs typeface="Inter"/>
+              </a:defRPr>
+            </a:lvl4pPr>
+            <a:lvl5pPr algn="ctr">
+              <a:defRPr sz="1125" b="1">
+                <a:solidFill>
+                  <a:srgbClr val="24446A"/>
+                </a:solidFill>
+                <a:latin typeface="Inter"/>
+                <a:ea typeface="Inter"/>
+                <a:cs typeface="Inter"/>
+              </a:defRPr>
+            </a:lvl5pPr>
+            <a:lvl6pPr algn="ctr">
+              <a:defRPr sz="1125" b="1">
+                <a:solidFill>
+                  <a:srgbClr val="24446A"/>
+                </a:solidFill>
+                <a:latin typeface="Inter"/>
+                <a:ea typeface="Inter"/>
+                <a:cs typeface="Inter"/>
+              </a:defRPr>
+            </a:lvl6pPr>
+            <a:lvl7pPr algn="ctr">
+              <a:defRPr sz="1125" b="1">
+                <a:solidFill>
+                  <a:srgbClr val="24446A"/>
+                </a:solidFill>
+                <a:latin typeface="Inter"/>
+                <a:ea typeface="Inter"/>
+                <a:cs typeface="Inter"/>
+              </a:defRPr>
+            </a:lvl7pPr>
+            <a:lvl8pPr algn="ctr">
+              <a:defRPr sz="1125" b="1">
+                <a:solidFill>
+                  <a:srgbClr val="24446A"/>
+                </a:solidFill>
+                <a:latin typeface="Inter"/>
+                <a:ea typeface="Inter"/>
+                <a:cs typeface="Inter"/>
+              </a:defRPr>
+            </a:lvl8pPr>
+            <a:lvl9pPr algn="ctr">
+              <a:defRPr sz="1125" b="1">
+                <a:solidFill>
+                  <a:srgbClr val="24446A"/>
+                </a:solidFill>
+                <a:latin typeface="Inter"/>
+                <a:ea typeface="Inter"/>
+                <a:cs typeface="Inter"/>
+              </a:defRPr>
+            </a:lvl9pPr>
+          </a:lstStyle>
+          <a:p>
+            <a:pPr algn="ctr"/>
             <a:r>
-              <a:rPr sz="1425" b="0">
-                <a:solidFill>
-                  <a:srgbClr val="444444"/>
-                </a:solidFill>
-                <a:latin typeface="Tahoma"/>
-                <a:ea typeface="Tahoma"/>
-                <a:cs typeface="Tahoma"/>
+              <a:rPr sz="1125" b="1">
+                <a:solidFill>
+                  <a:srgbClr val="24446A"/>
+                </a:solidFill>
+                <a:latin typeface="Inter"/>
+                <a:ea typeface="Inter"/>
+                <a:cs typeface="Inter"/>
               </a:rPr>
-              <a:t>Φωτογραφίες</a:t>
+              <a:t>📎 Φωτογραφία.jpg</a:t>
             </a:r>
           </a:p>
         </p:txBody>
       </p:sp>
       <p:sp>
         <p:nvSpPr>
-          <p:cNvPr id="10" name="Rectangle: Rounded Corners 9">
+          <p:cNvPr id="27" name="Rectangle 26">
             <a:extLst>
               <a:ext uri="{FF2B5EF4-FFF2-40B4-BE49-F238E27FC236}">
-                <a16:creationId xmlns:a16="http://schemas.microsoft.com/office/drawing/2014/main" id="{490B8828-D32E-4A3D-BE33-A1E6ECA52A6F}"/>
+                <a16:creationId xmlns:a16="http://schemas.microsoft.com/office/drawing/2014/main" id="{B0181736-33AC-4760-8EC4-27BF669ECD75}"/>
               </a:ext>
             </a:extLst>
           </p:cNvPr>
@@ -1757,35 +4334,192 @@
         </p:nvSpPr>
         <p:spPr>
           <a:xfrm>
-            <a:off x="8763000" y="2857500"/>
-            <a:ext cx="2047875" cy="1285875"/>
+            <a:off x="7239000" y="4362450"/>
+            <a:ext cx="3829050" cy="457200"/>
+          </a:xfrm>
+          <a:prstGeom prst="rect">
+            <a:avLst/>
+          </a:prstGeom>
+          <a:solidFill>
+            <a:srgbClr val="FFFFFF">
+              <a:alpha val="0"/>
+            </a:srgbClr>
+          </a:solidFill>
+          <a:ln w="0">
+            <a:solidFill>
+              <a:srgbClr val="FFFFFF">
+                <a:alpha val="0"/>
+              </a:srgbClr>
+            </a:solidFill>
+          </a:ln>
+        </p:spPr>
+        <p:txBody>
+          <a:bodyPr lIns="76200" tIns="38100" rIns="76200" bIns="38100" anchor="ctr"/>
+          <a:lstStyle>
+            <a:defPPr algn="ctr">
+              <a:defRPr sz="1350" b="1">
+                <a:solidFill>
+                  <a:srgbClr val="25364D"/>
+                </a:solidFill>
+                <a:latin typeface="Inter"/>
+                <a:ea typeface="Inter"/>
+                <a:cs typeface="Inter"/>
+              </a:defRPr>
+            </a:defPPr>
+            <a:lvl1pPr algn="ctr">
+              <a:defRPr sz="1350" b="1">
+                <a:solidFill>
+                  <a:srgbClr val="25364D"/>
+                </a:solidFill>
+                <a:latin typeface="Inter"/>
+                <a:ea typeface="Inter"/>
+                <a:cs typeface="Inter"/>
+              </a:defRPr>
+            </a:lvl1pPr>
+            <a:lvl2pPr algn="ctr">
+              <a:defRPr sz="1350" b="1">
+                <a:solidFill>
+                  <a:srgbClr val="25364D"/>
+                </a:solidFill>
+                <a:latin typeface="Inter"/>
+                <a:ea typeface="Inter"/>
+                <a:cs typeface="Inter"/>
+              </a:defRPr>
+            </a:lvl2pPr>
+            <a:lvl3pPr algn="ctr">
+              <a:defRPr sz="1350" b="1">
+                <a:solidFill>
+                  <a:srgbClr val="25364D"/>
+                </a:solidFill>
+                <a:latin typeface="Inter"/>
+                <a:ea typeface="Inter"/>
+                <a:cs typeface="Inter"/>
+              </a:defRPr>
+            </a:lvl3pPr>
+            <a:lvl4pPr algn="ctr">
+              <a:defRPr sz="1350" b="1">
+                <a:solidFill>
+                  <a:srgbClr val="25364D"/>
+                </a:solidFill>
+                <a:latin typeface="Inter"/>
+                <a:ea typeface="Inter"/>
+                <a:cs typeface="Inter"/>
+              </a:defRPr>
+            </a:lvl4pPr>
+            <a:lvl5pPr algn="ctr">
+              <a:defRPr sz="1350" b="1">
+                <a:solidFill>
+                  <a:srgbClr val="25364D"/>
+                </a:solidFill>
+                <a:latin typeface="Inter"/>
+                <a:ea typeface="Inter"/>
+                <a:cs typeface="Inter"/>
+              </a:defRPr>
+            </a:lvl5pPr>
+            <a:lvl6pPr algn="ctr">
+              <a:defRPr sz="1350" b="1">
+                <a:solidFill>
+                  <a:srgbClr val="25364D"/>
+                </a:solidFill>
+                <a:latin typeface="Inter"/>
+                <a:ea typeface="Inter"/>
+                <a:cs typeface="Inter"/>
+              </a:defRPr>
+            </a:lvl6pPr>
+            <a:lvl7pPr algn="ctr">
+              <a:defRPr sz="1350" b="1">
+                <a:solidFill>
+                  <a:srgbClr val="25364D"/>
+                </a:solidFill>
+                <a:latin typeface="Inter"/>
+                <a:ea typeface="Inter"/>
+                <a:cs typeface="Inter"/>
+              </a:defRPr>
+            </a:lvl7pPr>
+            <a:lvl8pPr algn="ctr">
+              <a:defRPr sz="1350" b="1">
+                <a:solidFill>
+                  <a:srgbClr val="25364D"/>
+                </a:solidFill>
+                <a:latin typeface="Inter"/>
+                <a:ea typeface="Inter"/>
+                <a:cs typeface="Inter"/>
+              </a:defRPr>
+            </a:lvl8pPr>
+            <a:lvl9pPr algn="ctr">
+              <a:defRPr sz="1350" b="1">
+                <a:solidFill>
+                  <a:srgbClr val="25364D"/>
+                </a:solidFill>
+                <a:latin typeface="Inter"/>
+                <a:ea typeface="Inter"/>
+                <a:cs typeface="Inter"/>
+              </a:defRPr>
+            </a:lvl9pPr>
+          </a:lstStyle>
+          <a:p>
+            <a:pPr algn="ctr"/>
+            <a:r>
+              <a:rPr sz="1350" b="1">
+                <a:solidFill>
+                  <a:srgbClr val="25364D"/>
+                </a:solidFill>
+                <a:latin typeface="Inter"/>
+                <a:ea typeface="Inter"/>
+                <a:cs typeface="Inter"/>
+              </a:rPr>
+              <a:t>Ο παραλήπτης μπορεί να ανοίξει και να αποθηκεύσει τα αρχεία.</a:t>
+            </a:r>
+          </a:p>
+        </p:txBody>
+      </p:sp>
+      <p:sp>
+        <p:nvSpPr>
+          <p:cNvPr id="28" name="Rectangle: Rounded Corners 27">
+            <a:extLst>
+              <a:ext uri="{FF2B5EF4-FFF2-40B4-BE49-F238E27FC236}">
+                <a16:creationId xmlns:a16="http://schemas.microsoft.com/office/drawing/2014/main" id="{1CDF992F-1E37-403E-9BDE-2DF3EDFB1A15}"/>
+              </a:ext>
+            </a:extLst>
+          </p:cNvPr>
+          <p:cNvSpPr>
+            <a:spLocks noGrp="1"/>
+          </p:cNvSpPr>
+          <p:nvPr/>
+        </p:nvSpPr>
+        <p:spPr>
+          <a:xfrm>
+            <a:off x="685800" y="5429250"/>
+            <a:ext cx="10820400" cy="914400"/>
           </a:xfrm>
           <a:prstGeom prst="roundRect">
             <a:avLst>
-              <a:gd name="adj" fmla="val 5926"/>
+              <a:gd name="adj" fmla="val 8333"/>
             </a:avLst>
           </a:prstGeom>
           <a:solidFill>
-            <a:srgbClr val="F3F6F8"/>
+            <a:srgbClr val="E8F1E8"/>
           </a:solidFill>
-          <a:ln w="0">
-            <a:noFill/>
+          <a:ln w="9525">
+            <a:solidFill>
+              <a:srgbClr val="B7D2BA"/>
+            </a:solidFill>
           </a:ln>
         </p:spPr>
         <p:txBody>
           <a:bodyPr/>
           <a:lstStyle/>
           <a:p>
-            <a:endParaRPr lang="en-GB"/>
-          </a:p>
-        </p:txBody>
-      </p:sp>
-      <p:sp>
-        <p:nvSpPr>
-          <p:cNvPr id="11" name="Rectangle 10">
+            <a:endParaRPr lang="en-US"/>
+          </a:p>
+        </p:txBody>
+      </p:sp>
+      <p:sp>
+        <p:nvSpPr>
+          <p:cNvPr id="29" name="Rectangle 28">
             <a:extLst>
               <a:ext uri="{FF2B5EF4-FFF2-40B4-BE49-F238E27FC236}">
-                <a16:creationId xmlns:a16="http://schemas.microsoft.com/office/drawing/2014/main" id="{E5E23D55-421D-4242-8218-2C74BA9D8EF4}"/>
+                <a16:creationId xmlns:a16="http://schemas.microsoft.com/office/drawing/2014/main" id="{52E0216A-7AF3-4E2A-9EA4-C5553C1AA2CD}"/>
               </a:ext>
             </a:extLst>
           </p:cNvPr>
@@ -1796,53 +4530,151 @@
         </p:nvSpPr>
         <p:spPr>
           <a:xfrm>
-            <a:off x="8905875" y="3067050"/>
-            <a:ext cx="1762125" cy="342900"/>
+            <a:off x="971550" y="5562600"/>
+            <a:ext cx="10248900" cy="361950"/>
           </a:xfrm>
           <a:prstGeom prst="rect">
             <a:avLst/>
           </a:prstGeom>
-          <a:noFill/>
+          <a:solidFill>
+            <a:srgbClr val="FFFFFF">
+              <a:alpha val="0"/>
+            </a:srgbClr>
+          </a:solidFill>
           <a:ln w="0">
-            <a:noFill/>
+            <a:solidFill>
+              <a:srgbClr val="FFFFFF">
+                <a:alpha val="0"/>
+              </a:srgbClr>
+            </a:solidFill>
           </a:ln>
         </p:spPr>
         <p:txBody>
-          <a:bodyPr lIns="38100" tIns="19050" rIns="38100" bIns="19050" anchor="t">
-            <a:normAutofit/>
-          </a:bodyPr>
-          <a:lstStyle/>
-          <a:p>
-            <a:pPr algn="ctr">
-              <a:defRPr sz="1650" b="1">
-                <a:solidFill>
-                  <a:srgbClr val="6CAB4F"/>
-                </a:solidFill>
-                <a:latin typeface="Tahoma"/>
-                <a:ea typeface="Tahoma"/>
-                <a:cs typeface="Tahoma"/>
-              </a:defRPr>
-            </a:pPr>
+          <a:bodyPr lIns="76200" tIns="38100" rIns="76200" bIns="38100" anchor="ctr"/>
+          <a:lstStyle>
+            <a:defPPr algn="ctr">
+              <a:defRPr sz="1875" b="1">
+                <a:solidFill>
+                  <a:srgbClr val="234D32"/>
+                </a:solidFill>
+                <a:latin typeface="Inter"/>
+                <a:ea typeface="Inter"/>
+                <a:cs typeface="Inter"/>
+              </a:defRPr>
+            </a:defPPr>
+            <a:lvl1pPr algn="ctr">
+              <a:defRPr sz="1875" b="1">
+                <a:solidFill>
+                  <a:srgbClr val="234D32"/>
+                </a:solidFill>
+                <a:latin typeface="Inter"/>
+                <a:ea typeface="Inter"/>
+                <a:cs typeface="Inter"/>
+              </a:defRPr>
+            </a:lvl1pPr>
+            <a:lvl2pPr algn="ctr">
+              <a:defRPr sz="1875" b="1">
+                <a:solidFill>
+                  <a:srgbClr val="234D32"/>
+                </a:solidFill>
+                <a:latin typeface="Inter"/>
+                <a:ea typeface="Inter"/>
+                <a:cs typeface="Inter"/>
+              </a:defRPr>
+            </a:lvl2pPr>
+            <a:lvl3pPr algn="ctr">
+              <a:defRPr sz="1875" b="1">
+                <a:solidFill>
+                  <a:srgbClr val="234D32"/>
+                </a:solidFill>
+                <a:latin typeface="Inter"/>
+                <a:ea typeface="Inter"/>
+                <a:cs typeface="Inter"/>
+              </a:defRPr>
+            </a:lvl3pPr>
+            <a:lvl4pPr algn="ctr">
+              <a:defRPr sz="1875" b="1">
+                <a:solidFill>
+                  <a:srgbClr val="234D32"/>
+                </a:solidFill>
+                <a:latin typeface="Inter"/>
+                <a:ea typeface="Inter"/>
+                <a:cs typeface="Inter"/>
+              </a:defRPr>
+            </a:lvl4pPr>
+            <a:lvl5pPr algn="ctr">
+              <a:defRPr sz="1875" b="1">
+                <a:solidFill>
+                  <a:srgbClr val="234D32"/>
+                </a:solidFill>
+                <a:latin typeface="Inter"/>
+                <a:ea typeface="Inter"/>
+                <a:cs typeface="Inter"/>
+              </a:defRPr>
+            </a:lvl5pPr>
+            <a:lvl6pPr algn="ctr">
+              <a:defRPr sz="1875" b="1">
+                <a:solidFill>
+                  <a:srgbClr val="234D32"/>
+                </a:solidFill>
+                <a:latin typeface="Inter"/>
+                <a:ea typeface="Inter"/>
+                <a:cs typeface="Inter"/>
+              </a:defRPr>
+            </a:lvl6pPr>
+            <a:lvl7pPr algn="ctr">
+              <a:defRPr sz="1875" b="1">
+                <a:solidFill>
+                  <a:srgbClr val="234D32"/>
+                </a:solidFill>
+                <a:latin typeface="Inter"/>
+                <a:ea typeface="Inter"/>
+                <a:cs typeface="Inter"/>
+              </a:defRPr>
+            </a:lvl7pPr>
+            <a:lvl8pPr algn="ctr">
+              <a:defRPr sz="1875" b="1">
+                <a:solidFill>
+                  <a:srgbClr val="234D32"/>
+                </a:solidFill>
+                <a:latin typeface="Inter"/>
+                <a:ea typeface="Inter"/>
+                <a:cs typeface="Inter"/>
+              </a:defRPr>
+            </a:lvl8pPr>
+            <a:lvl9pPr algn="ctr">
+              <a:defRPr sz="1875" b="1">
+                <a:solidFill>
+                  <a:srgbClr val="234D32"/>
+                </a:solidFill>
+                <a:latin typeface="Inter"/>
+                <a:ea typeface="Inter"/>
+                <a:cs typeface="Inter"/>
+              </a:defRPr>
+            </a:lvl9pPr>
+          </a:lstStyle>
+          <a:p>
+            <a:pPr algn="ctr"/>
             <a:r>
-              <a:rPr sz="1650" b="1">
-                <a:solidFill>
-                  <a:srgbClr val="6CAB4F"/>
-                </a:solidFill>
-                <a:latin typeface="Tahoma"/>
-                <a:ea typeface="Tahoma"/>
-                <a:cs typeface="Tahoma"/>
+              <a:rPr sz="1875" b="1">
+                <a:solidFill>
+                  <a:srgbClr val="234D32"/>
+                </a:solidFill>
+                <a:latin typeface="Inter"/>
+                <a:ea typeface="Inter"/>
+                <a:cs typeface="Inter"/>
               </a:rPr>
-              <a:t>Ήχος / Βίντεο</a:t>
+              <a:t>Το μήνυμα εξηγεί. Το συνημμένο μεταφέρει το αρχείο.</a:t>
             </a:r>
           </a:p>
         </p:txBody>
       </p:sp>
       <p:sp>
         <p:nvSpPr>
-          <p:cNvPr id="12" name="Rectangle 11">
+          <p:cNvPr id="30" name="Rectangle 29">
             <a:extLst>
               <a:ext uri="{FF2B5EF4-FFF2-40B4-BE49-F238E27FC236}">
-                <a16:creationId xmlns:a16="http://schemas.microsoft.com/office/drawing/2014/main" id="{0FBCA25D-99E4-4858-ABB6-9F62E90164AA}"/>
+                <a16:creationId xmlns:a16="http://schemas.microsoft.com/office/drawing/2014/main" id="{09F61CD0-2348-4B20-AEAE-C96CA84C98EB}"/>
               </a:ext>
             </a:extLst>
           </p:cNvPr>
@@ -1853,182 +4685,149 @@
         </p:nvSpPr>
         <p:spPr>
           <a:xfrm>
-            <a:off x="8905875" y="3571875"/>
-            <a:ext cx="1762125" cy="333375"/>
+            <a:off x="971550" y="5915025"/>
+            <a:ext cx="10248900" cy="285750"/>
           </a:xfrm>
           <a:prstGeom prst="rect">
             <a:avLst/>
           </a:prstGeom>
-          <a:noFill/>
-          <a:ln w="0">
-            <a:noFill/>
-          </a:ln>
-        </p:spPr>
-        <p:txBody>
-          <a:bodyPr lIns="38100" tIns="19050" rIns="38100" bIns="19050" anchor="t">
-            <a:normAutofit/>
-          </a:bodyPr>
-          <a:lstStyle/>
-          <a:p>
-            <a:pPr algn="ctr">
-              <a:defRPr sz="1425" b="0">
-                <a:solidFill>
-                  <a:srgbClr val="444444"/>
-                </a:solidFill>
-                <a:latin typeface="Tahoma"/>
-                <a:ea typeface="Tahoma"/>
-                <a:cs typeface="Tahoma"/>
-              </a:defRPr>
-            </a:pPr>
-            <a:r>
-              <a:rPr sz="1425" b="0">
-                <a:solidFill>
-                  <a:srgbClr val="444444"/>
-                </a:solidFill>
-                <a:latin typeface="Tahoma"/>
-                <a:ea typeface="Tahoma"/>
-                <a:cs typeface="Tahoma"/>
-              </a:rPr>
-              <a:t>Πολυμέσα</a:t>
-            </a:r>
-          </a:p>
-        </p:txBody>
-      </p:sp>
-      <p:sp>
-        <p:nvSpPr>
-          <p:cNvPr id="13" name="Rectangle 12">
-            <a:extLst>
-              <a:ext uri="{FF2B5EF4-FFF2-40B4-BE49-F238E27FC236}">
-                <a16:creationId xmlns:a16="http://schemas.microsoft.com/office/drawing/2014/main" id="{6A03AC18-366E-4AF2-B5E0-3059322AD21A}"/>
-              </a:ext>
-            </a:extLst>
-          </p:cNvPr>
-          <p:cNvSpPr>
-            <a:spLocks noGrp="1"/>
-          </p:cNvSpPr>
-          <p:nvPr/>
-        </p:nvSpPr>
-        <p:spPr>
-          <a:xfrm>
-            <a:off x="4095750" y="4810125"/>
-            <a:ext cx="6858000" cy="571500"/>
-          </a:xfrm>
-          <a:prstGeom prst="rect">
-            <a:avLst/>
-          </a:prstGeom>
-          <a:noFill/>
-          <a:ln w="0">
-            <a:noFill/>
-          </a:ln>
-        </p:spPr>
-        <p:txBody>
-          <a:bodyPr lIns="38100" tIns="19050" rIns="38100" bIns="19050" anchor="t">
-            <a:normAutofit/>
-          </a:bodyPr>
-          <a:lstStyle/>
-          <a:p>
-            <a:pPr algn="ctr">
-              <a:defRPr sz="1650" b="0">
-                <a:solidFill>
-                  <a:srgbClr val="444444"/>
-                </a:solidFill>
-                <a:latin typeface="Tahoma"/>
-                <a:ea typeface="Tahoma"/>
-                <a:cs typeface="Tahoma"/>
-              </a:defRPr>
-            </a:pPr>
-            <a:r>
-              <a:rPr sz="1650" b="0">
-                <a:solidFill>
-                  <a:srgbClr val="444444"/>
-                </a:solidFill>
-                <a:latin typeface="Tahoma"/>
-                <a:ea typeface="Tahoma"/>
-                <a:cs typeface="Tahoma"/>
-              </a:rPr>
-              <a:t>Ελέγχουμε πάντα ότι το σωστό αρχείο εμφανίζεται στο μήνυμα πριν την αποστολή.</a:t>
-            </a:r>
-          </a:p>
-        </p:txBody>
-      </p:sp>
-      <p:sp>
-        <p:nvSpPr>
-          <p:cNvPr id="14" name="Rectangle 13">
-            <a:extLst>
-              <a:ext uri="{FF2B5EF4-FFF2-40B4-BE49-F238E27FC236}">
-                <a16:creationId xmlns:a16="http://schemas.microsoft.com/office/drawing/2014/main" id="{24EBBC61-BA63-4EC0-914F-7BFBF6842933}"/>
-              </a:ext>
-            </a:extLst>
-          </p:cNvPr>
-          <p:cNvSpPr>
-            <a:spLocks noGrp="1"/>
-          </p:cNvSpPr>
-          <p:nvPr/>
-        </p:nvSpPr>
-        <p:spPr>
-          <a:xfrm>
-            <a:off x="552450" y="6429375"/>
-            <a:ext cx="11087100" cy="47625"/>
-          </a:xfrm>
-          <a:prstGeom prst="rect">
-            <a:avLst/>
-          </a:prstGeom>
           <a:solidFill>
-            <a:srgbClr val="F57C24"/>
+            <a:srgbClr val="FFFFFF">
+              <a:alpha val="0"/>
+            </a:srgbClr>
           </a:solidFill>
           <a:ln w="0">
-            <a:noFill/>
+            <a:solidFill>
+              <a:srgbClr val="FFFFFF">
+                <a:alpha val="0"/>
+              </a:srgbClr>
+            </a:solidFill>
           </a:ln>
         </p:spPr>
         <p:txBody>
-          <a:bodyPr/>
-          <a:lstStyle/>
-          <a:p>
-            <a:endParaRPr lang="en-GB"/>
-          </a:p>
-        </p:txBody>
-      </p:sp>
-      <p:sp>
-        <p:nvSpPr>
-          <p:cNvPr id="15" name="Rectangle 14">
-            <a:extLst>
-              <a:ext uri="{FF2B5EF4-FFF2-40B4-BE49-F238E27FC236}">
-                <a16:creationId xmlns:a16="http://schemas.microsoft.com/office/drawing/2014/main" id="{E178A829-824D-401A-AE27-CAC310681A9E}"/>
-              </a:ext>
-            </a:extLst>
-          </p:cNvPr>
-          <p:cNvSpPr>
-            <a:spLocks noGrp="1"/>
-          </p:cNvSpPr>
-          <p:nvPr/>
-        </p:nvSpPr>
-        <p:spPr>
-          <a:xfrm>
-            <a:off x="4286250" y="6429375"/>
-            <a:ext cx="7353300" cy="47625"/>
-          </a:xfrm>
-          <a:prstGeom prst="rect">
-            <a:avLst/>
-          </a:prstGeom>
-          <a:solidFill>
-            <a:srgbClr val="77A9D7"/>
-          </a:solidFill>
-          <a:ln w="0">
-            <a:noFill/>
-          </a:ln>
-        </p:spPr>
-        <p:txBody>
-          <a:bodyPr/>
-          <a:lstStyle/>
-          <a:p>
-            <a:endParaRPr lang="en-GB"/>
+          <a:bodyPr lIns="76200" tIns="38100" rIns="76200" bIns="38100" anchor="ctr"/>
+          <a:lstStyle>
+            <a:defPPr algn="ctr">
+              <a:defRPr sz="1275" b="0">
+                <a:solidFill>
+                  <a:srgbClr val="41624A"/>
+                </a:solidFill>
+                <a:latin typeface="Inter"/>
+                <a:ea typeface="Inter"/>
+                <a:cs typeface="Inter"/>
+              </a:defRPr>
+            </a:defPPr>
+            <a:lvl1pPr algn="ctr">
+              <a:defRPr sz="1275" b="0">
+                <a:solidFill>
+                  <a:srgbClr val="41624A"/>
+                </a:solidFill>
+                <a:latin typeface="Inter"/>
+                <a:ea typeface="Inter"/>
+                <a:cs typeface="Inter"/>
+              </a:defRPr>
+            </a:lvl1pPr>
+            <a:lvl2pPr algn="ctr">
+              <a:defRPr sz="1275" b="0">
+                <a:solidFill>
+                  <a:srgbClr val="41624A"/>
+                </a:solidFill>
+                <a:latin typeface="Inter"/>
+                <a:ea typeface="Inter"/>
+                <a:cs typeface="Inter"/>
+              </a:defRPr>
+            </a:lvl2pPr>
+            <a:lvl3pPr algn="ctr">
+              <a:defRPr sz="1275" b="0">
+                <a:solidFill>
+                  <a:srgbClr val="41624A"/>
+                </a:solidFill>
+                <a:latin typeface="Inter"/>
+                <a:ea typeface="Inter"/>
+                <a:cs typeface="Inter"/>
+              </a:defRPr>
+            </a:lvl3pPr>
+            <a:lvl4pPr algn="ctr">
+              <a:defRPr sz="1275" b="0">
+                <a:solidFill>
+                  <a:srgbClr val="41624A"/>
+                </a:solidFill>
+                <a:latin typeface="Inter"/>
+                <a:ea typeface="Inter"/>
+                <a:cs typeface="Inter"/>
+              </a:defRPr>
+            </a:lvl4pPr>
+            <a:lvl5pPr algn="ctr">
+              <a:defRPr sz="1275" b="0">
+                <a:solidFill>
+                  <a:srgbClr val="41624A"/>
+                </a:solidFill>
+                <a:latin typeface="Inter"/>
+                <a:ea typeface="Inter"/>
+                <a:cs typeface="Inter"/>
+              </a:defRPr>
+            </a:lvl5pPr>
+            <a:lvl6pPr algn="ctr">
+              <a:defRPr sz="1275" b="0">
+                <a:solidFill>
+                  <a:srgbClr val="41624A"/>
+                </a:solidFill>
+                <a:latin typeface="Inter"/>
+                <a:ea typeface="Inter"/>
+                <a:cs typeface="Inter"/>
+              </a:defRPr>
+            </a:lvl6pPr>
+            <a:lvl7pPr algn="ctr">
+              <a:defRPr sz="1275" b="0">
+                <a:solidFill>
+                  <a:srgbClr val="41624A"/>
+                </a:solidFill>
+                <a:latin typeface="Inter"/>
+                <a:ea typeface="Inter"/>
+                <a:cs typeface="Inter"/>
+              </a:defRPr>
+            </a:lvl7pPr>
+            <a:lvl8pPr algn="ctr">
+              <a:defRPr sz="1275" b="0">
+                <a:solidFill>
+                  <a:srgbClr val="41624A"/>
+                </a:solidFill>
+                <a:latin typeface="Inter"/>
+                <a:ea typeface="Inter"/>
+                <a:cs typeface="Inter"/>
+              </a:defRPr>
+            </a:lvl8pPr>
+            <a:lvl9pPr algn="ctr">
+              <a:defRPr sz="1275" b="0">
+                <a:solidFill>
+                  <a:srgbClr val="41624A"/>
+                </a:solidFill>
+                <a:latin typeface="Inter"/>
+                <a:ea typeface="Inter"/>
+                <a:cs typeface="Inter"/>
+              </a:defRPr>
+            </a:lvl9pPr>
+          </a:lstStyle>
+          <a:p>
+            <a:pPr algn="ctr"/>
+            <a:r>
+              <a:rPr sz="1275" b="0">
+                <a:solidFill>
+                  <a:srgbClr val="41624A"/>
+                </a:solidFill>
+                <a:latin typeface="Inter"/>
+                <a:ea typeface="Inter"/>
+                <a:cs typeface="Inter"/>
+              </a:rPr>
+              <a:t>Χρήσιμο για εργασίες, φωτογραφίες, έγγραφα και άλλα αρχεία.</a:t>
+            </a:r>
           </a:p>
         </p:txBody>
       </p:sp>
     </p:spTree>
     <p:extLst>
       <p:ext uri="{BB962C8B-B14F-4D97-AF65-F5344CB8AC3E}">
-        <p14:creationId xmlns:p14="http://schemas.microsoft.com/office/powerpoint/2010/main" val="1126194253"/>
+        <p14:creationId xmlns:p14="http://schemas.microsoft.com/office/powerpoint/2010/main" val="2121798388"/>
       </p:ext>
     </p:extLst>
   </p:cSld>
@@ -2065,10 +4864,10 @@
       </p:grpSpPr>
       <p:sp>
         <p:nvSpPr>
-          <p:cNvPr id="21" name="Rectangle 20">
+          <p:cNvPr id="16" name="Rectangle 15">
             <a:extLst>
               <a:ext uri="{FF2B5EF4-FFF2-40B4-BE49-F238E27FC236}">
-                <a16:creationId xmlns:a16="http://schemas.microsoft.com/office/drawing/2014/main" id="{0B666744-8F35-40B5-9E4D-379BFB579709}"/>
+                <a16:creationId xmlns:a16="http://schemas.microsoft.com/office/drawing/2014/main" id="{FA9B9568-5E18-4335-93FF-0F7C6D34E3FD}"/>
               </a:ext>
             </a:extLst>
           </p:cNvPr>
@@ -2115,854 +4914,14 @@
                 <a:ea typeface="Tahoma"/>
                 <a:cs typeface="Tahoma"/>
               </a:rPr>
-              <a:t>Επισύναψη αρχείου σε μήνυμα</a:t>
-            </a:r>
-          </a:p>
-        </p:txBody>
-      </p:sp>
-      <p:sp>
-        <p:nvSpPr>
-          <p:cNvPr id="2" name="Rectangle: Rounded Corners 1">
-            <a:extLst>
-              <a:ext uri="{FF2B5EF4-FFF2-40B4-BE49-F238E27FC236}">
-                <a16:creationId xmlns:a16="http://schemas.microsoft.com/office/drawing/2014/main" id="{DE5DAB29-8E2E-46DA-A64B-C3D8759C6390}"/>
-              </a:ext>
-            </a:extLst>
-          </p:cNvPr>
-          <p:cNvSpPr>
-            <a:spLocks noGrp="1"/>
-          </p:cNvSpPr>
-          <p:nvPr/>
-        </p:nvSpPr>
-        <p:spPr>
-          <a:xfrm>
-            <a:off x="590550" y="1190625"/>
-            <a:ext cx="514350" cy="514350"/>
-          </a:xfrm>
-          <a:prstGeom prst="roundRect">
-            <a:avLst>
-              <a:gd name="adj" fmla="val 14815"/>
-            </a:avLst>
-          </a:prstGeom>
-          <a:solidFill>
-            <a:srgbClr val="F57C24"/>
-          </a:solidFill>
-          <a:ln w="0">
-            <a:noFill/>
-          </a:ln>
-        </p:spPr>
-        <p:txBody>
-          <a:bodyPr/>
-          <a:lstStyle/>
-          <a:p>
-            <a:endParaRPr lang="en-GB"/>
-          </a:p>
-        </p:txBody>
-      </p:sp>
-      <p:sp>
-        <p:nvSpPr>
-          <p:cNvPr id="3" name="Rectangle 2">
-            <a:extLst>
-              <a:ext uri="{FF2B5EF4-FFF2-40B4-BE49-F238E27FC236}">
-                <a16:creationId xmlns:a16="http://schemas.microsoft.com/office/drawing/2014/main" id="{37B65486-6F82-4F2B-AC4F-2A719ED00064}"/>
-              </a:ext>
-            </a:extLst>
-          </p:cNvPr>
-          <p:cNvSpPr>
-            <a:spLocks noGrp="1"/>
-          </p:cNvSpPr>
-          <p:nvPr/>
-        </p:nvSpPr>
-        <p:spPr>
-          <a:xfrm>
-            <a:off x="638175" y="1238250"/>
-            <a:ext cx="419100" cy="419100"/>
-          </a:xfrm>
-          <a:prstGeom prst="rect">
-            <a:avLst/>
-          </a:prstGeom>
-          <a:noFill/>
-          <a:ln w="0">
-            <a:noFill/>
-          </a:ln>
-        </p:spPr>
-        <p:txBody>
-          <a:bodyPr lIns="38100" tIns="19050" rIns="38100" bIns="19050" anchor="ctr">
-            <a:normAutofit/>
-          </a:bodyPr>
-          <a:lstStyle/>
-          <a:p>
-            <a:pPr algn="ctr">
-              <a:defRPr sz="1725" b="1">
-                <a:solidFill>
-                  <a:srgbClr val="FFFFFF"/>
-                </a:solidFill>
-                <a:latin typeface="Tahoma"/>
-                <a:ea typeface="Tahoma"/>
-                <a:cs typeface="Tahoma"/>
-              </a:defRPr>
-            </a:pPr>
-            <a:r>
-              <a:rPr sz="1725" b="1">
-                <a:solidFill>
-                  <a:srgbClr val="FFFFFF"/>
-                </a:solidFill>
-                <a:latin typeface="Tahoma"/>
-                <a:ea typeface="Tahoma"/>
-                <a:cs typeface="Tahoma"/>
-              </a:rPr>
-              <a:t>1</a:t>
-            </a:r>
-          </a:p>
-        </p:txBody>
-      </p:sp>
-      <p:sp>
-        <p:nvSpPr>
-          <p:cNvPr id="4" name="Rectangle 3">
-            <a:extLst>
-              <a:ext uri="{FF2B5EF4-FFF2-40B4-BE49-F238E27FC236}">
-                <a16:creationId xmlns:a16="http://schemas.microsoft.com/office/drawing/2014/main" id="{01260B27-D5E8-4AB9-A87A-4C574AFF2094}"/>
-              </a:ext>
-            </a:extLst>
-          </p:cNvPr>
-          <p:cNvSpPr>
-            <a:spLocks noGrp="1"/>
-          </p:cNvSpPr>
-          <p:nvPr/>
-        </p:nvSpPr>
-        <p:spPr>
-          <a:xfrm>
-            <a:off x="1257300" y="1171575"/>
-            <a:ext cx="4381500" cy="342900"/>
-          </a:xfrm>
-          <a:prstGeom prst="rect">
-            <a:avLst/>
-          </a:prstGeom>
-          <a:noFill/>
-          <a:ln w="0">
-            <a:noFill/>
-          </a:ln>
-        </p:spPr>
-        <p:txBody>
-          <a:bodyPr lIns="38100" tIns="19050" rIns="38100" bIns="19050" anchor="t">
-            <a:normAutofit/>
-          </a:bodyPr>
-          <a:lstStyle/>
-          <a:p>
-            <a:pPr algn="l">
-              <a:defRPr sz="1725" b="1">
-                <a:solidFill>
-                  <a:srgbClr val="111111"/>
-                </a:solidFill>
-                <a:latin typeface="Tahoma"/>
-                <a:ea typeface="Tahoma"/>
-                <a:cs typeface="Tahoma"/>
-              </a:defRPr>
-            </a:pPr>
-            <a:r>
-              <a:rPr sz="1725" b="1">
-                <a:solidFill>
-                  <a:srgbClr val="111111"/>
-                </a:solidFill>
-                <a:latin typeface="Tahoma"/>
-                <a:ea typeface="Tahoma"/>
-                <a:cs typeface="Tahoma"/>
-              </a:rPr>
-              <a:t>Επισύναψη</a:t>
-            </a:r>
-          </a:p>
-        </p:txBody>
-      </p:sp>
-      <p:sp>
-        <p:nvSpPr>
-          <p:cNvPr id="5" name="Rectangle 4">
-            <a:extLst>
-              <a:ext uri="{FF2B5EF4-FFF2-40B4-BE49-F238E27FC236}">
-                <a16:creationId xmlns:a16="http://schemas.microsoft.com/office/drawing/2014/main" id="{DBCDA91A-CC40-4C90-B073-918EACE8355A}"/>
-              </a:ext>
-            </a:extLst>
-          </p:cNvPr>
-          <p:cNvSpPr>
-            <a:spLocks noGrp="1"/>
-          </p:cNvSpPr>
-          <p:nvPr/>
-        </p:nvSpPr>
-        <p:spPr>
-          <a:xfrm>
-            <a:off x="1257300" y="1552575"/>
-            <a:ext cx="4429125" cy="647700"/>
-          </a:xfrm>
-          <a:prstGeom prst="rect">
-            <a:avLst/>
-          </a:prstGeom>
-          <a:noFill/>
-          <a:ln w="0">
-            <a:noFill/>
-          </a:ln>
-        </p:spPr>
-        <p:txBody>
-          <a:bodyPr lIns="38100" tIns="19050" rIns="38100" bIns="19050" anchor="t">
-            <a:normAutofit/>
-          </a:bodyPr>
-          <a:lstStyle/>
-          <a:p>
-            <a:pPr algn="l">
-              <a:defRPr sz="1500" b="0">
-                <a:solidFill>
-                  <a:srgbClr val="333333"/>
-                </a:solidFill>
-                <a:latin typeface="Tahoma"/>
-                <a:ea typeface="Tahoma"/>
-                <a:cs typeface="Tahoma"/>
-              </a:defRPr>
-            </a:pPr>
-            <a:r>
-              <a:rPr sz="1500" b="0">
-                <a:solidFill>
-                  <a:srgbClr val="333333"/>
-                </a:solidFill>
-                <a:latin typeface="Tahoma"/>
-                <a:ea typeface="Tahoma"/>
-                <a:cs typeface="Tahoma"/>
-              </a:rPr>
-              <a:t>Πατάμε Attach ή το εικονίδιο συνδετήρα.</a:t>
-            </a:r>
-          </a:p>
-        </p:txBody>
-      </p:sp>
-      <p:sp>
-        <p:nvSpPr>
-          <p:cNvPr id="6" name="Rectangle: Rounded Corners 5">
-            <a:extLst>
-              <a:ext uri="{FF2B5EF4-FFF2-40B4-BE49-F238E27FC236}">
-                <a16:creationId xmlns:a16="http://schemas.microsoft.com/office/drawing/2014/main" id="{7D29E4AE-C331-4C8E-B684-85997B83F417}"/>
-              </a:ext>
-            </a:extLst>
-          </p:cNvPr>
-          <p:cNvSpPr>
-            <a:spLocks noGrp="1"/>
-          </p:cNvSpPr>
-          <p:nvPr/>
-        </p:nvSpPr>
-        <p:spPr>
-          <a:xfrm>
-            <a:off x="590550" y="2428875"/>
-            <a:ext cx="514350" cy="514350"/>
-          </a:xfrm>
-          <a:prstGeom prst="roundRect">
-            <a:avLst>
-              <a:gd name="adj" fmla="val 14815"/>
-            </a:avLst>
-          </a:prstGeom>
-          <a:solidFill>
-            <a:srgbClr val="5599D8"/>
-          </a:solidFill>
-          <a:ln w="0">
-            <a:noFill/>
-          </a:ln>
-        </p:spPr>
-        <p:txBody>
-          <a:bodyPr/>
-          <a:lstStyle/>
-          <a:p>
-            <a:endParaRPr lang="en-GB"/>
-          </a:p>
-        </p:txBody>
-      </p:sp>
-      <p:sp>
-        <p:nvSpPr>
-          <p:cNvPr id="7" name="Rectangle 6">
-            <a:extLst>
-              <a:ext uri="{FF2B5EF4-FFF2-40B4-BE49-F238E27FC236}">
-                <a16:creationId xmlns:a16="http://schemas.microsoft.com/office/drawing/2014/main" id="{7349C013-D2E9-4D69-8072-E282034C515B}"/>
-              </a:ext>
-            </a:extLst>
-          </p:cNvPr>
-          <p:cNvSpPr>
-            <a:spLocks noGrp="1"/>
-          </p:cNvSpPr>
-          <p:nvPr/>
-        </p:nvSpPr>
-        <p:spPr>
-          <a:xfrm>
-            <a:off x="638175" y="2476500"/>
-            <a:ext cx="419100" cy="419100"/>
-          </a:xfrm>
-          <a:prstGeom prst="rect">
-            <a:avLst/>
-          </a:prstGeom>
-          <a:noFill/>
-          <a:ln w="0">
-            <a:noFill/>
-          </a:ln>
-        </p:spPr>
-        <p:txBody>
-          <a:bodyPr lIns="38100" tIns="19050" rIns="38100" bIns="19050" anchor="ctr">
-            <a:normAutofit/>
-          </a:bodyPr>
-          <a:lstStyle/>
-          <a:p>
-            <a:pPr algn="ctr">
-              <a:defRPr sz="1725" b="1">
-                <a:solidFill>
-                  <a:srgbClr val="FFFFFF"/>
-                </a:solidFill>
-                <a:latin typeface="Tahoma"/>
-                <a:ea typeface="Tahoma"/>
-                <a:cs typeface="Tahoma"/>
-              </a:defRPr>
-            </a:pPr>
-            <a:r>
-              <a:rPr sz="1725" b="1">
-                <a:solidFill>
-                  <a:srgbClr val="FFFFFF"/>
-                </a:solidFill>
-                <a:latin typeface="Tahoma"/>
-                <a:ea typeface="Tahoma"/>
-                <a:cs typeface="Tahoma"/>
-              </a:rPr>
-              <a:t>2</a:t>
-            </a:r>
-          </a:p>
-        </p:txBody>
-      </p:sp>
-      <p:sp>
-        <p:nvSpPr>
-          <p:cNvPr id="8" name="Rectangle 7">
-            <a:extLst>
-              <a:ext uri="{FF2B5EF4-FFF2-40B4-BE49-F238E27FC236}">
-                <a16:creationId xmlns:a16="http://schemas.microsoft.com/office/drawing/2014/main" id="{7D5C6880-CA27-42C4-91BA-348A8B7F28A2}"/>
-              </a:ext>
-            </a:extLst>
-          </p:cNvPr>
-          <p:cNvSpPr>
-            <a:spLocks noGrp="1"/>
-          </p:cNvSpPr>
-          <p:nvPr/>
-        </p:nvSpPr>
-        <p:spPr>
-          <a:xfrm>
-            <a:off x="1257300" y="2409825"/>
-            <a:ext cx="4381500" cy="342900"/>
-          </a:xfrm>
-          <a:prstGeom prst="rect">
-            <a:avLst/>
-          </a:prstGeom>
-          <a:noFill/>
-          <a:ln w="0">
-            <a:noFill/>
-          </a:ln>
-        </p:spPr>
-        <p:txBody>
-          <a:bodyPr lIns="38100" tIns="19050" rIns="38100" bIns="19050" anchor="t">
-            <a:normAutofit/>
-          </a:bodyPr>
-          <a:lstStyle/>
-          <a:p>
-            <a:pPr algn="l">
-              <a:defRPr sz="1725" b="1">
-                <a:solidFill>
-                  <a:srgbClr val="111111"/>
-                </a:solidFill>
-                <a:latin typeface="Tahoma"/>
-                <a:ea typeface="Tahoma"/>
-                <a:cs typeface="Tahoma"/>
-              </a:defRPr>
-            </a:pPr>
-            <a:r>
-              <a:rPr sz="1725" b="1">
-                <a:solidFill>
-                  <a:srgbClr val="111111"/>
-                </a:solidFill>
-                <a:latin typeface="Tahoma"/>
-                <a:ea typeface="Tahoma"/>
-                <a:cs typeface="Tahoma"/>
-              </a:rPr>
-              <a:t>Επιλογή αρχείου</a:t>
-            </a:r>
-          </a:p>
-        </p:txBody>
-      </p:sp>
-      <p:sp>
-        <p:nvSpPr>
-          <p:cNvPr id="9" name="Rectangle 8">
-            <a:extLst>
-              <a:ext uri="{FF2B5EF4-FFF2-40B4-BE49-F238E27FC236}">
-                <a16:creationId xmlns:a16="http://schemas.microsoft.com/office/drawing/2014/main" id="{AA94CB41-730B-466A-897F-5949A1EC49B9}"/>
-              </a:ext>
-            </a:extLst>
-          </p:cNvPr>
-          <p:cNvSpPr>
-            <a:spLocks noGrp="1"/>
-          </p:cNvSpPr>
-          <p:nvPr/>
-        </p:nvSpPr>
-        <p:spPr>
-          <a:xfrm>
-            <a:off x="1257300" y="2790825"/>
-            <a:ext cx="4429125" cy="647700"/>
-          </a:xfrm>
-          <a:prstGeom prst="rect">
-            <a:avLst/>
-          </a:prstGeom>
-          <a:noFill/>
-          <a:ln w="0">
-            <a:noFill/>
-          </a:ln>
-        </p:spPr>
-        <p:txBody>
-          <a:bodyPr lIns="38100" tIns="19050" rIns="38100" bIns="19050" anchor="t">
-            <a:normAutofit/>
-          </a:bodyPr>
-          <a:lstStyle/>
-          <a:p>
-            <a:pPr algn="l">
-              <a:defRPr sz="1500" b="0">
-                <a:solidFill>
-                  <a:srgbClr val="333333"/>
-                </a:solidFill>
-                <a:latin typeface="Tahoma"/>
-                <a:ea typeface="Tahoma"/>
-                <a:cs typeface="Tahoma"/>
-              </a:defRPr>
-            </a:pPr>
-            <a:r>
-              <a:rPr sz="1500" b="0">
-                <a:solidFill>
-                  <a:srgbClr val="333333"/>
-                </a:solidFill>
-                <a:latin typeface="Tahoma"/>
-                <a:ea typeface="Tahoma"/>
-                <a:cs typeface="Tahoma"/>
-              </a:rPr>
-              <a:t>Εντοπίζουμε τον σωστό φάκελο και επιλέγουμε το αρχείο.</a:t>
-            </a:r>
-          </a:p>
-        </p:txBody>
-      </p:sp>
-      <p:sp>
-        <p:nvSpPr>
-          <p:cNvPr id="10" name="Rectangle: Rounded Corners 9">
-            <a:extLst>
-              <a:ext uri="{FF2B5EF4-FFF2-40B4-BE49-F238E27FC236}">
-                <a16:creationId xmlns:a16="http://schemas.microsoft.com/office/drawing/2014/main" id="{EC0CF8AB-9F5E-4A76-90C4-4C66AA2957A6}"/>
-              </a:ext>
-            </a:extLst>
-          </p:cNvPr>
-          <p:cNvSpPr>
-            <a:spLocks noGrp="1"/>
-          </p:cNvSpPr>
-          <p:nvPr/>
-        </p:nvSpPr>
-        <p:spPr>
-          <a:xfrm>
-            <a:off x="590550" y="3667125"/>
-            <a:ext cx="514350" cy="514350"/>
-          </a:xfrm>
-          <a:prstGeom prst="roundRect">
-            <a:avLst>
-              <a:gd name="adj" fmla="val 14815"/>
-            </a:avLst>
-          </a:prstGeom>
-          <a:solidFill>
-            <a:srgbClr val="6CAB4F"/>
-          </a:solidFill>
-          <a:ln w="0">
-            <a:noFill/>
-          </a:ln>
-        </p:spPr>
-        <p:txBody>
-          <a:bodyPr/>
-          <a:lstStyle/>
-          <a:p>
-            <a:endParaRPr lang="en-GB"/>
-          </a:p>
-        </p:txBody>
-      </p:sp>
-      <p:sp>
-        <p:nvSpPr>
-          <p:cNvPr id="11" name="Rectangle 10">
-            <a:extLst>
-              <a:ext uri="{FF2B5EF4-FFF2-40B4-BE49-F238E27FC236}">
-                <a16:creationId xmlns:a16="http://schemas.microsoft.com/office/drawing/2014/main" id="{2538206E-4039-43C5-AEC4-160EFE814788}"/>
-              </a:ext>
-            </a:extLst>
-          </p:cNvPr>
-          <p:cNvSpPr>
-            <a:spLocks noGrp="1"/>
-          </p:cNvSpPr>
-          <p:nvPr/>
-        </p:nvSpPr>
-        <p:spPr>
-          <a:xfrm>
-            <a:off x="638175" y="3714750"/>
-            <a:ext cx="419100" cy="419100"/>
-          </a:xfrm>
-          <a:prstGeom prst="rect">
-            <a:avLst/>
-          </a:prstGeom>
-          <a:noFill/>
-          <a:ln w="0">
-            <a:noFill/>
-          </a:ln>
-        </p:spPr>
-        <p:txBody>
-          <a:bodyPr lIns="38100" tIns="19050" rIns="38100" bIns="19050" anchor="ctr">
-            <a:normAutofit/>
-          </a:bodyPr>
-          <a:lstStyle/>
-          <a:p>
-            <a:pPr algn="ctr">
-              <a:defRPr sz="1725" b="1">
-                <a:solidFill>
-                  <a:srgbClr val="FFFFFF"/>
-                </a:solidFill>
-                <a:latin typeface="Tahoma"/>
-                <a:ea typeface="Tahoma"/>
-                <a:cs typeface="Tahoma"/>
-              </a:defRPr>
-            </a:pPr>
-            <a:r>
-              <a:rPr sz="1725" b="1">
-                <a:solidFill>
-                  <a:srgbClr val="FFFFFF"/>
-                </a:solidFill>
-                <a:latin typeface="Tahoma"/>
-                <a:ea typeface="Tahoma"/>
-                <a:cs typeface="Tahoma"/>
-              </a:rPr>
-              <a:t>3</a:t>
-            </a:r>
-          </a:p>
-        </p:txBody>
-      </p:sp>
-      <p:sp>
-        <p:nvSpPr>
-          <p:cNvPr id="12" name="Rectangle 11">
-            <a:extLst>
-              <a:ext uri="{FF2B5EF4-FFF2-40B4-BE49-F238E27FC236}">
-                <a16:creationId xmlns:a16="http://schemas.microsoft.com/office/drawing/2014/main" id="{1E23B1A8-2287-4B27-9B9E-8491E9FC9DC1}"/>
-              </a:ext>
-            </a:extLst>
-          </p:cNvPr>
-          <p:cNvSpPr>
-            <a:spLocks noGrp="1"/>
-          </p:cNvSpPr>
-          <p:nvPr/>
-        </p:nvSpPr>
-        <p:spPr>
-          <a:xfrm>
-            <a:off x="1257300" y="3648075"/>
-            <a:ext cx="4381500" cy="342900"/>
-          </a:xfrm>
-          <a:prstGeom prst="rect">
-            <a:avLst/>
-          </a:prstGeom>
-          <a:noFill/>
-          <a:ln w="0">
-            <a:noFill/>
-          </a:ln>
-        </p:spPr>
-        <p:txBody>
-          <a:bodyPr lIns="38100" tIns="19050" rIns="38100" bIns="19050" anchor="t">
-            <a:normAutofit/>
-          </a:bodyPr>
-          <a:lstStyle/>
-          <a:p>
-            <a:pPr algn="l">
-              <a:defRPr sz="1725" b="1">
-                <a:solidFill>
-                  <a:srgbClr val="111111"/>
-                </a:solidFill>
-                <a:latin typeface="Tahoma"/>
-                <a:ea typeface="Tahoma"/>
-                <a:cs typeface="Tahoma"/>
-              </a:defRPr>
-            </a:pPr>
-            <a:r>
-              <a:rPr sz="1725" b="1">
-                <a:solidFill>
-                  <a:srgbClr val="111111"/>
-                </a:solidFill>
-                <a:latin typeface="Tahoma"/>
-                <a:ea typeface="Tahoma"/>
-                <a:cs typeface="Tahoma"/>
-              </a:rPr>
-              <a:t>Άνοιγμα</a:t>
-            </a:r>
-          </a:p>
-        </p:txBody>
-      </p:sp>
-      <p:sp>
-        <p:nvSpPr>
-          <p:cNvPr id="13" name="Rectangle 12">
-            <a:extLst>
-              <a:ext uri="{FF2B5EF4-FFF2-40B4-BE49-F238E27FC236}">
-                <a16:creationId xmlns:a16="http://schemas.microsoft.com/office/drawing/2014/main" id="{5668A7C9-8D05-4675-808D-6105E433D45B}"/>
-              </a:ext>
-            </a:extLst>
-          </p:cNvPr>
-          <p:cNvSpPr>
-            <a:spLocks noGrp="1"/>
-          </p:cNvSpPr>
-          <p:nvPr/>
-        </p:nvSpPr>
-        <p:spPr>
-          <a:xfrm>
-            <a:off x="1257300" y="4029075"/>
-            <a:ext cx="4429125" cy="647700"/>
-          </a:xfrm>
-          <a:prstGeom prst="rect">
-            <a:avLst/>
-          </a:prstGeom>
-          <a:noFill/>
-          <a:ln w="0">
-            <a:noFill/>
-          </a:ln>
-        </p:spPr>
-        <p:txBody>
-          <a:bodyPr lIns="38100" tIns="19050" rIns="38100" bIns="19050" anchor="t">
-            <a:normAutofit/>
-          </a:bodyPr>
-          <a:lstStyle/>
-          <a:p>
-            <a:pPr algn="l">
-              <a:defRPr sz="1500" b="0">
-                <a:solidFill>
-                  <a:srgbClr val="333333"/>
-                </a:solidFill>
-                <a:latin typeface="Tahoma"/>
-                <a:ea typeface="Tahoma"/>
-                <a:cs typeface="Tahoma"/>
-              </a:defRPr>
-            </a:pPr>
-            <a:r>
-              <a:rPr sz="1500" b="0">
-                <a:solidFill>
-                  <a:srgbClr val="333333"/>
-                </a:solidFill>
-                <a:latin typeface="Tahoma"/>
-                <a:ea typeface="Tahoma"/>
-                <a:cs typeface="Tahoma"/>
-              </a:rPr>
-              <a:t>Πατάμε Open και περιμένουμε να ολοκληρωθεί η επισύναψη.</a:t>
-            </a:r>
-          </a:p>
-        </p:txBody>
-      </p:sp>
-      <p:sp>
-        <p:nvSpPr>
-          <p:cNvPr id="14" name="Rectangle: Rounded Corners 13">
-            <a:extLst>
-              <a:ext uri="{FF2B5EF4-FFF2-40B4-BE49-F238E27FC236}">
-                <a16:creationId xmlns:a16="http://schemas.microsoft.com/office/drawing/2014/main" id="{B58642D0-1BB8-4E7D-9580-500A5216DE5A}"/>
-              </a:ext>
-            </a:extLst>
-          </p:cNvPr>
-          <p:cNvSpPr>
-            <a:spLocks noGrp="1"/>
-          </p:cNvSpPr>
-          <p:nvPr/>
-        </p:nvSpPr>
-        <p:spPr>
-          <a:xfrm>
-            <a:off x="590550" y="4905375"/>
-            <a:ext cx="514350" cy="514350"/>
-          </a:xfrm>
-          <a:prstGeom prst="roundRect">
-            <a:avLst>
-              <a:gd name="adj" fmla="val 14815"/>
-            </a:avLst>
-          </a:prstGeom>
-          <a:solidFill>
-            <a:srgbClr val="7B4AAC"/>
-          </a:solidFill>
-          <a:ln w="0">
-            <a:noFill/>
-          </a:ln>
-        </p:spPr>
-        <p:txBody>
-          <a:bodyPr/>
-          <a:lstStyle/>
-          <a:p>
-            <a:endParaRPr lang="en-GB"/>
-          </a:p>
-        </p:txBody>
-      </p:sp>
-      <p:sp>
-        <p:nvSpPr>
-          <p:cNvPr id="15" name="Rectangle 14">
-            <a:extLst>
-              <a:ext uri="{FF2B5EF4-FFF2-40B4-BE49-F238E27FC236}">
-                <a16:creationId xmlns:a16="http://schemas.microsoft.com/office/drawing/2014/main" id="{F7AAA448-3943-47B8-8435-A066C6D1A5DC}"/>
-              </a:ext>
-            </a:extLst>
-          </p:cNvPr>
-          <p:cNvSpPr>
-            <a:spLocks noGrp="1"/>
-          </p:cNvSpPr>
-          <p:nvPr/>
-        </p:nvSpPr>
-        <p:spPr>
-          <a:xfrm>
-            <a:off x="638175" y="4953000"/>
-            <a:ext cx="419100" cy="419100"/>
-          </a:xfrm>
-          <a:prstGeom prst="rect">
-            <a:avLst/>
-          </a:prstGeom>
-          <a:noFill/>
-          <a:ln w="0">
-            <a:noFill/>
-          </a:ln>
-        </p:spPr>
-        <p:txBody>
-          <a:bodyPr lIns="38100" tIns="19050" rIns="38100" bIns="19050" anchor="ctr">
-            <a:normAutofit/>
-          </a:bodyPr>
-          <a:lstStyle/>
-          <a:p>
-            <a:pPr algn="ctr">
-              <a:defRPr sz="1725" b="1">
-                <a:solidFill>
-                  <a:srgbClr val="FFFFFF"/>
-                </a:solidFill>
-                <a:latin typeface="Tahoma"/>
-                <a:ea typeface="Tahoma"/>
-                <a:cs typeface="Tahoma"/>
-              </a:defRPr>
-            </a:pPr>
-            <a:r>
-              <a:rPr sz="1725" b="1">
-                <a:solidFill>
-                  <a:srgbClr val="FFFFFF"/>
-                </a:solidFill>
-                <a:latin typeface="Tahoma"/>
-                <a:ea typeface="Tahoma"/>
-                <a:cs typeface="Tahoma"/>
-              </a:rPr>
-              <a:t>4</a:t>
-            </a:r>
-          </a:p>
-        </p:txBody>
-      </p:sp>
-      <p:sp>
-        <p:nvSpPr>
-          <p:cNvPr id="16" name="Rectangle 15">
-            <a:extLst>
-              <a:ext uri="{FF2B5EF4-FFF2-40B4-BE49-F238E27FC236}">
-                <a16:creationId xmlns:a16="http://schemas.microsoft.com/office/drawing/2014/main" id="{1D38FCCC-9365-44AE-857B-B87495F510E0}"/>
-              </a:ext>
-            </a:extLst>
-          </p:cNvPr>
-          <p:cNvSpPr>
-            <a:spLocks noGrp="1"/>
-          </p:cNvSpPr>
-          <p:nvPr/>
-        </p:nvSpPr>
-        <p:spPr>
-          <a:xfrm>
-            <a:off x="1257300" y="4886325"/>
-            <a:ext cx="4381500" cy="342900"/>
-          </a:xfrm>
-          <a:prstGeom prst="rect">
-            <a:avLst/>
-          </a:prstGeom>
-          <a:noFill/>
-          <a:ln w="0">
-            <a:noFill/>
-          </a:ln>
-        </p:spPr>
-        <p:txBody>
-          <a:bodyPr lIns="38100" tIns="19050" rIns="38100" bIns="19050" anchor="t">
-            <a:normAutofit/>
-          </a:bodyPr>
-          <a:lstStyle/>
-          <a:p>
-            <a:pPr algn="l">
-              <a:defRPr sz="1725" b="1">
-                <a:solidFill>
-                  <a:srgbClr val="111111"/>
-                </a:solidFill>
-                <a:latin typeface="Tahoma"/>
-                <a:ea typeface="Tahoma"/>
-                <a:cs typeface="Tahoma"/>
-              </a:defRPr>
-            </a:pPr>
-            <a:r>
-              <a:rPr sz="1725" b="1">
-                <a:solidFill>
-                  <a:srgbClr val="111111"/>
-                </a:solidFill>
-                <a:latin typeface="Tahoma"/>
-                <a:ea typeface="Tahoma"/>
-                <a:cs typeface="Tahoma"/>
-              </a:rPr>
-              <a:t>Αποστολή</a:t>
-            </a:r>
-          </a:p>
-        </p:txBody>
-      </p:sp>
-      <p:sp>
-        <p:nvSpPr>
-          <p:cNvPr id="17" name="Rectangle 16">
-            <a:extLst>
-              <a:ext uri="{FF2B5EF4-FFF2-40B4-BE49-F238E27FC236}">
-                <a16:creationId xmlns:a16="http://schemas.microsoft.com/office/drawing/2014/main" id="{7045C611-992C-4AE9-83A2-09281F5591E3}"/>
-              </a:ext>
-            </a:extLst>
-          </p:cNvPr>
-          <p:cNvSpPr>
-            <a:spLocks noGrp="1"/>
-          </p:cNvSpPr>
-          <p:nvPr/>
-        </p:nvSpPr>
-        <p:spPr>
-          <a:xfrm>
-            <a:off x="1257300" y="5267325"/>
-            <a:ext cx="4429125" cy="647700"/>
-          </a:xfrm>
-          <a:prstGeom prst="rect">
-            <a:avLst/>
-          </a:prstGeom>
-          <a:noFill/>
-          <a:ln w="0">
-            <a:noFill/>
-          </a:ln>
-        </p:spPr>
-        <p:txBody>
-          <a:bodyPr lIns="38100" tIns="19050" rIns="38100" bIns="19050" anchor="t">
-            <a:normAutofit/>
-          </a:bodyPr>
-          <a:lstStyle/>
-          <a:p>
-            <a:pPr algn="l">
-              <a:defRPr sz="1500" b="0">
-                <a:solidFill>
-                  <a:srgbClr val="333333"/>
-                </a:solidFill>
-                <a:latin typeface="Tahoma"/>
-                <a:ea typeface="Tahoma"/>
-                <a:cs typeface="Tahoma"/>
-              </a:defRPr>
-            </a:pPr>
-            <a:r>
-              <a:rPr sz="1500" b="0">
-                <a:solidFill>
-                  <a:srgbClr val="333333"/>
-                </a:solidFill>
-                <a:latin typeface="Tahoma"/>
-                <a:ea typeface="Tahoma"/>
-                <a:cs typeface="Tahoma"/>
-              </a:rPr>
-              <a:t>Ελέγχουμε το συνημμένο και πατάμε Send.</a:t>
+              <a:t>Επισυναπτόμενα αρχεία (Attachments)</a:t>
             </a:r>
           </a:p>
         </p:txBody>
       </p:sp>
       <p:pic>
         <p:nvPicPr>
-          <p:cNvPr id="38" name="Picture 37"/>
+          <p:cNvPr id="17" name="Picture 16"/>
           <p:cNvPicPr>
             <a:picLocks noChangeAspect="1"/>
           </p:cNvPicPr>
@@ -2974,8 +4933,8 @@
         </p:blipFill>
         <p:spPr>
           <a:xfrm>
-            <a:off x="7334250" y="1476375"/>
-            <a:ext cx="2857500" cy="2857500"/>
+            <a:off x="762000" y="1428750"/>
+            <a:ext cx="2762250" cy="2762250"/>
           </a:xfrm>
           <a:prstGeom prst="rect">
             <a:avLst/>
@@ -2984,10 +4943,583 @@
       </p:pic>
       <p:sp>
         <p:nvSpPr>
-          <p:cNvPr id="19" name="Rectangle 18">
+          <p:cNvPr id="3" name="Rectangle 2">
             <a:extLst>
               <a:ext uri="{FF2B5EF4-FFF2-40B4-BE49-F238E27FC236}">
-                <a16:creationId xmlns:a16="http://schemas.microsoft.com/office/drawing/2014/main" id="{B5971AC7-6FFE-4114-9C91-8FBC61B2C6D4}"/>
+                <a16:creationId xmlns:a16="http://schemas.microsoft.com/office/drawing/2014/main" id="{B3E88CFE-D1BD-497F-97EA-CA81D475AFF9}"/>
+              </a:ext>
+            </a:extLst>
+          </p:cNvPr>
+          <p:cNvSpPr>
+            <a:spLocks noGrp="1"/>
+          </p:cNvSpPr>
+          <p:nvPr/>
+        </p:nvSpPr>
+        <p:spPr>
+          <a:xfrm>
+            <a:off x="4095750" y="1428750"/>
+            <a:ext cx="6858000" cy="952500"/>
+          </a:xfrm>
+          <a:prstGeom prst="rect">
+            <a:avLst/>
+          </a:prstGeom>
+          <a:noFill/>
+          <a:ln w="0">
+            <a:noFill/>
+          </a:ln>
+        </p:spPr>
+        <p:txBody>
+          <a:bodyPr lIns="38100" tIns="19050" rIns="38100" bIns="19050" anchor="t">
+            <a:normAutofit/>
+          </a:bodyPr>
+          <a:lstStyle/>
+          <a:p>
+            <a:pPr algn="l">
+              <a:defRPr sz="2025" b="1">
+                <a:solidFill>
+                  <a:srgbClr val="111111"/>
+                </a:solidFill>
+                <a:latin typeface="Tahoma"/>
+                <a:ea typeface="Tahoma"/>
+                <a:cs typeface="Tahoma"/>
+              </a:defRPr>
+            </a:pPr>
+            <a:r>
+              <a:rPr sz="2025" b="1">
+                <a:solidFill>
+                  <a:srgbClr val="111111"/>
+                </a:solidFill>
+                <a:latin typeface="Tahoma"/>
+                <a:ea typeface="Tahoma"/>
+                <a:cs typeface="Tahoma"/>
+              </a:rPr>
+              <a:t>Σε ένα μήνυμα μπορούμε να επισυνάψουμε ένα ή περισσότερα αρχεία διαφορετικού τύπου.</a:t>
+            </a:r>
+          </a:p>
+        </p:txBody>
+      </p:sp>
+      <p:sp>
+        <p:nvSpPr>
+          <p:cNvPr id="4" name="Rectangle: Rounded Corners 3">
+            <a:extLst>
+              <a:ext uri="{FF2B5EF4-FFF2-40B4-BE49-F238E27FC236}">
+                <a16:creationId xmlns:a16="http://schemas.microsoft.com/office/drawing/2014/main" id="{65D44BEA-A24E-45C9-8DD9-2D9E115779A0}"/>
+              </a:ext>
+            </a:extLst>
+          </p:cNvPr>
+          <p:cNvSpPr>
+            <a:spLocks noGrp="1"/>
+          </p:cNvSpPr>
+          <p:nvPr/>
+        </p:nvSpPr>
+        <p:spPr>
+          <a:xfrm>
+            <a:off x="4095750" y="2857500"/>
+            <a:ext cx="2047875" cy="1285875"/>
+          </a:xfrm>
+          <a:prstGeom prst="roundRect">
+            <a:avLst>
+              <a:gd name="adj" fmla="val 5926"/>
+            </a:avLst>
+          </a:prstGeom>
+          <a:solidFill>
+            <a:srgbClr val="F3F6F8"/>
+          </a:solidFill>
+          <a:ln w="0">
+            <a:noFill/>
+          </a:ln>
+        </p:spPr>
+        <p:txBody>
+          <a:bodyPr/>
+          <a:lstStyle/>
+          <a:p>
+            <a:endParaRPr lang="en-GB"/>
+          </a:p>
+        </p:txBody>
+      </p:sp>
+      <p:sp>
+        <p:nvSpPr>
+          <p:cNvPr id="5" name="Rectangle 4">
+            <a:extLst>
+              <a:ext uri="{FF2B5EF4-FFF2-40B4-BE49-F238E27FC236}">
+                <a16:creationId xmlns:a16="http://schemas.microsoft.com/office/drawing/2014/main" id="{87594D24-BA8E-4D9D-8B9C-555D27FDC175}"/>
+              </a:ext>
+            </a:extLst>
+          </p:cNvPr>
+          <p:cNvSpPr>
+            <a:spLocks noGrp="1"/>
+          </p:cNvSpPr>
+          <p:nvPr/>
+        </p:nvSpPr>
+        <p:spPr>
+          <a:xfrm>
+            <a:off x="4238625" y="3067050"/>
+            <a:ext cx="1762125" cy="342900"/>
+          </a:xfrm>
+          <a:prstGeom prst="rect">
+            <a:avLst/>
+          </a:prstGeom>
+          <a:noFill/>
+          <a:ln w="0">
+            <a:noFill/>
+          </a:ln>
+        </p:spPr>
+        <p:txBody>
+          <a:bodyPr lIns="38100" tIns="19050" rIns="38100" bIns="19050" anchor="t">
+            <a:normAutofit/>
+          </a:bodyPr>
+          <a:lstStyle/>
+          <a:p>
+            <a:pPr algn="ctr">
+              <a:defRPr sz="1650" b="1">
+                <a:solidFill>
+                  <a:srgbClr val="F57C24"/>
+                </a:solidFill>
+                <a:latin typeface="Tahoma"/>
+                <a:ea typeface="Tahoma"/>
+                <a:cs typeface="Tahoma"/>
+              </a:defRPr>
+            </a:pPr>
+            <a:r>
+              <a:rPr sz="1650" b="1">
+                <a:solidFill>
+                  <a:srgbClr val="F57C24"/>
+                </a:solidFill>
+                <a:latin typeface="Tahoma"/>
+                <a:ea typeface="Tahoma"/>
+                <a:cs typeface="Tahoma"/>
+              </a:rPr>
+              <a:t>Κείμενο</a:t>
+            </a:r>
+          </a:p>
+        </p:txBody>
+      </p:sp>
+      <p:sp>
+        <p:nvSpPr>
+          <p:cNvPr id="6" name="Rectangle 5">
+            <a:extLst>
+              <a:ext uri="{FF2B5EF4-FFF2-40B4-BE49-F238E27FC236}">
+                <a16:creationId xmlns:a16="http://schemas.microsoft.com/office/drawing/2014/main" id="{ED313862-F7C9-4E18-A38C-ABA0C5152C33}"/>
+              </a:ext>
+            </a:extLst>
+          </p:cNvPr>
+          <p:cNvSpPr>
+            <a:spLocks noGrp="1"/>
+          </p:cNvSpPr>
+          <p:nvPr/>
+        </p:nvSpPr>
+        <p:spPr>
+          <a:xfrm>
+            <a:off x="4238625" y="3571875"/>
+            <a:ext cx="1762125" cy="333375"/>
+          </a:xfrm>
+          <a:prstGeom prst="rect">
+            <a:avLst/>
+          </a:prstGeom>
+          <a:noFill/>
+          <a:ln w="0">
+            <a:noFill/>
+          </a:ln>
+        </p:spPr>
+        <p:txBody>
+          <a:bodyPr lIns="38100" tIns="19050" rIns="38100" bIns="19050" anchor="t">
+            <a:normAutofit/>
+          </a:bodyPr>
+          <a:lstStyle/>
+          <a:p>
+            <a:pPr algn="ctr">
+              <a:defRPr sz="1425" b="0">
+                <a:solidFill>
+                  <a:srgbClr val="444444"/>
+                </a:solidFill>
+                <a:latin typeface="Tahoma"/>
+                <a:ea typeface="Tahoma"/>
+                <a:cs typeface="Tahoma"/>
+              </a:defRPr>
+            </a:pPr>
+            <a:r>
+              <a:rPr sz="1425" b="0">
+                <a:solidFill>
+                  <a:srgbClr val="444444"/>
+                </a:solidFill>
+                <a:latin typeface="Tahoma"/>
+                <a:ea typeface="Tahoma"/>
+                <a:cs typeface="Tahoma"/>
+              </a:rPr>
+              <a:t>Έγγραφα</a:t>
+            </a:r>
+          </a:p>
+        </p:txBody>
+      </p:sp>
+      <p:sp>
+        <p:nvSpPr>
+          <p:cNvPr id="7" name="Rectangle: Rounded Corners 6">
+            <a:extLst>
+              <a:ext uri="{FF2B5EF4-FFF2-40B4-BE49-F238E27FC236}">
+                <a16:creationId xmlns:a16="http://schemas.microsoft.com/office/drawing/2014/main" id="{4C666E21-3B81-48FE-8BBA-F596E9AE1214}"/>
+              </a:ext>
+            </a:extLst>
+          </p:cNvPr>
+          <p:cNvSpPr>
+            <a:spLocks noGrp="1"/>
+          </p:cNvSpPr>
+          <p:nvPr/>
+        </p:nvSpPr>
+        <p:spPr>
+          <a:xfrm>
+            <a:off x="6429375" y="2857500"/>
+            <a:ext cx="2047875" cy="1285875"/>
+          </a:xfrm>
+          <a:prstGeom prst="roundRect">
+            <a:avLst>
+              <a:gd name="adj" fmla="val 5926"/>
+            </a:avLst>
+          </a:prstGeom>
+          <a:solidFill>
+            <a:srgbClr val="F3F6F8"/>
+          </a:solidFill>
+          <a:ln w="0">
+            <a:noFill/>
+          </a:ln>
+        </p:spPr>
+        <p:txBody>
+          <a:bodyPr/>
+          <a:lstStyle/>
+          <a:p>
+            <a:endParaRPr lang="en-GB"/>
+          </a:p>
+        </p:txBody>
+      </p:sp>
+      <p:sp>
+        <p:nvSpPr>
+          <p:cNvPr id="8" name="Rectangle 7">
+            <a:extLst>
+              <a:ext uri="{FF2B5EF4-FFF2-40B4-BE49-F238E27FC236}">
+                <a16:creationId xmlns:a16="http://schemas.microsoft.com/office/drawing/2014/main" id="{866D2A5D-2144-42F4-A4EB-52D3A9B16D4F}"/>
+              </a:ext>
+            </a:extLst>
+          </p:cNvPr>
+          <p:cNvSpPr>
+            <a:spLocks noGrp="1"/>
+          </p:cNvSpPr>
+          <p:nvPr/>
+        </p:nvSpPr>
+        <p:spPr>
+          <a:xfrm>
+            <a:off x="6572250" y="3067050"/>
+            <a:ext cx="1762125" cy="342900"/>
+          </a:xfrm>
+          <a:prstGeom prst="rect">
+            <a:avLst/>
+          </a:prstGeom>
+          <a:noFill/>
+          <a:ln w="0">
+            <a:noFill/>
+          </a:ln>
+        </p:spPr>
+        <p:txBody>
+          <a:bodyPr lIns="38100" tIns="19050" rIns="38100" bIns="19050" anchor="t">
+            <a:normAutofit/>
+          </a:bodyPr>
+          <a:lstStyle/>
+          <a:p>
+            <a:pPr algn="ctr">
+              <a:defRPr sz="1650" b="1">
+                <a:solidFill>
+                  <a:srgbClr val="5599D8"/>
+                </a:solidFill>
+                <a:latin typeface="Tahoma"/>
+                <a:ea typeface="Tahoma"/>
+                <a:cs typeface="Tahoma"/>
+              </a:defRPr>
+            </a:pPr>
+            <a:r>
+              <a:rPr sz="1650" b="1">
+                <a:solidFill>
+                  <a:srgbClr val="5599D8"/>
+                </a:solidFill>
+                <a:latin typeface="Tahoma"/>
+                <a:ea typeface="Tahoma"/>
+                <a:cs typeface="Tahoma"/>
+              </a:rPr>
+              <a:t>Εικόνα</a:t>
+            </a:r>
+          </a:p>
+        </p:txBody>
+      </p:sp>
+      <p:sp>
+        <p:nvSpPr>
+          <p:cNvPr id="9" name="Rectangle 8">
+            <a:extLst>
+              <a:ext uri="{FF2B5EF4-FFF2-40B4-BE49-F238E27FC236}">
+                <a16:creationId xmlns:a16="http://schemas.microsoft.com/office/drawing/2014/main" id="{88EA2D96-F8AC-45B9-87B7-19394340500A}"/>
+              </a:ext>
+            </a:extLst>
+          </p:cNvPr>
+          <p:cNvSpPr>
+            <a:spLocks noGrp="1"/>
+          </p:cNvSpPr>
+          <p:nvPr/>
+        </p:nvSpPr>
+        <p:spPr>
+          <a:xfrm>
+            <a:off x="6572250" y="3571875"/>
+            <a:ext cx="1762125" cy="333375"/>
+          </a:xfrm>
+          <a:prstGeom prst="rect">
+            <a:avLst/>
+          </a:prstGeom>
+          <a:noFill/>
+          <a:ln w="0">
+            <a:noFill/>
+          </a:ln>
+        </p:spPr>
+        <p:txBody>
+          <a:bodyPr lIns="38100" tIns="19050" rIns="38100" bIns="19050" anchor="t">
+            <a:normAutofit/>
+          </a:bodyPr>
+          <a:lstStyle/>
+          <a:p>
+            <a:pPr algn="ctr">
+              <a:defRPr sz="1425" b="0">
+                <a:solidFill>
+                  <a:srgbClr val="444444"/>
+                </a:solidFill>
+                <a:latin typeface="Tahoma"/>
+                <a:ea typeface="Tahoma"/>
+                <a:cs typeface="Tahoma"/>
+              </a:defRPr>
+            </a:pPr>
+            <a:r>
+              <a:rPr sz="1425" b="0">
+                <a:solidFill>
+                  <a:srgbClr val="444444"/>
+                </a:solidFill>
+                <a:latin typeface="Tahoma"/>
+                <a:ea typeface="Tahoma"/>
+                <a:cs typeface="Tahoma"/>
+              </a:rPr>
+              <a:t>Φωτογραφίες</a:t>
+            </a:r>
+          </a:p>
+        </p:txBody>
+      </p:sp>
+      <p:sp>
+        <p:nvSpPr>
+          <p:cNvPr id="10" name="Rectangle: Rounded Corners 9">
+            <a:extLst>
+              <a:ext uri="{FF2B5EF4-FFF2-40B4-BE49-F238E27FC236}">
+                <a16:creationId xmlns:a16="http://schemas.microsoft.com/office/drawing/2014/main" id="{490B8828-D32E-4A3D-BE33-A1E6ECA52A6F}"/>
+              </a:ext>
+            </a:extLst>
+          </p:cNvPr>
+          <p:cNvSpPr>
+            <a:spLocks noGrp="1"/>
+          </p:cNvSpPr>
+          <p:nvPr/>
+        </p:nvSpPr>
+        <p:spPr>
+          <a:xfrm>
+            <a:off x="8763000" y="2857500"/>
+            <a:ext cx="2047875" cy="1285875"/>
+          </a:xfrm>
+          <a:prstGeom prst="roundRect">
+            <a:avLst>
+              <a:gd name="adj" fmla="val 5926"/>
+            </a:avLst>
+          </a:prstGeom>
+          <a:solidFill>
+            <a:srgbClr val="F3F6F8"/>
+          </a:solidFill>
+          <a:ln w="0">
+            <a:noFill/>
+          </a:ln>
+        </p:spPr>
+        <p:txBody>
+          <a:bodyPr/>
+          <a:lstStyle/>
+          <a:p>
+            <a:endParaRPr lang="en-GB"/>
+          </a:p>
+        </p:txBody>
+      </p:sp>
+      <p:sp>
+        <p:nvSpPr>
+          <p:cNvPr id="11" name="Rectangle 10">
+            <a:extLst>
+              <a:ext uri="{FF2B5EF4-FFF2-40B4-BE49-F238E27FC236}">
+                <a16:creationId xmlns:a16="http://schemas.microsoft.com/office/drawing/2014/main" id="{E5E23D55-421D-4242-8218-2C74BA9D8EF4}"/>
+              </a:ext>
+            </a:extLst>
+          </p:cNvPr>
+          <p:cNvSpPr>
+            <a:spLocks noGrp="1"/>
+          </p:cNvSpPr>
+          <p:nvPr/>
+        </p:nvSpPr>
+        <p:spPr>
+          <a:xfrm>
+            <a:off x="8905875" y="3067050"/>
+            <a:ext cx="1762125" cy="342900"/>
+          </a:xfrm>
+          <a:prstGeom prst="rect">
+            <a:avLst/>
+          </a:prstGeom>
+          <a:noFill/>
+          <a:ln w="0">
+            <a:noFill/>
+          </a:ln>
+        </p:spPr>
+        <p:txBody>
+          <a:bodyPr lIns="38100" tIns="19050" rIns="38100" bIns="19050" anchor="t">
+            <a:normAutofit/>
+          </a:bodyPr>
+          <a:lstStyle/>
+          <a:p>
+            <a:pPr algn="ctr">
+              <a:defRPr sz="1650" b="1">
+                <a:solidFill>
+                  <a:srgbClr val="6CAB4F"/>
+                </a:solidFill>
+                <a:latin typeface="Tahoma"/>
+                <a:ea typeface="Tahoma"/>
+                <a:cs typeface="Tahoma"/>
+              </a:defRPr>
+            </a:pPr>
+            <a:r>
+              <a:rPr sz="1650" b="1">
+                <a:solidFill>
+                  <a:srgbClr val="6CAB4F"/>
+                </a:solidFill>
+                <a:latin typeface="Tahoma"/>
+                <a:ea typeface="Tahoma"/>
+                <a:cs typeface="Tahoma"/>
+              </a:rPr>
+              <a:t>Ήχος / Βίντεο</a:t>
+            </a:r>
+          </a:p>
+        </p:txBody>
+      </p:sp>
+      <p:sp>
+        <p:nvSpPr>
+          <p:cNvPr id="12" name="Rectangle 11">
+            <a:extLst>
+              <a:ext uri="{FF2B5EF4-FFF2-40B4-BE49-F238E27FC236}">
+                <a16:creationId xmlns:a16="http://schemas.microsoft.com/office/drawing/2014/main" id="{0FBCA25D-99E4-4858-ABB6-9F62E90164AA}"/>
+              </a:ext>
+            </a:extLst>
+          </p:cNvPr>
+          <p:cNvSpPr>
+            <a:spLocks noGrp="1"/>
+          </p:cNvSpPr>
+          <p:nvPr/>
+        </p:nvSpPr>
+        <p:spPr>
+          <a:xfrm>
+            <a:off x="8905875" y="3571875"/>
+            <a:ext cx="1762125" cy="333375"/>
+          </a:xfrm>
+          <a:prstGeom prst="rect">
+            <a:avLst/>
+          </a:prstGeom>
+          <a:noFill/>
+          <a:ln w="0">
+            <a:noFill/>
+          </a:ln>
+        </p:spPr>
+        <p:txBody>
+          <a:bodyPr lIns="38100" tIns="19050" rIns="38100" bIns="19050" anchor="t">
+            <a:normAutofit/>
+          </a:bodyPr>
+          <a:lstStyle/>
+          <a:p>
+            <a:pPr algn="ctr">
+              <a:defRPr sz="1425" b="0">
+                <a:solidFill>
+                  <a:srgbClr val="444444"/>
+                </a:solidFill>
+                <a:latin typeface="Tahoma"/>
+                <a:ea typeface="Tahoma"/>
+                <a:cs typeface="Tahoma"/>
+              </a:defRPr>
+            </a:pPr>
+            <a:r>
+              <a:rPr sz="1425" b="0">
+                <a:solidFill>
+                  <a:srgbClr val="444444"/>
+                </a:solidFill>
+                <a:latin typeface="Tahoma"/>
+                <a:ea typeface="Tahoma"/>
+                <a:cs typeface="Tahoma"/>
+              </a:rPr>
+              <a:t>Πολυμέσα</a:t>
+            </a:r>
+          </a:p>
+        </p:txBody>
+      </p:sp>
+      <p:sp>
+        <p:nvSpPr>
+          <p:cNvPr id="13" name="Rectangle 12">
+            <a:extLst>
+              <a:ext uri="{FF2B5EF4-FFF2-40B4-BE49-F238E27FC236}">
+                <a16:creationId xmlns:a16="http://schemas.microsoft.com/office/drawing/2014/main" id="{6A03AC18-366E-4AF2-B5E0-3059322AD21A}"/>
+              </a:ext>
+            </a:extLst>
+          </p:cNvPr>
+          <p:cNvSpPr>
+            <a:spLocks noGrp="1"/>
+          </p:cNvSpPr>
+          <p:nvPr/>
+        </p:nvSpPr>
+        <p:spPr>
+          <a:xfrm>
+            <a:off x="4095750" y="4810125"/>
+            <a:ext cx="6858000" cy="571500"/>
+          </a:xfrm>
+          <a:prstGeom prst="rect">
+            <a:avLst/>
+          </a:prstGeom>
+          <a:noFill/>
+          <a:ln w="0">
+            <a:noFill/>
+          </a:ln>
+        </p:spPr>
+        <p:txBody>
+          <a:bodyPr lIns="38100" tIns="19050" rIns="38100" bIns="19050" anchor="t">
+            <a:normAutofit/>
+          </a:bodyPr>
+          <a:lstStyle/>
+          <a:p>
+            <a:pPr algn="ctr">
+              <a:defRPr sz="1650" b="0">
+                <a:solidFill>
+                  <a:srgbClr val="444444"/>
+                </a:solidFill>
+                <a:latin typeface="Tahoma"/>
+                <a:ea typeface="Tahoma"/>
+                <a:cs typeface="Tahoma"/>
+              </a:defRPr>
+            </a:pPr>
+            <a:r>
+              <a:rPr sz="1650" b="0">
+                <a:solidFill>
+                  <a:srgbClr val="444444"/>
+                </a:solidFill>
+                <a:latin typeface="Tahoma"/>
+                <a:ea typeface="Tahoma"/>
+                <a:cs typeface="Tahoma"/>
+              </a:rPr>
+              <a:t>Ελέγχουμε πάντα ότι το σωστό αρχείο εμφανίζεται στο μήνυμα πριν την αποστολή.</a:t>
+            </a:r>
+          </a:p>
+        </p:txBody>
+      </p:sp>
+      <p:sp>
+        <p:nvSpPr>
+          <p:cNvPr id="14" name="Rectangle 13">
+            <a:extLst>
+              <a:ext uri="{FF2B5EF4-FFF2-40B4-BE49-F238E27FC236}">
+                <a16:creationId xmlns:a16="http://schemas.microsoft.com/office/drawing/2014/main" id="{24EBBC61-BA63-4EC0-914F-7BFBF6842933}"/>
               </a:ext>
             </a:extLst>
           </p:cNvPr>
@@ -3021,10 +5553,10 @@
       </p:sp>
       <p:sp>
         <p:nvSpPr>
-          <p:cNvPr id="20" name="Rectangle 19">
+          <p:cNvPr id="15" name="Rectangle 14">
             <a:extLst>
               <a:ext uri="{FF2B5EF4-FFF2-40B4-BE49-F238E27FC236}">
-                <a16:creationId xmlns:a16="http://schemas.microsoft.com/office/drawing/2014/main" id="{7BC7E019-2A54-432E-B90E-5FAE6B47D8A7}"/>
+                <a16:creationId xmlns:a16="http://schemas.microsoft.com/office/drawing/2014/main" id="{E178A829-824D-401A-AE27-CAC310681A9E}"/>
               </a:ext>
             </a:extLst>
           </p:cNvPr>
@@ -3059,7 +5591,7 @@
     </p:spTree>
     <p:extLst>
       <p:ext uri="{BB962C8B-B14F-4D97-AF65-F5344CB8AC3E}">
-        <p14:creationId xmlns:p14="http://schemas.microsoft.com/office/powerpoint/2010/main" val="516178550"/>
+        <p14:creationId xmlns:p14="http://schemas.microsoft.com/office/powerpoint/2010/main" val="1126194253"/>
       </p:ext>
     </p:extLst>
   </p:cSld>
@@ -3096,10 +5628,10 @@
       </p:grpSpPr>
       <p:sp>
         <p:nvSpPr>
-          <p:cNvPr id="11" name="Rectangle 10">
+          <p:cNvPr id="21" name="Rectangle 20">
             <a:extLst>
               <a:ext uri="{FF2B5EF4-FFF2-40B4-BE49-F238E27FC236}">
-                <a16:creationId xmlns:a16="http://schemas.microsoft.com/office/drawing/2014/main" id="{F9EBF2BD-69CA-42C4-8808-EF01064663C2}"/>
+                <a16:creationId xmlns:a16="http://schemas.microsoft.com/office/drawing/2014/main" id="{0B666744-8F35-40B5-9E4D-379BFB579709}"/>
               </a:ext>
             </a:extLst>
           </p:cNvPr>
@@ -3146,7 +5678,7 @@
                 <a:ea typeface="Tahoma"/>
                 <a:cs typeface="Tahoma"/>
               </a:rPr>
-              <a:t>Άνοιγμα και αποθήκευση συνημμένου</a:t>
+              <a:t>Επισύναψη αρχείου σε μήνυμα</a:t>
             </a:r>
           </a:p>
         </p:txBody>
@@ -3156,7 +5688,7 @@
           <p:cNvPr id="2" name="Rectangle: Rounded Corners 1">
             <a:extLst>
               <a:ext uri="{FF2B5EF4-FFF2-40B4-BE49-F238E27FC236}">
-                <a16:creationId xmlns:a16="http://schemas.microsoft.com/office/drawing/2014/main" id="{25CC51F1-C956-44D9-9840-C68BA5692CDC}"/>
+                <a16:creationId xmlns:a16="http://schemas.microsoft.com/office/drawing/2014/main" id="{DE5DAB29-8E2E-46DA-A64B-C3D8759C6390}"/>
               </a:ext>
             </a:extLst>
           </p:cNvPr>
@@ -3167,21 +5699,19 @@
         </p:nvSpPr>
         <p:spPr>
           <a:xfrm>
-            <a:off x="590550" y="1333500"/>
-            <a:ext cx="5095875" cy="3333750"/>
+            <a:off x="590550" y="1190625"/>
+            <a:ext cx="514350" cy="514350"/>
           </a:xfrm>
           <a:prstGeom prst="roundRect">
             <a:avLst>
-              <a:gd name="adj" fmla="val 2286"/>
+              <a:gd name="adj" fmla="val 14815"/>
             </a:avLst>
           </a:prstGeom>
           <a:solidFill>
-            <a:srgbClr val="F5F8FB"/>
+            <a:srgbClr val="F57C24"/>
           </a:solidFill>
-          <a:ln w="9525">
-            <a:solidFill>
-              <a:srgbClr val="DCE2E6"/>
-            </a:solidFill>
+          <a:ln w="0">
+            <a:noFill/>
           </a:ln>
         </p:spPr>
         <p:txBody>
@@ -3197,7 +5727,7 @@
           <p:cNvPr id="3" name="Rectangle 2">
             <a:extLst>
               <a:ext uri="{FF2B5EF4-FFF2-40B4-BE49-F238E27FC236}">
-                <a16:creationId xmlns:a16="http://schemas.microsoft.com/office/drawing/2014/main" id="{58D94EFD-5A43-4AB1-82DD-BAA938DB26D6}"/>
+                <a16:creationId xmlns:a16="http://schemas.microsoft.com/office/drawing/2014/main" id="{37B65486-6F82-4F2B-AC4F-2A719ED00064}"/>
               </a:ext>
             </a:extLst>
           </p:cNvPr>
@@ -3208,8 +5738,8 @@
         </p:nvSpPr>
         <p:spPr>
           <a:xfrm>
-            <a:off x="876300" y="1619250"/>
-            <a:ext cx="4524375" cy="400050"/>
+            <a:off x="638175" y="1238250"/>
+            <a:ext cx="419100" cy="419100"/>
           </a:xfrm>
           <a:prstGeom prst="rect">
             <a:avLst/>
@@ -3220,15 +5750,72 @@
           </a:ln>
         </p:spPr>
         <p:txBody>
+          <a:bodyPr lIns="38100" tIns="19050" rIns="38100" bIns="19050" anchor="ctr">
+            <a:normAutofit/>
+          </a:bodyPr>
+          <a:lstStyle/>
+          <a:p>
+            <a:pPr algn="ctr">
+              <a:defRPr sz="1725" b="1">
+                <a:solidFill>
+                  <a:srgbClr val="FFFFFF"/>
+                </a:solidFill>
+                <a:latin typeface="Tahoma"/>
+                <a:ea typeface="Tahoma"/>
+                <a:cs typeface="Tahoma"/>
+              </a:defRPr>
+            </a:pPr>
+            <a:r>
+              <a:rPr sz="1725" b="1">
+                <a:solidFill>
+                  <a:srgbClr val="FFFFFF"/>
+                </a:solidFill>
+                <a:latin typeface="Tahoma"/>
+                <a:ea typeface="Tahoma"/>
+                <a:cs typeface="Tahoma"/>
+              </a:rPr>
+              <a:t>1</a:t>
+            </a:r>
+          </a:p>
+        </p:txBody>
+      </p:sp>
+      <p:sp>
+        <p:nvSpPr>
+          <p:cNvPr id="4" name="Rectangle 3">
+            <a:extLst>
+              <a:ext uri="{FF2B5EF4-FFF2-40B4-BE49-F238E27FC236}">
+                <a16:creationId xmlns:a16="http://schemas.microsoft.com/office/drawing/2014/main" id="{01260B27-D5E8-4AB9-A87A-4C574AFF2094}"/>
+              </a:ext>
+            </a:extLst>
+          </p:cNvPr>
+          <p:cNvSpPr>
+            <a:spLocks noGrp="1"/>
+          </p:cNvSpPr>
+          <p:nvPr/>
+        </p:nvSpPr>
+        <p:spPr>
+          <a:xfrm>
+            <a:off x="1257300" y="1171575"/>
+            <a:ext cx="4381500" cy="342900"/>
+          </a:xfrm>
+          <a:prstGeom prst="rect">
+            <a:avLst/>
+          </a:prstGeom>
+          <a:noFill/>
+          <a:ln w="0">
+            <a:noFill/>
+          </a:ln>
+        </p:spPr>
+        <p:txBody>
           <a:bodyPr lIns="38100" tIns="19050" rIns="38100" bIns="19050" anchor="t">
             <a:normAutofit/>
           </a:bodyPr>
           <a:lstStyle/>
           <a:p>
-            <a:pPr algn="ctr">
-              <a:defRPr sz="2025" b="1">
-                <a:solidFill>
-                  <a:srgbClr val="5599D8"/>
+            <a:pPr algn="l">
+              <a:defRPr sz="1725" b="1">
+                <a:solidFill>
+                  <a:srgbClr val="111111"/>
                 </a:solidFill>
                 <a:latin typeface="Tahoma"/>
                 <a:ea typeface="Tahoma"/>
@@ -3236,9 +5823,429 @@
               </a:defRPr>
             </a:pPr>
             <a:r>
-              <a:rPr sz="2025" b="1">
-                <a:solidFill>
-                  <a:srgbClr val="5599D8"/>
+              <a:rPr sz="1725" b="1">
+                <a:solidFill>
+                  <a:srgbClr val="111111"/>
+                </a:solidFill>
+                <a:latin typeface="Tahoma"/>
+                <a:ea typeface="Tahoma"/>
+                <a:cs typeface="Tahoma"/>
+              </a:rPr>
+              <a:t>Επισύναψη</a:t>
+            </a:r>
+          </a:p>
+        </p:txBody>
+      </p:sp>
+      <p:sp>
+        <p:nvSpPr>
+          <p:cNvPr id="5" name="Rectangle 4">
+            <a:extLst>
+              <a:ext uri="{FF2B5EF4-FFF2-40B4-BE49-F238E27FC236}">
+                <a16:creationId xmlns:a16="http://schemas.microsoft.com/office/drawing/2014/main" id="{DBCDA91A-CC40-4C90-B073-918EACE8355A}"/>
+              </a:ext>
+            </a:extLst>
+          </p:cNvPr>
+          <p:cNvSpPr>
+            <a:spLocks noGrp="1"/>
+          </p:cNvSpPr>
+          <p:nvPr/>
+        </p:nvSpPr>
+        <p:spPr>
+          <a:xfrm>
+            <a:off x="1257300" y="1552575"/>
+            <a:ext cx="4429125" cy="647700"/>
+          </a:xfrm>
+          <a:prstGeom prst="rect">
+            <a:avLst/>
+          </a:prstGeom>
+          <a:noFill/>
+          <a:ln w="0">
+            <a:noFill/>
+          </a:ln>
+        </p:spPr>
+        <p:txBody>
+          <a:bodyPr lIns="38100" tIns="19050" rIns="38100" bIns="19050" anchor="t">
+            <a:normAutofit/>
+          </a:bodyPr>
+          <a:lstStyle/>
+          <a:p>
+            <a:pPr algn="l">
+              <a:defRPr sz="1500" b="0">
+                <a:solidFill>
+                  <a:srgbClr val="333333"/>
+                </a:solidFill>
+                <a:latin typeface="Tahoma"/>
+                <a:ea typeface="Tahoma"/>
+                <a:cs typeface="Tahoma"/>
+              </a:defRPr>
+            </a:pPr>
+            <a:r>
+              <a:rPr sz="1500" b="0">
+                <a:solidFill>
+                  <a:srgbClr val="333333"/>
+                </a:solidFill>
+                <a:latin typeface="Tahoma"/>
+                <a:ea typeface="Tahoma"/>
+                <a:cs typeface="Tahoma"/>
+              </a:rPr>
+              <a:t>Πατάμε Attach ή το εικονίδιο συνδετήρα.</a:t>
+            </a:r>
+          </a:p>
+        </p:txBody>
+      </p:sp>
+      <p:sp>
+        <p:nvSpPr>
+          <p:cNvPr id="6" name="Rectangle: Rounded Corners 5">
+            <a:extLst>
+              <a:ext uri="{FF2B5EF4-FFF2-40B4-BE49-F238E27FC236}">
+                <a16:creationId xmlns:a16="http://schemas.microsoft.com/office/drawing/2014/main" id="{7D29E4AE-C331-4C8E-B684-85997B83F417}"/>
+              </a:ext>
+            </a:extLst>
+          </p:cNvPr>
+          <p:cNvSpPr>
+            <a:spLocks noGrp="1"/>
+          </p:cNvSpPr>
+          <p:nvPr/>
+        </p:nvSpPr>
+        <p:spPr>
+          <a:xfrm>
+            <a:off x="590550" y="2428875"/>
+            <a:ext cx="514350" cy="514350"/>
+          </a:xfrm>
+          <a:prstGeom prst="roundRect">
+            <a:avLst>
+              <a:gd name="adj" fmla="val 14815"/>
+            </a:avLst>
+          </a:prstGeom>
+          <a:solidFill>
+            <a:srgbClr val="5599D8"/>
+          </a:solidFill>
+          <a:ln w="0">
+            <a:noFill/>
+          </a:ln>
+        </p:spPr>
+        <p:txBody>
+          <a:bodyPr/>
+          <a:lstStyle/>
+          <a:p>
+            <a:endParaRPr lang="en-GB"/>
+          </a:p>
+        </p:txBody>
+      </p:sp>
+      <p:sp>
+        <p:nvSpPr>
+          <p:cNvPr id="7" name="Rectangle 6">
+            <a:extLst>
+              <a:ext uri="{FF2B5EF4-FFF2-40B4-BE49-F238E27FC236}">
+                <a16:creationId xmlns:a16="http://schemas.microsoft.com/office/drawing/2014/main" id="{7349C013-D2E9-4D69-8072-E282034C515B}"/>
+              </a:ext>
+            </a:extLst>
+          </p:cNvPr>
+          <p:cNvSpPr>
+            <a:spLocks noGrp="1"/>
+          </p:cNvSpPr>
+          <p:nvPr/>
+        </p:nvSpPr>
+        <p:spPr>
+          <a:xfrm>
+            <a:off x="638175" y="2476500"/>
+            <a:ext cx="419100" cy="419100"/>
+          </a:xfrm>
+          <a:prstGeom prst="rect">
+            <a:avLst/>
+          </a:prstGeom>
+          <a:noFill/>
+          <a:ln w="0">
+            <a:noFill/>
+          </a:ln>
+        </p:spPr>
+        <p:txBody>
+          <a:bodyPr lIns="38100" tIns="19050" rIns="38100" bIns="19050" anchor="ctr">
+            <a:normAutofit/>
+          </a:bodyPr>
+          <a:lstStyle/>
+          <a:p>
+            <a:pPr algn="ctr">
+              <a:defRPr sz="1725" b="1">
+                <a:solidFill>
+                  <a:srgbClr val="FFFFFF"/>
+                </a:solidFill>
+                <a:latin typeface="Tahoma"/>
+                <a:ea typeface="Tahoma"/>
+                <a:cs typeface="Tahoma"/>
+              </a:defRPr>
+            </a:pPr>
+            <a:r>
+              <a:rPr sz="1725" b="1">
+                <a:solidFill>
+                  <a:srgbClr val="FFFFFF"/>
+                </a:solidFill>
+                <a:latin typeface="Tahoma"/>
+                <a:ea typeface="Tahoma"/>
+                <a:cs typeface="Tahoma"/>
+              </a:rPr>
+              <a:t>2</a:t>
+            </a:r>
+          </a:p>
+        </p:txBody>
+      </p:sp>
+      <p:sp>
+        <p:nvSpPr>
+          <p:cNvPr id="8" name="Rectangle 7">
+            <a:extLst>
+              <a:ext uri="{FF2B5EF4-FFF2-40B4-BE49-F238E27FC236}">
+                <a16:creationId xmlns:a16="http://schemas.microsoft.com/office/drawing/2014/main" id="{7D5C6880-CA27-42C4-91BA-348A8B7F28A2}"/>
+              </a:ext>
+            </a:extLst>
+          </p:cNvPr>
+          <p:cNvSpPr>
+            <a:spLocks noGrp="1"/>
+          </p:cNvSpPr>
+          <p:nvPr/>
+        </p:nvSpPr>
+        <p:spPr>
+          <a:xfrm>
+            <a:off x="1257300" y="2409825"/>
+            <a:ext cx="4381500" cy="342900"/>
+          </a:xfrm>
+          <a:prstGeom prst="rect">
+            <a:avLst/>
+          </a:prstGeom>
+          <a:noFill/>
+          <a:ln w="0">
+            <a:noFill/>
+          </a:ln>
+        </p:spPr>
+        <p:txBody>
+          <a:bodyPr lIns="38100" tIns="19050" rIns="38100" bIns="19050" anchor="t">
+            <a:normAutofit/>
+          </a:bodyPr>
+          <a:lstStyle/>
+          <a:p>
+            <a:pPr algn="l">
+              <a:defRPr sz="1725" b="1">
+                <a:solidFill>
+                  <a:srgbClr val="111111"/>
+                </a:solidFill>
+                <a:latin typeface="Tahoma"/>
+                <a:ea typeface="Tahoma"/>
+                <a:cs typeface="Tahoma"/>
+              </a:defRPr>
+            </a:pPr>
+            <a:r>
+              <a:rPr sz="1725" b="1">
+                <a:solidFill>
+                  <a:srgbClr val="111111"/>
+                </a:solidFill>
+                <a:latin typeface="Tahoma"/>
+                <a:ea typeface="Tahoma"/>
+                <a:cs typeface="Tahoma"/>
+              </a:rPr>
+              <a:t>Επιλογή αρχείου</a:t>
+            </a:r>
+          </a:p>
+        </p:txBody>
+      </p:sp>
+      <p:sp>
+        <p:nvSpPr>
+          <p:cNvPr id="9" name="Rectangle 8">
+            <a:extLst>
+              <a:ext uri="{FF2B5EF4-FFF2-40B4-BE49-F238E27FC236}">
+                <a16:creationId xmlns:a16="http://schemas.microsoft.com/office/drawing/2014/main" id="{AA94CB41-730B-466A-897F-5949A1EC49B9}"/>
+              </a:ext>
+            </a:extLst>
+          </p:cNvPr>
+          <p:cNvSpPr>
+            <a:spLocks noGrp="1"/>
+          </p:cNvSpPr>
+          <p:nvPr/>
+        </p:nvSpPr>
+        <p:spPr>
+          <a:xfrm>
+            <a:off x="1257300" y="2790825"/>
+            <a:ext cx="4429125" cy="647700"/>
+          </a:xfrm>
+          <a:prstGeom prst="rect">
+            <a:avLst/>
+          </a:prstGeom>
+          <a:noFill/>
+          <a:ln w="0">
+            <a:noFill/>
+          </a:ln>
+        </p:spPr>
+        <p:txBody>
+          <a:bodyPr lIns="38100" tIns="19050" rIns="38100" bIns="19050" anchor="t">
+            <a:normAutofit/>
+          </a:bodyPr>
+          <a:lstStyle/>
+          <a:p>
+            <a:pPr algn="l">
+              <a:defRPr sz="1500" b="0">
+                <a:solidFill>
+                  <a:srgbClr val="333333"/>
+                </a:solidFill>
+                <a:latin typeface="Tahoma"/>
+                <a:ea typeface="Tahoma"/>
+                <a:cs typeface="Tahoma"/>
+              </a:defRPr>
+            </a:pPr>
+            <a:r>
+              <a:rPr sz="1500" b="0">
+                <a:solidFill>
+                  <a:srgbClr val="333333"/>
+                </a:solidFill>
+                <a:latin typeface="Tahoma"/>
+                <a:ea typeface="Tahoma"/>
+                <a:cs typeface="Tahoma"/>
+              </a:rPr>
+              <a:t>Εντοπίζουμε τον σωστό φάκελο και επιλέγουμε το αρχείο.</a:t>
+            </a:r>
+          </a:p>
+        </p:txBody>
+      </p:sp>
+      <p:sp>
+        <p:nvSpPr>
+          <p:cNvPr id="10" name="Rectangle: Rounded Corners 9">
+            <a:extLst>
+              <a:ext uri="{FF2B5EF4-FFF2-40B4-BE49-F238E27FC236}">
+                <a16:creationId xmlns:a16="http://schemas.microsoft.com/office/drawing/2014/main" id="{EC0CF8AB-9F5E-4A76-90C4-4C66AA2957A6}"/>
+              </a:ext>
+            </a:extLst>
+          </p:cNvPr>
+          <p:cNvSpPr>
+            <a:spLocks noGrp="1"/>
+          </p:cNvSpPr>
+          <p:nvPr/>
+        </p:nvSpPr>
+        <p:spPr>
+          <a:xfrm>
+            <a:off x="590550" y="3667125"/>
+            <a:ext cx="514350" cy="514350"/>
+          </a:xfrm>
+          <a:prstGeom prst="roundRect">
+            <a:avLst>
+              <a:gd name="adj" fmla="val 14815"/>
+            </a:avLst>
+          </a:prstGeom>
+          <a:solidFill>
+            <a:srgbClr val="6CAB4F"/>
+          </a:solidFill>
+          <a:ln w="0">
+            <a:noFill/>
+          </a:ln>
+        </p:spPr>
+        <p:txBody>
+          <a:bodyPr/>
+          <a:lstStyle/>
+          <a:p>
+            <a:endParaRPr lang="en-GB"/>
+          </a:p>
+        </p:txBody>
+      </p:sp>
+      <p:sp>
+        <p:nvSpPr>
+          <p:cNvPr id="11" name="Rectangle 10">
+            <a:extLst>
+              <a:ext uri="{FF2B5EF4-FFF2-40B4-BE49-F238E27FC236}">
+                <a16:creationId xmlns:a16="http://schemas.microsoft.com/office/drawing/2014/main" id="{2538206E-4039-43C5-AEC4-160EFE814788}"/>
+              </a:ext>
+            </a:extLst>
+          </p:cNvPr>
+          <p:cNvSpPr>
+            <a:spLocks noGrp="1"/>
+          </p:cNvSpPr>
+          <p:nvPr/>
+        </p:nvSpPr>
+        <p:spPr>
+          <a:xfrm>
+            <a:off x="638175" y="3714750"/>
+            <a:ext cx="419100" cy="419100"/>
+          </a:xfrm>
+          <a:prstGeom prst="rect">
+            <a:avLst/>
+          </a:prstGeom>
+          <a:noFill/>
+          <a:ln w="0">
+            <a:noFill/>
+          </a:ln>
+        </p:spPr>
+        <p:txBody>
+          <a:bodyPr lIns="38100" tIns="19050" rIns="38100" bIns="19050" anchor="ctr">
+            <a:normAutofit/>
+          </a:bodyPr>
+          <a:lstStyle/>
+          <a:p>
+            <a:pPr algn="ctr">
+              <a:defRPr sz="1725" b="1">
+                <a:solidFill>
+                  <a:srgbClr val="FFFFFF"/>
+                </a:solidFill>
+                <a:latin typeface="Tahoma"/>
+                <a:ea typeface="Tahoma"/>
+                <a:cs typeface="Tahoma"/>
+              </a:defRPr>
+            </a:pPr>
+            <a:r>
+              <a:rPr sz="1725" b="1">
+                <a:solidFill>
+                  <a:srgbClr val="FFFFFF"/>
+                </a:solidFill>
+                <a:latin typeface="Tahoma"/>
+                <a:ea typeface="Tahoma"/>
+                <a:cs typeface="Tahoma"/>
+              </a:rPr>
+              <a:t>3</a:t>
+            </a:r>
+          </a:p>
+        </p:txBody>
+      </p:sp>
+      <p:sp>
+        <p:nvSpPr>
+          <p:cNvPr id="12" name="Rectangle 11">
+            <a:extLst>
+              <a:ext uri="{FF2B5EF4-FFF2-40B4-BE49-F238E27FC236}">
+                <a16:creationId xmlns:a16="http://schemas.microsoft.com/office/drawing/2014/main" id="{1E23B1A8-2287-4B27-9B9E-8491E9FC9DC1}"/>
+              </a:ext>
+            </a:extLst>
+          </p:cNvPr>
+          <p:cNvSpPr>
+            <a:spLocks noGrp="1"/>
+          </p:cNvSpPr>
+          <p:nvPr/>
+        </p:nvSpPr>
+        <p:spPr>
+          <a:xfrm>
+            <a:off x="1257300" y="3648075"/>
+            <a:ext cx="4381500" cy="342900"/>
+          </a:xfrm>
+          <a:prstGeom prst="rect">
+            <a:avLst/>
+          </a:prstGeom>
+          <a:noFill/>
+          <a:ln w="0">
+            <a:noFill/>
+          </a:ln>
+        </p:spPr>
+        <p:txBody>
+          <a:bodyPr lIns="38100" tIns="19050" rIns="38100" bIns="19050" anchor="t">
+            <a:normAutofit/>
+          </a:bodyPr>
+          <a:lstStyle/>
+          <a:p>
+            <a:pPr algn="l">
+              <a:defRPr sz="1725" b="1">
+                <a:solidFill>
+                  <a:srgbClr val="111111"/>
+                </a:solidFill>
+                <a:latin typeface="Tahoma"/>
+                <a:ea typeface="Tahoma"/>
+                <a:cs typeface="Tahoma"/>
+              </a:defRPr>
+            </a:pPr>
+            <a:r>
+              <a:rPr sz="1725" b="1">
+                <a:solidFill>
+                  <a:srgbClr val="111111"/>
                 </a:solidFill>
                 <a:latin typeface="Tahoma"/>
                 <a:ea typeface="Tahoma"/>
@@ -3251,10 +6258,10 @@
       </p:sp>
       <p:sp>
         <p:nvSpPr>
-          <p:cNvPr id="4" name="Rectangle 3">
+          <p:cNvPr id="13" name="Rectangle 12">
             <a:extLst>
               <a:ext uri="{FF2B5EF4-FFF2-40B4-BE49-F238E27FC236}">
-                <a16:creationId xmlns:a16="http://schemas.microsoft.com/office/drawing/2014/main" id="{DAD7D54E-AA23-45F1-9FC2-DF8863AFB486}"/>
+                <a16:creationId xmlns:a16="http://schemas.microsoft.com/office/drawing/2014/main" id="{5668A7C9-8D05-4675-808D-6105E433D45B}"/>
               </a:ext>
             </a:extLst>
           </p:cNvPr>
@@ -3265,8 +6272,8 @@
         </p:nvSpPr>
         <p:spPr>
           <a:xfrm>
-            <a:off x="952500" y="2333625"/>
-            <a:ext cx="4191000" cy="1809750"/>
+            <a:off x="1257300" y="4029075"/>
+            <a:ext cx="4429125" cy="647700"/>
           </a:xfrm>
           <a:prstGeom prst="rect">
             <a:avLst/>
@@ -3277,19 +6284,15 @@
           </a:ln>
         </p:spPr>
         <p:txBody>
-          <a:bodyPr lIns="28575" tIns="19050" rIns="28575" bIns="19050" anchor="t">
+          <a:bodyPr lIns="38100" tIns="19050" rIns="38100" bIns="19050" anchor="t">
             <a:normAutofit/>
           </a:bodyPr>
           <a:lstStyle/>
           <a:p>
-            <a:pPr marL="254000" indent="-152400" algn="l">
-              <a:spcAft>
-                <a:spcPts val="520"/>
-              </a:spcAft>
-              <a:buChar char="•"/>
+            <a:pPr algn="l">
               <a:defRPr sz="1500" b="0">
                 <a:solidFill>
-                  <a:srgbClr val="111111"/>
+                  <a:srgbClr val="333333"/>
                 </a:solidFill>
                 <a:latin typeface="Tahoma"/>
                 <a:ea typeface="Tahoma"/>
@@ -3299,24 +6302,93 @@
             <a:r>
               <a:rPr sz="1500" b="0">
                 <a:solidFill>
-                  <a:srgbClr val="111111"/>
+                  <a:srgbClr val="333333"/>
                 </a:solidFill>
                 <a:latin typeface="Tahoma"/>
                 <a:ea typeface="Tahoma"/>
                 <a:cs typeface="Tahoma"/>
               </a:rPr>
-              <a:t>Ανοίγουμε το μήνυμα.</a:t>
+              <a:t>Πατάμε Open και περιμένουμε να ολοκληρωθεί η επισύναψη.</a:t>
             </a:r>
           </a:p>
-          <a:p>
-            <a:pPr marL="254000" indent="-152400" algn="l">
-              <a:spcAft>
-                <a:spcPts val="520"/>
-              </a:spcAft>
-              <a:buChar char="•"/>
-              <a:defRPr sz="1500" b="0">
-                <a:solidFill>
-                  <a:srgbClr val="111111"/>
+        </p:txBody>
+      </p:sp>
+      <p:sp>
+        <p:nvSpPr>
+          <p:cNvPr id="14" name="Rectangle: Rounded Corners 13">
+            <a:extLst>
+              <a:ext uri="{FF2B5EF4-FFF2-40B4-BE49-F238E27FC236}">
+                <a16:creationId xmlns:a16="http://schemas.microsoft.com/office/drawing/2014/main" id="{B58642D0-1BB8-4E7D-9580-500A5216DE5A}"/>
+              </a:ext>
+            </a:extLst>
+          </p:cNvPr>
+          <p:cNvSpPr>
+            <a:spLocks noGrp="1"/>
+          </p:cNvSpPr>
+          <p:nvPr/>
+        </p:nvSpPr>
+        <p:spPr>
+          <a:xfrm>
+            <a:off x="590550" y="4905375"/>
+            <a:ext cx="514350" cy="514350"/>
+          </a:xfrm>
+          <a:prstGeom prst="roundRect">
+            <a:avLst>
+              <a:gd name="adj" fmla="val 14815"/>
+            </a:avLst>
+          </a:prstGeom>
+          <a:solidFill>
+            <a:srgbClr val="7B4AAC"/>
+          </a:solidFill>
+          <a:ln w="0">
+            <a:noFill/>
+          </a:ln>
+        </p:spPr>
+        <p:txBody>
+          <a:bodyPr/>
+          <a:lstStyle/>
+          <a:p>
+            <a:endParaRPr lang="en-GB"/>
+          </a:p>
+        </p:txBody>
+      </p:sp>
+      <p:sp>
+        <p:nvSpPr>
+          <p:cNvPr id="15" name="Rectangle 14">
+            <a:extLst>
+              <a:ext uri="{FF2B5EF4-FFF2-40B4-BE49-F238E27FC236}">
+                <a16:creationId xmlns:a16="http://schemas.microsoft.com/office/drawing/2014/main" id="{F7AAA448-3943-47B8-8435-A066C6D1A5DC}"/>
+              </a:ext>
+            </a:extLst>
+          </p:cNvPr>
+          <p:cNvSpPr>
+            <a:spLocks noGrp="1"/>
+          </p:cNvSpPr>
+          <p:nvPr/>
+        </p:nvSpPr>
+        <p:spPr>
+          <a:xfrm>
+            <a:off x="638175" y="4953000"/>
+            <a:ext cx="419100" cy="419100"/>
+          </a:xfrm>
+          <a:prstGeom prst="rect">
+            <a:avLst/>
+          </a:prstGeom>
+          <a:noFill/>
+          <a:ln w="0">
+            <a:noFill/>
+          </a:ln>
+        </p:spPr>
+        <p:txBody>
+          <a:bodyPr lIns="38100" tIns="19050" rIns="38100" bIns="19050" anchor="ctr">
+            <a:normAutofit/>
+          </a:bodyPr>
+          <a:lstStyle/>
+          <a:p>
+            <a:pPr algn="ctr">
+              <a:defRPr sz="1725" b="1">
+                <a:solidFill>
+                  <a:srgbClr val="FFFFFF"/>
                 </a:solidFill>
                 <a:latin typeface="Tahoma"/>
                 <a:ea typeface="Tahoma"/>
@@ -3324,24 +6396,54 @@
               </a:defRPr>
             </a:pPr>
             <a:r>
-              <a:rPr sz="1500" b="0">
-                <a:solidFill>
-                  <a:srgbClr val="111111"/>
+              <a:rPr sz="1725" b="1">
+                <a:solidFill>
+                  <a:srgbClr val="FFFFFF"/>
                 </a:solidFill>
                 <a:latin typeface="Tahoma"/>
                 <a:ea typeface="Tahoma"/>
                 <a:cs typeface="Tahoma"/>
               </a:rPr>
-              <a:t>Επιλέγουμε το συνημμένο.</a:t>
+              <a:t>4</a:t>
             </a:r>
           </a:p>
-          <a:p>
-            <a:pPr marL="254000" indent="-152400" algn="l">
-              <a:spcAft>
-                <a:spcPts val="520"/>
-              </a:spcAft>
-              <a:buChar char="•"/>
-              <a:defRPr sz="1500" b="0">
+        </p:txBody>
+      </p:sp>
+      <p:sp>
+        <p:nvSpPr>
+          <p:cNvPr id="16" name="Rectangle 15">
+            <a:extLst>
+              <a:ext uri="{FF2B5EF4-FFF2-40B4-BE49-F238E27FC236}">
+                <a16:creationId xmlns:a16="http://schemas.microsoft.com/office/drawing/2014/main" id="{1D38FCCC-9365-44AE-857B-B87495F510E0}"/>
+              </a:ext>
+            </a:extLst>
+          </p:cNvPr>
+          <p:cNvSpPr>
+            <a:spLocks noGrp="1"/>
+          </p:cNvSpPr>
+          <p:nvPr/>
+        </p:nvSpPr>
+        <p:spPr>
+          <a:xfrm>
+            <a:off x="1257300" y="4886325"/>
+            <a:ext cx="4381500" cy="342900"/>
+          </a:xfrm>
+          <a:prstGeom prst="rect">
+            <a:avLst/>
+          </a:prstGeom>
+          <a:noFill/>
+          <a:ln w="0">
+            <a:noFill/>
+          </a:ln>
+        </p:spPr>
+        <p:txBody>
+          <a:bodyPr lIns="38100" tIns="19050" rIns="38100" bIns="19050" anchor="t">
+            <a:normAutofit/>
+          </a:bodyPr>
+          <a:lstStyle/>
+          <a:p>
+            <a:pPr algn="l">
+              <a:defRPr sz="1725" b="1">
                 <a:solidFill>
                   <a:srgbClr val="111111"/>
                 </a:solidFill>
@@ -3351,7 +6453,7 @@
               </a:defRPr>
             </a:pPr>
             <a:r>
-              <a:rPr sz="1500" b="0">
+              <a:rPr sz="1725" b="1">
                 <a:solidFill>
                   <a:srgbClr val="111111"/>
                 </a:solidFill>
@@ -3359,17 +6461,17 @@
                 <a:ea typeface="Tahoma"/>
                 <a:cs typeface="Tahoma"/>
               </a:rPr>
-              <a:t>Πατάμε Άνοιγμα (Open).</a:t>
+              <a:t>Αποστολή</a:t>
             </a:r>
           </a:p>
         </p:txBody>
       </p:sp>
       <p:sp>
         <p:nvSpPr>
-          <p:cNvPr id="5" name="Rectangle: Rounded Corners 4">
+          <p:cNvPr id="17" name="Rectangle 16">
             <a:extLst>
               <a:ext uri="{FF2B5EF4-FFF2-40B4-BE49-F238E27FC236}">
-                <a16:creationId xmlns:a16="http://schemas.microsoft.com/office/drawing/2014/main" id="{1031FE0E-2189-4F4D-A03D-93F34F6DEE94}"/>
+                <a16:creationId xmlns:a16="http://schemas.microsoft.com/office/drawing/2014/main" id="{7045C611-992C-4AE9-83A2-09281F5591E3}"/>
               </a:ext>
             </a:extLst>
           </p:cNvPr>
@@ -3380,49 +6482,8 @@
         </p:nvSpPr>
         <p:spPr>
           <a:xfrm>
-            <a:off x="6000750" y="1333500"/>
-            <a:ext cx="5095875" cy="3333750"/>
-          </a:xfrm>
-          <a:prstGeom prst="roundRect">
-            <a:avLst>
-              <a:gd name="adj" fmla="val 2286"/>
-            </a:avLst>
-          </a:prstGeom>
-          <a:solidFill>
-            <a:srgbClr val="F8F5FB"/>
-          </a:solidFill>
-          <a:ln w="9525">
-            <a:solidFill>
-              <a:srgbClr val="DCE2E6"/>
-            </a:solidFill>
-          </a:ln>
-        </p:spPr>
-        <p:txBody>
-          <a:bodyPr/>
-          <a:lstStyle/>
-          <a:p>
-            <a:endParaRPr lang="en-GB"/>
-          </a:p>
-        </p:txBody>
-      </p:sp>
-      <p:sp>
-        <p:nvSpPr>
-          <p:cNvPr id="6" name="Rectangle 5">
-            <a:extLst>
-              <a:ext uri="{FF2B5EF4-FFF2-40B4-BE49-F238E27FC236}">
-                <a16:creationId xmlns:a16="http://schemas.microsoft.com/office/drawing/2014/main" id="{F0FBD1FA-196E-4C0B-B34C-DA37D84A5E39}"/>
-              </a:ext>
-            </a:extLst>
-          </p:cNvPr>
-          <p:cNvSpPr>
-            <a:spLocks noGrp="1"/>
-          </p:cNvSpPr>
-          <p:nvPr/>
-        </p:nvSpPr>
-        <p:spPr>
-          <a:xfrm>
-            <a:off x="6286500" y="1619250"/>
-            <a:ext cx="4524375" cy="400050"/>
+            <a:off x="1257300" y="5267325"/>
+            <a:ext cx="4429125" cy="647700"/>
           </a:xfrm>
           <a:prstGeom prst="rect">
             <a:avLst/>
@@ -3438,10 +6499,10 @@
           </a:bodyPr>
           <a:lstStyle/>
           <a:p>
-            <a:pPr algn="ctr">
-              <a:defRPr sz="2025" b="1">
-                <a:solidFill>
-                  <a:srgbClr val="7B4AAC"/>
+            <a:pPr algn="l">
+              <a:defRPr sz="1500" b="0">
+                <a:solidFill>
+                  <a:srgbClr val="333333"/>
                 </a:solidFill>
                 <a:latin typeface="Tahoma"/>
                 <a:ea typeface="Tahoma"/>
@@ -3449,197 +6510,47 @@
               </a:defRPr>
             </a:pPr>
             <a:r>
-              <a:rPr sz="2025" b="1">
-                <a:solidFill>
-                  <a:srgbClr val="7B4AAC"/>
+              <a:rPr sz="1500" b="0">
+                <a:solidFill>
+                  <a:srgbClr val="333333"/>
                 </a:solidFill>
                 <a:latin typeface="Tahoma"/>
                 <a:ea typeface="Tahoma"/>
                 <a:cs typeface="Tahoma"/>
               </a:rPr>
-              <a:t>Αποθήκευση</a:t>
+              <a:t>Ελέγχουμε το συνημμένο και πατάμε Send.</a:t>
             </a:r>
           </a:p>
         </p:txBody>
       </p:sp>
-      <p:sp>
-        <p:nvSpPr>
-          <p:cNvPr id="7" name="Rectangle 6">
-            <a:extLst>
-              <a:ext uri="{FF2B5EF4-FFF2-40B4-BE49-F238E27FC236}">
-                <a16:creationId xmlns:a16="http://schemas.microsoft.com/office/drawing/2014/main" id="{8B46C3FD-F501-4D47-A11B-84BCA967A5A4}"/>
-              </a:ext>
-            </a:extLst>
-          </p:cNvPr>
-          <p:cNvSpPr>
-            <a:spLocks noGrp="1"/>
-          </p:cNvSpPr>
+      <p:pic>
+        <p:nvPicPr>
+          <p:cNvPr id="38" name="Picture 37"/>
+          <p:cNvPicPr>
+            <a:picLocks noChangeAspect="1"/>
+          </p:cNvPicPr>
           <p:nvPr/>
-        </p:nvSpPr>
+        </p:nvPicPr>
+        <p:blipFill>
+          <a:blip r:embed="rId3"/>
+          <a:stretch/>
+        </p:blipFill>
         <p:spPr>
           <a:xfrm>
-            <a:off x="6477000" y="2333625"/>
-            <a:ext cx="4000500" cy="1809750"/>
+            <a:off x="7334250" y="1476375"/>
+            <a:ext cx="2857500" cy="2857500"/>
           </a:xfrm>
           <a:prstGeom prst="rect">
             <a:avLst/>
           </a:prstGeom>
-          <a:noFill/>
-          <a:ln w="0">
-            <a:noFill/>
-          </a:ln>
-        </p:spPr>
-        <p:txBody>
-          <a:bodyPr lIns="28575" tIns="19050" rIns="28575" bIns="19050" anchor="t">
-            <a:normAutofit/>
-          </a:bodyPr>
-          <a:lstStyle/>
-          <a:p>
-            <a:pPr marL="254000" indent="-152400" algn="l">
-              <a:spcAft>
-                <a:spcPts val="520"/>
-              </a:spcAft>
-              <a:buChar char="•"/>
-              <a:defRPr sz="1500" b="0">
-                <a:solidFill>
-                  <a:srgbClr val="111111"/>
-                </a:solidFill>
-                <a:latin typeface="Tahoma"/>
-                <a:ea typeface="Tahoma"/>
-                <a:cs typeface="Tahoma"/>
-              </a:defRPr>
-            </a:pPr>
-            <a:r>
-              <a:rPr sz="1500" b="0">
-                <a:solidFill>
-                  <a:srgbClr val="111111"/>
-                </a:solidFill>
-                <a:latin typeface="Tahoma"/>
-                <a:ea typeface="Tahoma"/>
-                <a:cs typeface="Tahoma"/>
-              </a:rPr>
-              <a:t>Πατάμε Λήψη (Download).</a:t>
-            </a:r>
-          </a:p>
-          <a:p>
-            <a:pPr marL="254000" indent="-152400" algn="l">
-              <a:spcAft>
-                <a:spcPts val="520"/>
-              </a:spcAft>
-              <a:buChar char="•"/>
-              <a:defRPr sz="1500" b="0">
-                <a:solidFill>
-                  <a:srgbClr val="111111"/>
-                </a:solidFill>
-                <a:latin typeface="Tahoma"/>
-                <a:ea typeface="Tahoma"/>
-                <a:cs typeface="Tahoma"/>
-              </a:defRPr>
-            </a:pPr>
-            <a:r>
-              <a:rPr sz="1500" b="0">
-                <a:solidFill>
-                  <a:srgbClr val="111111"/>
-                </a:solidFill>
-                <a:latin typeface="Tahoma"/>
-                <a:ea typeface="Tahoma"/>
-                <a:cs typeface="Tahoma"/>
-              </a:rPr>
-              <a:t>Επιλέγουμε Αποθήκευση ως.</a:t>
-            </a:r>
-          </a:p>
-          <a:p>
-            <a:pPr marL="254000" indent="-152400" algn="l">
-              <a:spcAft>
-                <a:spcPts val="520"/>
-              </a:spcAft>
-              <a:buChar char="•"/>
-              <a:defRPr sz="1500" b="0">
-                <a:solidFill>
-                  <a:srgbClr val="111111"/>
-                </a:solidFill>
-                <a:latin typeface="Tahoma"/>
-                <a:ea typeface="Tahoma"/>
-                <a:cs typeface="Tahoma"/>
-              </a:defRPr>
-            </a:pPr>
-            <a:r>
-              <a:rPr sz="1500" b="0">
-                <a:solidFill>
-                  <a:srgbClr val="111111"/>
-                </a:solidFill>
-                <a:latin typeface="Tahoma"/>
-                <a:ea typeface="Tahoma"/>
-                <a:cs typeface="Tahoma"/>
-              </a:rPr>
-              <a:t>Ορίζουμε τον σωστό φάκελο.</a:t>
-            </a:r>
-          </a:p>
-        </p:txBody>
-      </p:sp>
-      <p:sp>
-        <p:nvSpPr>
-          <p:cNvPr id="8" name="Rectangle 7">
+        </p:spPr>
+      </p:pic>
+      <p:sp>
+        <p:nvSpPr>
+          <p:cNvPr id="19" name="Rectangle 18">
             <a:extLst>
               <a:ext uri="{FF2B5EF4-FFF2-40B4-BE49-F238E27FC236}">
-                <a16:creationId xmlns:a16="http://schemas.microsoft.com/office/drawing/2014/main" id="{E7620FDB-49B2-4B74-84D9-1BAD5CBE13F6}"/>
-              </a:ext>
-            </a:extLst>
-          </p:cNvPr>
-          <p:cNvSpPr>
-            <a:spLocks noGrp="1"/>
-          </p:cNvSpPr>
-          <p:nvPr/>
-        </p:nvSpPr>
-        <p:spPr>
-          <a:xfrm>
-            <a:off x="619125" y="5095875"/>
-            <a:ext cx="10477500" cy="476250"/>
-          </a:xfrm>
-          <a:prstGeom prst="rect">
-            <a:avLst/>
-          </a:prstGeom>
-          <a:noFill/>
-          <a:ln w="0">
-            <a:noFill/>
-          </a:ln>
-        </p:spPr>
-        <p:txBody>
-          <a:bodyPr lIns="38100" tIns="19050" rIns="38100" bIns="19050" anchor="t">
-            <a:normAutofit/>
-          </a:bodyPr>
-          <a:lstStyle/>
-          <a:p>
-            <a:pPr algn="ctr">
-              <a:defRPr sz="1725" b="1">
-                <a:solidFill>
-                  <a:srgbClr val="B04A2F"/>
-                </a:solidFill>
-                <a:latin typeface="Tahoma"/>
-                <a:ea typeface="Tahoma"/>
-                <a:cs typeface="Tahoma"/>
-              </a:defRPr>
-            </a:pPr>
-            <a:r>
-              <a:rPr sz="1725" b="1">
-                <a:solidFill>
-                  <a:srgbClr val="B04A2F"/>
-                </a:solidFill>
-                <a:latin typeface="Tahoma"/>
-                <a:ea typeface="Tahoma"/>
-                <a:cs typeface="Tahoma"/>
-              </a:rPr>
-              <a:t>Ανοίγουμε μόνο συνημμένα από αποστολείς που εμπιστευόμαστε.</a:t>
-            </a:r>
-          </a:p>
-        </p:txBody>
-      </p:sp>
-      <p:sp>
-        <p:nvSpPr>
-          <p:cNvPr id="9" name="Rectangle 8">
-            <a:extLst>
-              <a:ext uri="{FF2B5EF4-FFF2-40B4-BE49-F238E27FC236}">
-                <a16:creationId xmlns:a16="http://schemas.microsoft.com/office/drawing/2014/main" id="{539D2DE1-406F-494F-80B6-FD3F88BD4329}"/>
+                <a16:creationId xmlns:a16="http://schemas.microsoft.com/office/drawing/2014/main" id="{B5971AC7-6FFE-4114-9C91-8FBC61B2C6D4}"/>
               </a:ext>
             </a:extLst>
           </p:cNvPr>
@@ -3673,10 +6584,10 @@
       </p:sp>
       <p:sp>
         <p:nvSpPr>
-          <p:cNvPr id="10" name="Rectangle 9">
+          <p:cNvPr id="20" name="Rectangle 19">
             <a:extLst>
               <a:ext uri="{FF2B5EF4-FFF2-40B4-BE49-F238E27FC236}">
-                <a16:creationId xmlns:a16="http://schemas.microsoft.com/office/drawing/2014/main" id="{74379F0B-CCD9-479B-940F-9EBA47C725AF}"/>
+                <a16:creationId xmlns:a16="http://schemas.microsoft.com/office/drawing/2014/main" id="{7BC7E019-2A54-432E-B90E-5FAE6B47D8A7}"/>
               </a:ext>
             </a:extLst>
           </p:cNvPr>
@@ -3711,7 +6622,7 @@
     </p:spTree>
     <p:extLst>
       <p:ext uri="{BB962C8B-B14F-4D97-AF65-F5344CB8AC3E}">
-        <p14:creationId xmlns:p14="http://schemas.microsoft.com/office/powerpoint/2010/main" val="820401625"/>
+        <p14:creationId xmlns:p14="http://schemas.microsoft.com/office/powerpoint/2010/main" val="516178550"/>
       </p:ext>
     </p:extLst>
   </p:cSld>
@@ -3748,10 +6659,10 @@
       </p:grpSpPr>
       <p:sp>
         <p:nvSpPr>
-          <p:cNvPr id="10" name="Rectangle 9">
+          <p:cNvPr id="11" name="Rectangle 10">
             <a:extLst>
               <a:ext uri="{FF2B5EF4-FFF2-40B4-BE49-F238E27FC236}">
-                <a16:creationId xmlns:a16="http://schemas.microsoft.com/office/drawing/2014/main" id="{BCC72C02-C3C0-4ACA-88F1-D8A87F21FF02}"/>
+                <a16:creationId xmlns:a16="http://schemas.microsoft.com/office/drawing/2014/main" id="{F9EBF2BD-69CA-42C4-8808-EF01064663C2}"/>
               </a:ext>
             </a:extLst>
           </p:cNvPr>
@@ -3798,17 +6709,17 @@
                 <a:ea typeface="Tahoma"/>
                 <a:cs typeface="Tahoma"/>
               </a:rPr>
-              <a:t>Ασκήσεις Α5.2 Μ3</a:t>
+              <a:t>Άνοιγμα και αποθήκευση συνημμένου</a:t>
             </a:r>
           </a:p>
         </p:txBody>
       </p:sp>
       <p:sp>
         <p:nvSpPr>
-          <p:cNvPr id="2" name="Rectangle 1">
+          <p:cNvPr id="2" name="Rectangle: Rounded Corners 1">
             <a:extLst>
               <a:ext uri="{FF2B5EF4-FFF2-40B4-BE49-F238E27FC236}">
-                <a16:creationId xmlns:a16="http://schemas.microsoft.com/office/drawing/2014/main" id="{0CAABC78-BC95-47BB-A9C9-6FCE423908A8}"/>
+                <a16:creationId xmlns:a16="http://schemas.microsoft.com/office/drawing/2014/main" id="{25CC51F1-C956-44D9-9840-C68BA5692CDC}"/>
               </a:ext>
             </a:extLst>
           </p:cNvPr>
@@ -3819,8 +6730,491 @@
         </p:nvSpPr>
         <p:spPr>
           <a:xfrm>
-            <a:off x="619125" y="1200150"/>
-            <a:ext cx="1762125" cy="47625"/>
+            <a:off x="590550" y="1333500"/>
+            <a:ext cx="5095875" cy="3333750"/>
+          </a:xfrm>
+          <a:prstGeom prst="roundRect">
+            <a:avLst>
+              <a:gd name="adj" fmla="val 2286"/>
+            </a:avLst>
+          </a:prstGeom>
+          <a:solidFill>
+            <a:srgbClr val="F5F8FB"/>
+          </a:solidFill>
+          <a:ln w="9525">
+            <a:solidFill>
+              <a:srgbClr val="DCE2E6"/>
+            </a:solidFill>
+          </a:ln>
+        </p:spPr>
+        <p:txBody>
+          <a:bodyPr/>
+          <a:lstStyle/>
+          <a:p>
+            <a:endParaRPr lang="en-GB"/>
+          </a:p>
+        </p:txBody>
+      </p:sp>
+      <p:sp>
+        <p:nvSpPr>
+          <p:cNvPr id="3" name="Rectangle 2">
+            <a:extLst>
+              <a:ext uri="{FF2B5EF4-FFF2-40B4-BE49-F238E27FC236}">
+                <a16:creationId xmlns:a16="http://schemas.microsoft.com/office/drawing/2014/main" id="{58D94EFD-5A43-4AB1-82DD-BAA938DB26D6}"/>
+              </a:ext>
+            </a:extLst>
+          </p:cNvPr>
+          <p:cNvSpPr>
+            <a:spLocks noGrp="1"/>
+          </p:cNvSpPr>
+          <p:nvPr/>
+        </p:nvSpPr>
+        <p:spPr>
+          <a:xfrm>
+            <a:off x="876300" y="1619250"/>
+            <a:ext cx="4524375" cy="400050"/>
+          </a:xfrm>
+          <a:prstGeom prst="rect">
+            <a:avLst/>
+          </a:prstGeom>
+          <a:noFill/>
+          <a:ln w="0">
+            <a:noFill/>
+          </a:ln>
+        </p:spPr>
+        <p:txBody>
+          <a:bodyPr lIns="38100" tIns="19050" rIns="38100" bIns="19050" anchor="t">
+            <a:normAutofit/>
+          </a:bodyPr>
+          <a:lstStyle/>
+          <a:p>
+            <a:pPr algn="ctr">
+              <a:defRPr sz="2025" b="1">
+                <a:solidFill>
+                  <a:srgbClr val="5599D8"/>
+                </a:solidFill>
+                <a:latin typeface="Tahoma"/>
+                <a:ea typeface="Tahoma"/>
+                <a:cs typeface="Tahoma"/>
+              </a:defRPr>
+            </a:pPr>
+            <a:r>
+              <a:rPr sz="2025" b="1">
+                <a:solidFill>
+                  <a:srgbClr val="5599D8"/>
+                </a:solidFill>
+                <a:latin typeface="Tahoma"/>
+                <a:ea typeface="Tahoma"/>
+                <a:cs typeface="Tahoma"/>
+              </a:rPr>
+              <a:t>Άνοιγμα</a:t>
+            </a:r>
+          </a:p>
+        </p:txBody>
+      </p:sp>
+      <p:sp>
+        <p:nvSpPr>
+          <p:cNvPr id="4" name="Rectangle 3">
+            <a:extLst>
+              <a:ext uri="{FF2B5EF4-FFF2-40B4-BE49-F238E27FC236}">
+                <a16:creationId xmlns:a16="http://schemas.microsoft.com/office/drawing/2014/main" id="{DAD7D54E-AA23-45F1-9FC2-DF8863AFB486}"/>
+              </a:ext>
+            </a:extLst>
+          </p:cNvPr>
+          <p:cNvSpPr>
+            <a:spLocks noGrp="1"/>
+          </p:cNvSpPr>
+          <p:nvPr/>
+        </p:nvSpPr>
+        <p:spPr>
+          <a:xfrm>
+            <a:off x="952500" y="2333625"/>
+            <a:ext cx="4191000" cy="1809750"/>
+          </a:xfrm>
+          <a:prstGeom prst="rect">
+            <a:avLst/>
+          </a:prstGeom>
+          <a:noFill/>
+          <a:ln w="0">
+            <a:noFill/>
+          </a:ln>
+        </p:spPr>
+        <p:txBody>
+          <a:bodyPr lIns="28575" tIns="19050" rIns="28575" bIns="19050" anchor="t">
+            <a:normAutofit/>
+          </a:bodyPr>
+          <a:lstStyle/>
+          <a:p>
+            <a:pPr marL="254000" indent="-152400" algn="l">
+              <a:spcAft>
+                <a:spcPts val="520"/>
+              </a:spcAft>
+              <a:buChar char="•"/>
+              <a:defRPr sz="1500" b="0">
+                <a:solidFill>
+                  <a:srgbClr val="111111"/>
+                </a:solidFill>
+                <a:latin typeface="Tahoma"/>
+                <a:ea typeface="Tahoma"/>
+                <a:cs typeface="Tahoma"/>
+              </a:defRPr>
+            </a:pPr>
+            <a:r>
+              <a:rPr sz="1500" b="0">
+                <a:solidFill>
+                  <a:srgbClr val="111111"/>
+                </a:solidFill>
+                <a:latin typeface="Tahoma"/>
+                <a:ea typeface="Tahoma"/>
+                <a:cs typeface="Tahoma"/>
+              </a:rPr>
+              <a:t>Ανοίγουμε το μήνυμα.</a:t>
+            </a:r>
+          </a:p>
+          <a:p>
+            <a:pPr marL="254000" indent="-152400" algn="l">
+              <a:spcAft>
+                <a:spcPts val="520"/>
+              </a:spcAft>
+              <a:buChar char="•"/>
+              <a:defRPr sz="1500" b="0">
+                <a:solidFill>
+                  <a:srgbClr val="111111"/>
+                </a:solidFill>
+                <a:latin typeface="Tahoma"/>
+                <a:ea typeface="Tahoma"/>
+                <a:cs typeface="Tahoma"/>
+              </a:defRPr>
+            </a:pPr>
+            <a:r>
+              <a:rPr sz="1500" b="0">
+                <a:solidFill>
+                  <a:srgbClr val="111111"/>
+                </a:solidFill>
+                <a:latin typeface="Tahoma"/>
+                <a:ea typeface="Tahoma"/>
+                <a:cs typeface="Tahoma"/>
+              </a:rPr>
+              <a:t>Επιλέγουμε το συνημμένο.</a:t>
+            </a:r>
+          </a:p>
+          <a:p>
+            <a:pPr marL="254000" indent="-152400" algn="l">
+              <a:spcAft>
+                <a:spcPts val="520"/>
+              </a:spcAft>
+              <a:buChar char="•"/>
+              <a:defRPr sz="1500" b="0">
+                <a:solidFill>
+                  <a:srgbClr val="111111"/>
+                </a:solidFill>
+                <a:latin typeface="Tahoma"/>
+                <a:ea typeface="Tahoma"/>
+                <a:cs typeface="Tahoma"/>
+              </a:defRPr>
+            </a:pPr>
+            <a:r>
+              <a:rPr sz="1500" b="0">
+                <a:solidFill>
+                  <a:srgbClr val="111111"/>
+                </a:solidFill>
+                <a:latin typeface="Tahoma"/>
+                <a:ea typeface="Tahoma"/>
+                <a:cs typeface="Tahoma"/>
+              </a:rPr>
+              <a:t>Πατάμε Άνοιγμα (Open).</a:t>
+            </a:r>
+          </a:p>
+        </p:txBody>
+      </p:sp>
+      <p:sp>
+        <p:nvSpPr>
+          <p:cNvPr id="5" name="Rectangle: Rounded Corners 4">
+            <a:extLst>
+              <a:ext uri="{FF2B5EF4-FFF2-40B4-BE49-F238E27FC236}">
+                <a16:creationId xmlns:a16="http://schemas.microsoft.com/office/drawing/2014/main" id="{1031FE0E-2189-4F4D-A03D-93F34F6DEE94}"/>
+              </a:ext>
+            </a:extLst>
+          </p:cNvPr>
+          <p:cNvSpPr>
+            <a:spLocks noGrp="1"/>
+          </p:cNvSpPr>
+          <p:nvPr/>
+        </p:nvSpPr>
+        <p:spPr>
+          <a:xfrm>
+            <a:off x="6000750" y="1333500"/>
+            <a:ext cx="5095875" cy="3333750"/>
+          </a:xfrm>
+          <a:prstGeom prst="roundRect">
+            <a:avLst>
+              <a:gd name="adj" fmla="val 2286"/>
+            </a:avLst>
+          </a:prstGeom>
+          <a:solidFill>
+            <a:srgbClr val="F8F5FB"/>
+          </a:solidFill>
+          <a:ln w="9525">
+            <a:solidFill>
+              <a:srgbClr val="DCE2E6"/>
+            </a:solidFill>
+          </a:ln>
+        </p:spPr>
+        <p:txBody>
+          <a:bodyPr/>
+          <a:lstStyle/>
+          <a:p>
+            <a:endParaRPr lang="en-GB"/>
+          </a:p>
+        </p:txBody>
+      </p:sp>
+      <p:sp>
+        <p:nvSpPr>
+          <p:cNvPr id="6" name="Rectangle 5">
+            <a:extLst>
+              <a:ext uri="{FF2B5EF4-FFF2-40B4-BE49-F238E27FC236}">
+                <a16:creationId xmlns:a16="http://schemas.microsoft.com/office/drawing/2014/main" id="{F0FBD1FA-196E-4C0B-B34C-DA37D84A5E39}"/>
+              </a:ext>
+            </a:extLst>
+          </p:cNvPr>
+          <p:cNvSpPr>
+            <a:spLocks noGrp="1"/>
+          </p:cNvSpPr>
+          <p:nvPr/>
+        </p:nvSpPr>
+        <p:spPr>
+          <a:xfrm>
+            <a:off x="6286500" y="1619250"/>
+            <a:ext cx="4524375" cy="400050"/>
+          </a:xfrm>
+          <a:prstGeom prst="rect">
+            <a:avLst/>
+          </a:prstGeom>
+          <a:noFill/>
+          <a:ln w="0">
+            <a:noFill/>
+          </a:ln>
+        </p:spPr>
+        <p:txBody>
+          <a:bodyPr lIns="38100" tIns="19050" rIns="38100" bIns="19050" anchor="t">
+            <a:normAutofit/>
+          </a:bodyPr>
+          <a:lstStyle/>
+          <a:p>
+            <a:pPr algn="ctr">
+              <a:defRPr sz="2025" b="1">
+                <a:solidFill>
+                  <a:srgbClr val="7B4AAC"/>
+                </a:solidFill>
+                <a:latin typeface="Tahoma"/>
+                <a:ea typeface="Tahoma"/>
+                <a:cs typeface="Tahoma"/>
+              </a:defRPr>
+            </a:pPr>
+            <a:r>
+              <a:rPr sz="2025" b="1">
+                <a:solidFill>
+                  <a:srgbClr val="7B4AAC"/>
+                </a:solidFill>
+                <a:latin typeface="Tahoma"/>
+                <a:ea typeface="Tahoma"/>
+                <a:cs typeface="Tahoma"/>
+              </a:rPr>
+              <a:t>Αποθήκευση</a:t>
+            </a:r>
+          </a:p>
+        </p:txBody>
+      </p:sp>
+      <p:sp>
+        <p:nvSpPr>
+          <p:cNvPr id="7" name="Rectangle 6">
+            <a:extLst>
+              <a:ext uri="{FF2B5EF4-FFF2-40B4-BE49-F238E27FC236}">
+                <a16:creationId xmlns:a16="http://schemas.microsoft.com/office/drawing/2014/main" id="{8B46C3FD-F501-4D47-A11B-84BCA967A5A4}"/>
+              </a:ext>
+            </a:extLst>
+          </p:cNvPr>
+          <p:cNvSpPr>
+            <a:spLocks noGrp="1"/>
+          </p:cNvSpPr>
+          <p:nvPr/>
+        </p:nvSpPr>
+        <p:spPr>
+          <a:xfrm>
+            <a:off x="6477000" y="2333625"/>
+            <a:ext cx="4000500" cy="1809750"/>
+          </a:xfrm>
+          <a:prstGeom prst="rect">
+            <a:avLst/>
+          </a:prstGeom>
+          <a:noFill/>
+          <a:ln w="0">
+            <a:noFill/>
+          </a:ln>
+        </p:spPr>
+        <p:txBody>
+          <a:bodyPr lIns="28575" tIns="19050" rIns="28575" bIns="19050" anchor="t">
+            <a:normAutofit/>
+          </a:bodyPr>
+          <a:lstStyle/>
+          <a:p>
+            <a:pPr marL="254000" indent="-152400" algn="l">
+              <a:spcAft>
+                <a:spcPts val="520"/>
+              </a:spcAft>
+              <a:buChar char="•"/>
+              <a:defRPr sz="1500" b="0">
+                <a:solidFill>
+                  <a:srgbClr val="111111"/>
+                </a:solidFill>
+                <a:latin typeface="Tahoma"/>
+                <a:ea typeface="Tahoma"/>
+                <a:cs typeface="Tahoma"/>
+              </a:defRPr>
+            </a:pPr>
+            <a:r>
+              <a:rPr sz="1500" b="0">
+                <a:solidFill>
+                  <a:srgbClr val="111111"/>
+                </a:solidFill>
+                <a:latin typeface="Tahoma"/>
+                <a:ea typeface="Tahoma"/>
+                <a:cs typeface="Tahoma"/>
+              </a:rPr>
+              <a:t>Πατάμε Λήψη (Download).</a:t>
+            </a:r>
+          </a:p>
+          <a:p>
+            <a:pPr marL="254000" indent="-152400" algn="l">
+              <a:spcAft>
+                <a:spcPts val="520"/>
+              </a:spcAft>
+              <a:buChar char="•"/>
+              <a:defRPr sz="1500" b="0">
+                <a:solidFill>
+                  <a:srgbClr val="111111"/>
+                </a:solidFill>
+                <a:latin typeface="Tahoma"/>
+                <a:ea typeface="Tahoma"/>
+                <a:cs typeface="Tahoma"/>
+              </a:defRPr>
+            </a:pPr>
+            <a:r>
+              <a:rPr sz="1500" b="0">
+                <a:solidFill>
+                  <a:srgbClr val="111111"/>
+                </a:solidFill>
+                <a:latin typeface="Tahoma"/>
+                <a:ea typeface="Tahoma"/>
+                <a:cs typeface="Tahoma"/>
+              </a:rPr>
+              <a:t>Επιλέγουμε Αποθήκευση ως.</a:t>
+            </a:r>
+          </a:p>
+          <a:p>
+            <a:pPr marL="254000" indent="-152400" algn="l">
+              <a:spcAft>
+                <a:spcPts val="520"/>
+              </a:spcAft>
+              <a:buChar char="•"/>
+              <a:defRPr sz="1500" b="0">
+                <a:solidFill>
+                  <a:srgbClr val="111111"/>
+                </a:solidFill>
+                <a:latin typeface="Tahoma"/>
+                <a:ea typeface="Tahoma"/>
+                <a:cs typeface="Tahoma"/>
+              </a:defRPr>
+            </a:pPr>
+            <a:r>
+              <a:rPr sz="1500" b="0">
+                <a:solidFill>
+                  <a:srgbClr val="111111"/>
+                </a:solidFill>
+                <a:latin typeface="Tahoma"/>
+                <a:ea typeface="Tahoma"/>
+                <a:cs typeface="Tahoma"/>
+              </a:rPr>
+              <a:t>Ορίζουμε τον σωστό φάκελο.</a:t>
+            </a:r>
+          </a:p>
+        </p:txBody>
+      </p:sp>
+      <p:sp>
+        <p:nvSpPr>
+          <p:cNvPr id="8" name="Rectangle 7">
+            <a:extLst>
+              <a:ext uri="{FF2B5EF4-FFF2-40B4-BE49-F238E27FC236}">
+                <a16:creationId xmlns:a16="http://schemas.microsoft.com/office/drawing/2014/main" id="{E7620FDB-49B2-4B74-84D9-1BAD5CBE13F6}"/>
+              </a:ext>
+            </a:extLst>
+          </p:cNvPr>
+          <p:cNvSpPr>
+            <a:spLocks noGrp="1"/>
+          </p:cNvSpPr>
+          <p:nvPr/>
+        </p:nvSpPr>
+        <p:spPr>
+          <a:xfrm>
+            <a:off x="619125" y="5095875"/>
+            <a:ext cx="10477500" cy="476250"/>
+          </a:xfrm>
+          <a:prstGeom prst="rect">
+            <a:avLst/>
+          </a:prstGeom>
+          <a:noFill/>
+          <a:ln w="0">
+            <a:noFill/>
+          </a:ln>
+        </p:spPr>
+        <p:txBody>
+          <a:bodyPr lIns="38100" tIns="19050" rIns="38100" bIns="19050" anchor="t">
+            <a:normAutofit/>
+          </a:bodyPr>
+          <a:lstStyle/>
+          <a:p>
+            <a:pPr algn="ctr">
+              <a:defRPr sz="1725" b="1">
+                <a:solidFill>
+                  <a:srgbClr val="B04A2F"/>
+                </a:solidFill>
+                <a:latin typeface="Tahoma"/>
+                <a:ea typeface="Tahoma"/>
+                <a:cs typeface="Tahoma"/>
+              </a:defRPr>
+            </a:pPr>
+            <a:r>
+              <a:rPr sz="1725" b="1">
+                <a:solidFill>
+                  <a:srgbClr val="B04A2F"/>
+                </a:solidFill>
+                <a:latin typeface="Tahoma"/>
+                <a:ea typeface="Tahoma"/>
+                <a:cs typeface="Tahoma"/>
+              </a:rPr>
+              <a:t>Ανοίγουμε μόνο συνημμένα από αποστολείς που εμπιστευόμαστε.</a:t>
+            </a:r>
+          </a:p>
+        </p:txBody>
+      </p:sp>
+      <p:sp>
+        <p:nvSpPr>
+          <p:cNvPr id="9" name="Rectangle 8">
+            <a:extLst>
+              <a:ext uri="{FF2B5EF4-FFF2-40B4-BE49-F238E27FC236}">
+                <a16:creationId xmlns:a16="http://schemas.microsoft.com/office/drawing/2014/main" id="{539D2DE1-406F-494F-80B6-FD3F88BD4329}"/>
+              </a:ext>
+            </a:extLst>
+          </p:cNvPr>
+          <p:cNvSpPr>
+            <a:spLocks noGrp="1"/>
+          </p:cNvSpPr>
+          <p:nvPr/>
+        </p:nvSpPr>
+        <p:spPr>
+          <a:xfrm>
+            <a:off x="552450" y="6429375"/>
+            <a:ext cx="11087100" cy="47625"/>
           </a:xfrm>
           <a:prstGeom prst="rect">
             <a:avLst/>
@@ -3842,192 +7236,10 @@
       </p:sp>
       <p:sp>
         <p:nvSpPr>
-          <p:cNvPr id="3" name="Rectangle 2">
+          <p:cNvPr id="10" name="Rectangle 9">
             <a:extLst>
               <a:ext uri="{FF2B5EF4-FFF2-40B4-BE49-F238E27FC236}">
-                <a16:creationId xmlns:a16="http://schemas.microsoft.com/office/drawing/2014/main" id="{FE2AFABD-7AD6-4471-9266-5CEA9FB8BE11}"/>
-              </a:ext>
-            </a:extLst>
-          </p:cNvPr>
-          <p:cNvSpPr>
-            <a:spLocks noGrp="1"/>
-          </p:cNvSpPr>
-          <p:nvPr/>
-        </p:nvSpPr>
-        <p:spPr>
-          <a:xfrm>
-            <a:off x="590550" y="1524000"/>
-            <a:ext cx="4000500" cy="1285875"/>
-          </a:xfrm>
-          <a:prstGeom prst="rect">
-            <a:avLst/>
-          </a:prstGeom>
-          <a:noFill/>
-          <a:ln w="0">
-            <a:noFill/>
-          </a:ln>
-        </p:spPr>
-        <p:txBody>
-          <a:bodyPr lIns="28575" tIns="19050" rIns="28575" bIns="19050" anchor="t">
-            <a:normAutofit/>
-          </a:bodyPr>
-          <a:lstStyle/>
-          <a:p>
-            <a:pPr marL="254000" indent="-152400" algn="l">
-              <a:spcAft>
-                <a:spcPts val="520"/>
-              </a:spcAft>
-              <a:buChar char="•"/>
-              <a:defRPr sz="1800" b="0">
-                <a:solidFill>
-                  <a:srgbClr val="111111"/>
-                </a:solidFill>
-                <a:latin typeface="Tahoma"/>
-                <a:ea typeface="Tahoma"/>
-                <a:cs typeface="Tahoma"/>
-              </a:defRPr>
-            </a:pPr>
-            <a:r>
-              <a:rPr sz="1800" b="0">
-                <a:solidFill>
-                  <a:srgbClr val="111111"/>
-                </a:solidFill>
-                <a:latin typeface="Tahoma"/>
-                <a:ea typeface="Tahoma"/>
-                <a:cs typeface="Tahoma"/>
-              </a:rPr>
-              <a:t>Σελίδες 139–141</a:t>
-            </a:r>
-          </a:p>
-          <a:p>
-            <a:pPr marL="254000" indent="-152400" algn="l">
-              <a:spcAft>
-                <a:spcPts val="520"/>
-              </a:spcAft>
-              <a:buChar char="•"/>
-              <a:defRPr sz="1800" b="0">
-                <a:solidFill>
-                  <a:srgbClr val="111111"/>
-                </a:solidFill>
-                <a:latin typeface="Tahoma"/>
-                <a:ea typeface="Tahoma"/>
-                <a:cs typeface="Tahoma"/>
-              </a:defRPr>
-            </a:pPr>
-            <a:r>
-              <a:rPr sz="1800" b="0">
-                <a:solidFill>
-                  <a:srgbClr val="111111"/>
-                </a:solidFill>
-                <a:latin typeface="Tahoma"/>
-                <a:ea typeface="Tahoma"/>
-                <a:cs typeface="Tahoma"/>
-              </a:rPr>
-              <a:t>Δραστηριότητες 1–18</a:t>
-            </a:r>
-          </a:p>
-        </p:txBody>
-      </p:sp>
-      <p:sp>
-        <p:nvSpPr>
-          <p:cNvPr id="4" name="Rectangle 3">
-            <a:extLst>
-              <a:ext uri="{FF2B5EF4-FFF2-40B4-BE49-F238E27FC236}">
-                <a16:creationId xmlns:a16="http://schemas.microsoft.com/office/drawing/2014/main" id="{F2A00303-0C66-4C63-9EA9-EEFD51C61147}"/>
-              </a:ext>
-            </a:extLst>
-          </p:cNvPr>
-          <p:cNvSpPr>
-            <a:spLocks noGrp="1"/>
-          </p:cNvSpPr>
-          <p:nvPr/>
-        </p:nvSpPr>
-        <p:spPr>
-          <a:xfrm>
-            <a:off x="590550" y="3143250"/>
-            <a:ext cx="4000500" cy="1238250"/>
-          </a:xfrm>
-          <a:prstGeom prst="rect">
-            <a:avLst/>
-          </a:prstGeom>
-          <a:noFill/>
-          <a:ln w="0">
-            <a:noFill/>
-          </a:ln>
-        </p:spPr>
-        <p:txBody>
-          <a:bodyPr lIns="38100" tIns="19050" rIns="38100" bIns="19050" anchor="t">
-            <a:normAutofit/>
-          </a:bodyPr>
-          <a:lstStyle/>
-          <a:p>
-            <a:pPr algn="l">
-              <a:defRPr sz="1575" b="0">
-                <a:solidFill>
-                  <a:srgbClr val="444444"/>
-                </a:solidFill>
-                <a:latin typeface="Tahoma"/>
-                <a:ea typeface="Tahoma"/>
-                <a:cs typeface="Tahoma"/>
-              </a:defRPr>
-            </a:pPr>
-            <a:r>
-              <a:rPr sz="1575" b="0">
-                <a:solidFill>
-                  <a:srgbClr val="444444"/>
-                </a:solidFill>
-                <a:latin typeface="Tahoma"/>
-                <a:ea typeface="Tahoma"/>
-                <a:cs typeface="Tahoma"/>
-              </a:rPr>
-              <a:t>Εφαρμογή: επισύναψη αρχείων και άνοιγμα ή αποθήκευση συνημμένων στον σωστό φάκελο.</a:t>
-            </a:r>
-          </a:p>
-        </p:txBody>
-      </p:sp>
-      <p:sp>
-        <p:nvSpPr>
-          <p:cNvPr id="8" name="Rectangle 7">
-            <a:extLst>
-              <a:ext uri="{FF2B5EF4-FFF2-40B4-BE49-F238E27FC236}">
-                <a16:creationId xmlns:a16="http://schemas.microsoft.com/office/drawing/2014/main" id="{31CF78B2-B668-4C5B-B5A9-B117EFAC117E}"/>
-              </a:ext>
-            </a:extLst>
-          </p:cNvPr>
-          <p:cNvSpPr>
-            <a:spLocks noGrp="1"/>
-          </p:cNvSpPr>
-          <p:nvPr/>
-        </p:nvSpPr>
-        <p:spPr>
-          <a:xfrm>
-            <a:off x="552450" y="6429375"/>
-            <a:ext cx="11087100" cy="47625"/>
-          </a:xfrm>
-          <a:prstGeom prst="rect">
-            <a:avLst/>
-          </a:prstGeom>
-          <a:solidFill>
-            <a:srgbClr val="F57C24"/>
-          </a:solidFill>
-          <a:ln w="0">
-            <a:noFill/>
-          </a:ln>
-        </p:spPr>
-        <p:txBody>
-          <a:bodyPr/>
-          <a:lstStyle/>
-          <a:p>
-            <a:endParaRPr lang="en-GB"/>
-          </a:p>
-        </p:txBody>
-      </p:sp>
-      <p:sp>
-        <p:nvSpPr>
-          <p:cNvPr id="9" name="Rectangle 8">
-            <a:extLst>
-              <a:ext uri="{FF2B5EF4-FFF2-40B4-BE49-F238E27FC236}">
-                <a16:creationId xmlns:a16="http://schemas.microsoft.com/office/drawing/2014/main" id="{D773CAFF-40FA-43E9-94AE-093C10ED2B2C}"/>
+                <a16:creationId xmlns:a16="http://schemas.microsoft.com/office/drawing/2014/main" id="{74379F0B-CCD9-479B-940F-9EBA47C725AF}"/>
               </a:ext>
             </a:extLst>
           </p:cNvPr>
@@ -4062,7 +7274,7 @@
     </p:spTree>
     <p:extLst>
       <p:ext uri="{BB962C8B-B14F-4D97-AF65-F5344CB8AC3E}">
-        <p14:creationId xmlns:p14="http://schemas.microsoft.com/office/powerpoint/2010/main" val="1863739521"/>
+        <p14:creationId xmlns:p14="http://schemas.microsoft.com/office/powerpoint/2010/main" val="820401625"/>
       </p:ext>
     </p:extLst>
   </p:cSld>
